--- a/reference/archie/presentations/NPQG Fundamentals - Time and Space.pptx
+++ b/reference/archie/presentations/NPQG Fundamentals - Time and Space.pptx
@@ -3,22 +3,20 @@
 <p:presentation xmlns:a="http://schemas.openxmlformats.org/drawingml/2006/main" xmlns:r="http://schemas.openxmlformats.org/officeDocument/2006/relationships" xmlns:p="http://schemas.openxmlformats.org/presentationml/2006/main" saveSubsetFonts="1" autoCompressPictures="0">
   <p:sldMasterIdLst>
     <p:sldMasterId id="2147483648" r:id="rId1"/>
-    <p:sldMasterId id="2147483664" r:id="rId2"/>
   </p:sldMasterIdLst>
   <p:notesMasterIdLst>
-    <p:notesMasterId r:id="rId13"/>
+    <p:notesMasterId r:id="rId11"/>
   </p:notesMasterIdLst>
   <p:sldIdLst>
-    <p:sldId id="807" r:id="rId3"/>
-    <p:sldId id="793" r:id="rId4"/>
-    <p:sldId id="808" r:id="rId5"/>
-    <p:sldId id="735" r:id="rId6"/>
-    <p:sldId id="809" r:id="rId7"/>
-    <p:sldId id="811" r:id="rId8"/>
-    <p:sldId id="737" r:id="rId9"/>
-    <p:sldId id="810" r:id="rId10"/>
-    <p:sldId id="258" r:id="rId11"/>
-    <p:sldId id="382" r:id="rId12"/>
+    <p:sldId id="807" r:id="rId2"/>
+    <p:sldId id="793" r:id="rId3"/>
+    <p:sldId id="808" r:id="rId4"/>
+    <p:sldId id="735" r:id="rId5"/>
+    <p:sldId id="809" r:id="rId6"/>
+    <p:sldId id="811" r:id="rId7"/>
+    <p:sldId id="737" r:id="rId8"/>
+    <p:sldId id="810" r:id="rId9"/>
+    <p:sldId id="258" r:id="rId10"/>
   </p:sldIdLst>
   <p:sldSz cx="12192000" cy="6858000"/>
   <p:notesSz cx="6858000" cy="9144000"/>
@@ -4215,7 +4213,7 @@
           <a:p>
             <a:fld id="{BBBDA440-6FDE-5E41-BA40-A3C0E02BAB9F}" type="datetimeFigureOut">
               <a:rPr lang="en-US" smtClean="0"/>
-              <a:t>3/14/26</a:t>
+              <a:t>7/3/26</a:t>
             </a:fld>
             <a:endParaRPr lang="en-US"/>
           </a:p>
@@ -4767,7 +4765,7 @@
           <a:p>
             <a:fld id="{CB70D3E6-D921-5B44-AC8D-B7FDAFC8A532}" type="datetimeFigureOut">
               <a:rPr lang="en-US" smtClean="0"/>
-              <a:t>3/14/26</a:t>
+              <a:t>7/3/26</a:t>
             </a:fld>
             <a:endParaRPr lang="en-US"/>
           </a:p>
@@ -4965,7 +4963,7 @@
           <a:p>
             <a:fld id="{CB70D3E6-D921-5B44-AC8D-B7FDAFC8A532}" type="datetimeFigureOut">
               <a:rPr lang="en-US" smtClean="0"/>
-              <a:t>3/14/26</a:t>
+              <a:t>7/3/26</a:t>
             </a:fld>
             <a:endParaRPr lang="en-US"/>
           </a:p>
@@ -5173,7 +5171,7 @@
           <a:p>
             <a:fld id="{CB70D3E6-D921-5B44-AC8D-B7FDAFC8A532}" type="datetimeFigureOut">
               <a:rPr lang="en-US" smtClean="0"/>
-              <a:t>3/14/26</a:t>
+              <a:t>7/3/26</a:t>
             </a:fld>
             <a:endParaRPr lang="en-US"/>
           </a:p>
@@ -5237,597 +5235,6 @@
     <p:extLst>
       <p:ext uri="{BB962C8B-B14F-4D97-AF65-F5344CB8AC3E}">
         <p14:creationId xmlns:p14="http://schemas.microsoft.com/office/powerpoint/2010/main" val="2063727443"/>
-      </p:ext>
-    </p:extLst>
-  </p:cSld>
-  <p:clrMapOvr>
-    <a:masterClrMapping/>
-  </p:clrMapOvr>
-</p:sldLayout>
-</file>
-
-<file path=ppt/slideLayouts/slideLayout12.xml><?xml version="1.0" encoding="utf-8"?>
-<p:sldLayout xmlns:a="http://schemas.openxmlformats.org/drawingml/2006/main" xmlns:r="http://schemas.openxmlformats.org/officeDocument/2006/relationships" xmlns:p="http://schemas.openxmlformats.org/presentationml/2006/main" type="title" preserve="1">
-  <p:cSld name="Title Slide">
-    <p:spTree>
-      <p:nvGrpSpPr>
-        <p:cNvPr id="1" name=""/>
-        <p:cNvGrpSpPr/>
-        <p:nvPr/>
-      </p:nvGrpSpPr>
-      <p:grpSpPr>
-        <a:xfrm>
-          <a:off x="0" y="0"/>
-          <a:ext cx="0" cy="0"/>
-          <a:chOff x="0" y="0"/>
-          <a:chExt cx="0" cy="0"/>
-        </a:xfrm>
-      </p:grpSpPr>
-      <p:sp>
-        <p:nvSpPr>
-          <p:cNvPr id="2" name="Title 1">
-            <a:extLst>
-              <a:ext uri="{FF2B5EF4-FFF2-40B4-BE49-F238E27FC236}">
-                <a16:creationId xmlns:a16="http://schemas.microsoft.com/office/drawing/2014/main" id="{08FC2668-EBEB-AE41-BF76-89062B014B13}"/>
-              </a:ext>
-            </a:extLst>
-          </p:cNvPr>
-          <p:cNvSpPr>
-            <a:spLocks noGrp="1"/>
-          </p:cNvSpPr>
-          <p:nvPr>
-            <p:ph type="ctrTitle"/>
-          </p:nvPr>
-        </p:nvSpPr>
-        <p:spPr>
-          <a:xfrm>
-            <a:off x="1524000" y="1122363"/>
-            <a:ext cx="9144000" cy="2387600"/>
-          </a:xfrm>
-        </p:spPr>
-        <p:txBody>
-          <a:bodyPr anchor="b"/>
-          <a:lstStyle>
-            <a:lvl1pPr algn="ctr">
-              <a:defRPr sz="6000"/>
-            </a:lvl1pPr>
-          </a:lstStyle>
-          <a:p>
-            <a:r>
-              <a:rPr lang="en-US" dirty="0"/>
-              <a:t>Click to edit Master title style</a:t>
-            </a:r>
-          </a:p>
-        </p:txBody>
-      </p:sp>
-      <p:sp>
-        <p:nvSpPr>
-          <p:cNvPr id="3" name="Subtitle 2">
-            <a:extLst>
-              <a:ext uri="{FF2B5EF4-FFF2-40B4-BE49-F238E27FC236}">
-                <a16:creationId xmlns:a16="http://schemas.microsoft.com/office/drawing/2014/main" id="{C8C28A4C-0805-8E44-B54E-3B6F671F8D01}"/>
-              </a:ext>
-            </a:extLst>
-          </p:cNvPr>
-          <p:cNvSpPr>
-            <a:spLocks noGrp="1"/>
-          </p:cNvSpPr>
-          <p:nvPr>
-            <p:ph type="subTitle" idx="1"/>
-          </p:nvPr>
-        </p:nvSpPr>
-        <p:spPr>
-          <a:xfrm>
-            <a:off x="1524000" y="3602038"/>
-            <a:ext cx="9144000" cy="1655762"/>
-          </a:xfrm>
-        </p:spPr>
-        <p:txBody>
-          <a:bodyPr/>
-          <a:lstStyle>
-            <a:lvl1pPr marL="0" indent="0" algn="ctr">
-              <a:buNone/>
-              <a:defRPr sz="2400"/>
-            </a:lvl1pPr>
-            <a:lvl2pPr marL="457200" indent="0" algn="ctr">
-              <a:buNone/>
-              <a:defRPr sz="2000"/>
-            </a:lvl2pPr>
-            <a:lvl3pPr marL="914400" indent="0" algn="ctr">
-              <a:buNone/>
-              <a:defRPr sz="1800"/>
-            </a:lvl3pPr>
-            <a:lvl4pPr marL="1371600" indent="0" algn="ctr">
-              <a:buNone/>
-              <a:defRPr sz="1600"/>
-            </a:lvl4pPr>
-            <a:lvl5pPr marL="1828800" indent="0" algn="ctr">
-              <a:buNone/>
-              <a:defRPr sz="1600"/>
-            </a:lvl5pPr>
-            <a:lvl6pPr marL="2286000" indent="0" algn="ctr">
-              <a:buNone/>
-              <a:defRPr sz="1600"/>
-            </a:lvl6pPr>
-            <a:lvl7pPr marL="2743200" indent="0" algn="ctr">
-              <a:buNone/>
-              <a:defRPr sz="1600"/>
-            </a:lvl7pPr>
-            <a:lvl8pPr marL="3200400" indent="0" algn="ctr">
-              <a:buNone/>
-              <a:defRPr sz="1600"/>
-            </a:lvl8pPr>
-            <a:lvl9pPr marL="3657600" indent="0" algn="ctr">
-              <a:buNone/>
-              <a:defRPr sz="1600"/>
-            </a:lvl9pPr>
-          </a:lstStyle>
-          <a:p>
-            <a:r>
-              <a:rPr lang="en-US"/>
-              <a:t>Click to edit Master subtitle style</a:t>
-            </a:r>
-          </a:p>
-        </p:txBody>
-      </p:sp>
-      <p:sp>
-        <p:nvSpPr>
-          <p:cNvPr id="4" name="Date Placeholder 3">
-            <a:extLst>
-              <a:ext uri="{FF2B5EF4-FFF2-40B4-BE49-F238E27FC236}">
-                <a16:creationId xmlns:a16="http://schemas.microsoft.com/office/drawing/2014/main" id="{293B74C2-6265-7F41-BB8F-D8A0A0C89A63}"/>
-              </a:ext>
-            </a:extLst>
-          </p:cNvPr>
-          <p:cNvSpPr>
-            <a:spLocks noGrp="1"/>
-          </p:cNvSpPr>
-          <p:nvPr>
-            <p:ph type="dt" sz="half" idx="10"/>
-          </p:nvPr>
-        </p:nvSpPr>
-        <p:spPr/>
-        <p:txBody>
-          <a:bodyPr/>
-          <a:lstStyle/>
-          <a:p>
-            <a:fld id="{B1CFC895-F8E0-4049-8BEE-E5499394E46C}" type="datetime1">
-              <a:rPr lang="en-US" smtClean="0"/>
-              <a:t>3/14/26</a:t>
-            </a:fld>
-            <a:endParaRPr lang="en-US"/>
-          </a:p>
-        </p:txBody>
-      </p:sp>
-      <p:sp>
-        <p:nvSpPr>
-          <p:cNvPr id="5" name="Footer Placeholder 4">
-            <a:extLst>
-              <a:ext uri="{FF2B5EF4-FFF2-40B4-BE49-F238E27FC236}">
-                <a16:creationId xmlns:a16="http://schemas.microsoft.com/office/drawing/2014/main" id="{74C53590-4180-6C42-A6BF-707655C15A1D}"/>
-              </a:ext>
-            </a:extLst>
-          </p:cNvPr>
-          <p:cNvSpPr>
-            <a:spLocks noGrp="1"/>
-          </p:cNvSpPr>
-          <p:nvPr>
-            <p:ph type="ftr" sz="quarter" idx="11"/>
-          </p:nvPr>
-        </p:nvSpPr>
-        <p:spPr/>
-        <p:txBody>
-          <a:bodyPr/>
-          <a:lstStyle>
-            <a:lvl1pPr>
-              <a:defRPr/>
-            </a:lvl1pPr>
-          </a:lstStyle>
-          <a:p>
-            <a:r>
-              <a:rPr lang="en-US"/>
-              <a:t>J Mark Morris - Model of Nature - April 2019</a:t>
-            </a:r>
-          </a:p>
-        </p:txBody>
-      </p:sp>
-      <p:sp>
-        <p:nvSpPr>
-          <p:cNvPr id="6" name="Slide Number Placeholder 5">
-            <a:extLst>
-              <a:ext uri="{FF2B5EF4-FFF2-40B4-BE49-F238E27FC236}">
-                <a16:creationId xmlns:a16="http://schemas.microsoft.com/office/drawing/2014/main" id="{93A81401-8545-2D4E-A7FB-31AFC7A8DB71}"/>
-              </a:ext>
-            </a:extLst>
-          </p:cNvPr>
-          <p:cNvSpPr>
-            <a:spLocks noGrp="1"/>
-          </p:cNvSpPr>
-          <p:nvPr>
-            <p:ph type="sldNum" sz="quarter" idx="12"/>
-          </p:nvPr>
-        </p:nvSpPr>
-        <p:spPr/>
-        <p:txBody>
-          <a:bodyPr/>
-          <a:lstStyle/>
-          <a:p>
-            <a:fld id="{D73D4D4B-2FF7-BE46-958C-B004BD45EF6F}" type="slidenum">
-              <a:rPr lang="en-US" smtClean="0"/>
-              <a:t>‹#›</a:t>
-            </a:fld>
-            <a:endParaRPr lang="en-US"/>
-          </a:p>
-        </p:txBody>
-      </p:sp>
-    </p:spTree>
-    <p:extLst>
-      <p:ext uri="{BB962C8B-B14F-4D97-AF65-F5344CB8AC3E}">
-        <p14:creationId xmlns:p14="http://schemas.microsoft.com/office/powerpoint/2010/main" val="3372916978"/>
-      </p:ext>
-    </p:extLst>
-  </p:cSld>
-  <p:clrMapOvr>
-    <a:masterClrMapping/>
-  </p:clrMapOvr>
-</p:sldLayout>
-</file>
-
-<file path=ppt/slideLayouts/slideLayout13.xml><?xml version="1.0" encoding="utf-8"?>
-<p:sldLayout xmlns:a="http://schemas.openxmlformats.org/drawingml/2006/main" xmlns:r="http://schemas.openxmlformats.org/officeDocument/2006/relationships" xmlns:p="http://schemas.openxmlformats.org/presentationml/2006/main" type="obj" preserve="1">
-  <p:cSld name="Title and Content">
-    <p:spTree>
-      <p:nvGrpSpPr>
-        <p:cNvPr id="1" name=""/>
-        <p:cNvGrpSpPr/>
-        <p:nvPr/>
-      </p:nvGrpSpPr>
-      <p:grpSpPr>
-        <a:xfrm>
-          <a:off x="0" y="0"/>
-          <a:ext cx="0" cy="0"/>
-          <a:chOff x="0" y="0"/>
-          <a:chExt cx="0" cy="0"/>
-        </a:xfrm>
-      </p:grpSpPr>
-      <p:sp>
-        <p:nvSpPr>
-          <p:cNvPr id="2" name="Title 1">
-            <a:extLst>
-              <a:ext uri="{FF2B5EF4-FFF2-40B4-BE49-F238E27FC236}">
-                <a16:creationId xmlns:a16="http://schemas.microsoft.com/office/drawing/2014/main" id="{EDF560F9-C770-5C4C-9C93-102EC332DBA4}"/>
-              </a:ext>
-            </a:extLst>
-          </p:cNvPr>
-          <p:cNvSpPr>
-            <a:spLocks noGrp="1"/>
-          </p:cNvSpPr>
-          <p:nvPr>
-            <p:ph type="title"/>
-          </p:nvPr>
-        </p:nvSpPr>
-        <p:spPr>
-          <a:xfrm>
-            <a:off x="838200" y="365125"/>
-            <a:ext cx="10515600" cy="777875"/>
-          </a:xfrm>
-        </p:spPr>
-        <p:txBody>
-          <a:bodyPr/>
-          <a:lstStyle/>
-          <a:p>
-            <a:r>
-              <a:rPr lang="en-US" dirty="0"/>
-              <a:t>Click to edit Master title style</a:t>
-            </a:r>
-          </a:p>
-        </p:txBody>
-      </p:sp>
-      <p:sp>
-        <p:nvSpPr>
-          <p:cNvPr id="3" name="Content Placeholder 2">
-            <a:extLst>
-              <a:ext uri="{FF2B5EF4-FFF2-40B4-BE49-F238E27FC236}">
-                <a16:creationId xmlns:a16="http://schemas.microsoft.com/office/drawing/2014/main" id="{80D38EDA-56F1-1C40-B81E-28B921C4E99F}"/>
-              </a:ext>
-            </a:extLst>
-          </p:cNvPr>
-          <p:cNvSpPr>
-            <a:spLocks noGrp="1"/>
-          </p:cNvSpPr>
-          <p:nvPr>
-            <p:ph idx="1"/>
-          </p:nvPr>
-        </p:nvSpPr>
-        <p:spPr>
-          <a:xfrm>
-            <a:off x="838200" y="1295400"/>
-            <a:ext cx="10515600" cy="4881563"/>
-          </a:xfrm>
-        </p:spPr>
-        <p:txBody>
-          <a:bodyPr/>
-          <a:lstStyle/>
-          <a:p>
-            <a:pPr lvl="0"/>
-            <a:r>
-              <a:rPr lang="en-US" dirty="0"/>
-              <a:t>Edit Master text styles</a:t>
-            </a:r>
-          </a:p>
-          <a:p>
-            <a:pPr lvl="1"/>
-            <a:r>
-              <a:rPr lang="en-US" dirty="0"/>
-              <a:t>Second level</a:t>
-            </a:r>
-          </a:p>
-          <a:p>
-            <a:pPr lvl="2"/>
-            <a:r>
-              <a:rPr lang="en-US" dirty="0"/>
-              <a:t>Third level</a:t>
-            </a:r>
-          </a:p>
-          <a:p>
-            <a:pPr lvl="3"/>
-            <a:r>
-              <a:rPr lang="en-US" dirty="0"/>
-              <a:t>Fourth level</a:t>
-            </a:r>
-          </a:p>
-          <a:p>
-            <a:pPr lvl="4"/>
-            <a:r>
-              <a:rPr lang="en-US" dirty="0"/>
-              <a:t>Fifth level</a:t>
-            </a:r>
-          </a:p>
-        </p:txBody>
-      </p:sp>
-      <p:sp>
-        <p:nvSpPr>
-          <p:cNvPr id="4" name="Date Placeholder 3">
-            <a:extLst>
-              <a:ext uri="{FF2B5EF4-FFF2-40B4-BE49-F238E27FC236}">
-                <a16:creationId xmlns:a16="http://schemas.microsoft.com/office/drawing/2014/main" id="{0AD42772-5D80-F641-A1BB-6048573C4E88}"/>
-              </a:ext>
-            </a:extLst>
-          </p:cNvPr>
-          <p:cNvSpPr>
-            <a:spLocks noGrp="1"/>
-          </p:cNvSpPr>
-          <p:nvPr>
-            <p:ph type="dt" sz="half" idx="10"/>
-          </p:nvPr>
-        </p:nvSpPr>
-        <p:spPr/>
-        <p:txBody>
-          <a:bodyPr/>
-          <a:lstStyle/>
-          <a:p>
-            <a:fld id="{A91F55E2-A889-F24B-B1FE-1E878178F308}" type="datetime1">
-              <a:rPr lang="en-US" smtClean="0"/>
-              <a:t>3/14/26</a:t>
-            </a:fld>
-            <a:endParaRPr lang="en-US"/>
-          </a:p>
-        </p:txBody>
-      </p:sp>
-      <p:sp>
-        <p:nvSpPr>
-          <p:cNvPr id="5" name="Footer Placeholder 4">
-            <a:extLst>
-              <a:ext uri="{FF2B5EF4-FFF2-40B4-BE49-F238E27FC236}">
-                <a16:creationId xmlns:a16="http://schemas.microsoft.com/office/drawing/2014/main" id="{C68FC4AF-90CF-484C-B6C7-5CE1A016FB49}"/>
-              </a:ext>
-            </a:extLst>
-          </p:cNvPr>
-          <p:cNvSpPr>
-            <a:spLocks noGrp="1"/>
-          </p:cNvSpPr>
-          <p:nvPr>
-            <p:ph type="ftr" sz="quarter" idx="11"/>
-          </p:nvPr>
-        </p:nvSpPr>
-        <p:spPr/>
-        <p:txBody>
-          <a:bodyPr/>
-          <a:lstStyle/>
-          <a:p>
-            <a:r>
-              <a:rPr lang="en-US"/>
-              <a:t>J Mark Morris - Model of Nature - April 2019</a:t>
-            </a:r>
-          </a:p>
-        </p:txBody>
-      </p:sp>
-      <p:sp>
-        <p:nvSpPr>
-          <p:cNvPr id="6" name="Slide Number Placeholder 5">
-            <a:extLst>
-              <a:ext uri="{FF2B5EF4-FFF2-40B4-BE49-F238E27FC236}">
-                <a16:creationId xmlns:a16="http://schemas.microsoft.com/office/drawing/2014/main" id="{8169AF1E-33D8-3041-A601-1384C718A8B5}"/>
-              </a:ext>
-            </a:extLst>
-          </p:cNvPr>
-          <p:cNvSpPr>
-            <a:spLocks noGrp="1"/>
-          </p:cNvSpPr>
-          <p:nvPr>
-            <p:ph type="sldNum" sz="quarter" idx="12"/>
-          </p:nvPr>
-        </p:nvSpPr>
-        <p:spPr/>
-        <p:txBody>
-          <a:bodyPr/>
-          <a:lstStyle/>
-          <a:p>
-            <a:fld id="{D73D4D4B-2FF7-BE46-958C-B004BD45EF6F}" type="slidenum">
-              <a:rPr lang="en-US" smtClean="0"/>
-              <a:t>‹#›</a:t>
-            </a:fld>
-            <a:endParaRPr lang="en-US"/>
-          </a:p>
-        </p:txBody>
-      </p:sp>
-    </p:spTree>
-    <p:extLst>
-      <p:ext uri="{BB962C8B-B14F-4D97-AF65-F5344CB8AC3E}">
-        <p14:creationId xmlns:p14="http://schemas.microsoft.com/office/powerpoint/2010/main" val="497139919"/>
-      </p:ext>
-    </p:extLst>
-  </p:cSld>
-  <p:clrMapOvr>
-    <a:masterClrMapping/>
-  </p:clrMapOvr>
-</p:sldLayout>
-</file>
-
-<file path=ppt/slideLayouts/slideLayout14.xml><?xml version="1.0" encoding="utf-8"?>
-<p:sldLayout xmlns:a="http://schemas.openxmlformats.org/drawingml/2006/main" xmlns:r="http://schemas.openxmlformats.org/officeDocument/2006/relationships" xmlns:p="http://schemas.openxmlformats.org/presentationml/2006/main" type="titleOnly" preserve="1">
-  <p:cSld name="Title Only">
-    <p:spTree>
-      <p:nvGrpSpPr>
-        <p:cNvPr id="1" name=""/>
-        <p:cNvGrpSpPr/>
-        <p:nvPr/>
-      </p:nvGrpSpPr>
-      <p:grpSpPr>
-        <a:xfrm>
-          <a:off x="0" y="0"/>
-          <a:ext cx="0" cy="0"/>
-          <a:chOff x="0" y="0"/>
-          <a:chExt cx="0" cy="0"/>
-        </a:xfrm>
-      </p:grpSpPr>
-      <p:sp>
-        <p:nvSpPr>
-          <p:cNvPr id="2" name="Title 1">
-            <a:extLst>
-              <a:ext uri="{FF2B5EF4-FFF2-40B4-BE49-F238E27FC236}">
-                <a16:creationId xmlns:a16="http://schemas.microsoft.com/office/drawing/2014/main" id="{5821822D-6D7A-1342-98EF-890C6F2DA174}"/>
-              </a:ext>
-            </a:extLst>
-          </p:cNvPr>
-          <p:cNvSpPr>
-            <a:spLocks noGrp="1"/>
-          </p:cNvSpPr>
-          <p:nvPr>
-            <p:ph type="title"/>
-          </p:nvPr>
-        </p:nvSpPr>
-        <p:spPr>
-          <a:xfrm>
-            <a:off x="838200" y="365125"/>
-            <a:ext cx="10515600" cy="777875"/>
-          </a:xfrm>
-        </p:spPr>
-        <p:txBody>
-          <a:bodyPr/>
-          <a:lstStyle/>
-          <a:p>
-            <a:r>
-              <a:rPr lang="en-US"/>
-              <a:t>Click to edit Master title style</a:t>
-            </a:r>
-          </a:p>
-        </p:txBody>
-      </p:sp>
-      <p:sp>
-        <p:nvSpPr>
-          <p:cNvPr id="3" name="Date Placeholder 2">
-            <a:extLst>
-              <a:ext uri="{FF2B5EF4-FFF2-40B4-BE49-F238E27FC236}">
-                <a16:creationId xmlns:a16="http://schemas.microsoft.com/office/drawing/2014/main" id="{74CF19EA-9170-5B4B-814F-7425C8E22823}"/>
-              </a:ext>
-            </a:extLst>
-          </p:cNvPr>
-          <p:cNvSpPr>
-            <a:spLocks noGrp="1"/>
-          </p:cNvSpPr>
-          <p:nvPr>
-            <p:ph type="dt" sz="half" idx="10"/>
-          </p:nvPr>
-        </p:nvSpPr>
-        <p:spPr/>
-        <p:txBody>
-          <a:bodyPr/>
-          <a:lstStyle/>
-          <a:p>
-            <a:fld id="{C6E8461C-3391-334C-9885-001B32D724C4}" type="datetime1">
-              <a:rPr lang="en-US" smtClean="0"/>
-              <a:t>3/14/26</a:t>
-            </a:fld>
-            <a:endParaRPr lang="en-US"/>
-          </a:p>
-        </p:txBody>
-      </p:sp>
-      <p:sp>
-        <p:nvSpPr>
-          <p:cNvPr id="4" name="Footer Placeholder 3">
-            <a:extLst>
-              <a:ext uri="{FF2B5EF4-FFF2-40B4-BE49-F238E27FC236}">
-                <a16:creationId xmlns:a16="http://schemas.microsoft.com/office/drawing/2014/main" id="{5882B1FB-ECDF-AD43-9020-0267ED91C04E}"/>
-              </a:ext>
-            </a:extLst>
-          </p:cNvPr>
-          <p:cNvSpPr>
-            <a:spLocks noGrp="1"/>
-          </p:cNvSpPr>
-          <p:nvPr>
-            <p:ph type="ftr" sz="quarter" idx="11"/>
-          </p:nvPr>
-        </p:nvSpPr>
-        <p:spPr/>
-        <p:txBody>
-          <a:bodyPr/>
-          <a:lstStyle>
-            <a:lvl1pPr>
-              <a:defRPr/>
-            </a:lvl1pPr>
-          </a:lstStyle>
-          <a:p>
-            <a:r>
-              <a:rPr lang="en-US"/>
-              <a:t>J Mark Morris - Model of Nature - April 2019</a:t>
-            </a:r>
-          </a:p>
-        </p:txBody>
-      </p:sp>
-      <p:sp>
-        <p:nvSpPr>
-          <p:cNvPr id="5" name="Slide Number Placeholder 4">
-            <a:extLst>
-              <a:ext uri="{FF2B5EF4-FFF2-40B4-BE49-F238E27FC236}">
-                <a16:creationId xmlns:a16="http://schemas.microsoft.com/office/drawing/2014/main" id="{D949C470-5AF0-5246-81E7-95EAEE5639EF}"/>
-              </a:ext>
-            </a:extLst>
-          </p:cNvPr>
-          <p:cNvSpPr>
-            <a:spLocks noGrp="1"/>
-          </p:cNvSpPr>
-          <p:nvPr>
-            <p:ph type="sldNum" sz="quarter" idx="12"/>
-          </p:nvPr>
-        </p:nvSpPr>
-        <p:spPr/>
-        <p:txBody>
-          <a:bodyPr/>
-          <a:lstStyle/>
-          <a:p>
-            <a:fld id="{D73D4D4B-2FF7-BE46-958C-B004BD45EF6F}" type="slidenum">
-              <a:rPr lang="en-US" smtClean="0"/>
-              <a:t>‹#›</a:t>
-            </a:fld>
-            <a:endParaRPr lang="en-US"/>
-          </a:p>
-        </p:txBody>
-      </p:sp>
-    </p:spTree>
-    <p:extLst>
-      <p:ext uri="{BB962C8B-B14F-4D97-AF65-F5344CB8AC3E}">
-        <p14:creationId xmlns:p14="http://schemas.microsoft.com/office/powerpoint/2010/main" val="1963469369"/>
       </p:ext>
     </p:extLst>
   </p:cSld>
@@ -5962,7 +5369,7 @@
           <a:p>
             <a:fld id="{CB70D3E6-D921-5B44-AC8D-B7FDAFC8A532}" type="datetimeFigureOut">
               <a:rPr lang="en-US" smtClean="0"/>
-              <a:t>3/14/26</a:t>
+              <a:t>7/3/26</a:t>
             </a:fld>
             <a:endParaRPr lang="en-US"/>
           </a:p>
@@ -6237,7 +5644,7 @@
           <a:p>
             <a:fld id="{CB70D3E6-D921-5B44-AC8D-B7FDAFC8A532}" type="datetimeFigureOut">
               <a:rPr lang="en-US" smtClean="0"/>
-              <a:t>3/14/26</a:t>
+              <a:t>7/3/26</a:t>
             </a:fld>
             <a:endParaRPr lang="en-US"/>
           </a:p>
@@ -6502,7 +5909,7 @@
           <a:p>
             <a:fld id="{CB70D3E6-D921-5B44-AC8D-B7FDAFC8A532}" type="datetimeFigureOut">
               <a:rPr lang="en-US" smtClean="0"/>
-              <a:t>3/14/26</a:t>
+              <a:t>7/3/26</a:t>
             </a:fld>
             <a:endParaRPr lang="en-US"/>
           </a:p>
@@ -6914,7 +6321,7 @@
           <a:p>
             <a:fld id="{CB70D3E6-D921-5B44-AC8D-B7FDAFC8A532}" type="datetimeFigureOut">
               <a:rPr lang="en-US" smtClean="0"/>
-              <a:t>3/14/26</a:t>
+              <a:t>7/3/26</a:t>
             </a:fld>
             <a:endParaRPr lang="en-US"/>
           </a:p>
@@ -7055,7 +6462,7 @@
           <a:p>
             <a:fld id="{CB70D3E6-D921-5B44-AC8D-B7FDAFC8A532}" type="datetimeFigureOut">
               <a:rPr lang="en-US" smtClean="0"/>
-              <a:t>3/14/26</a:t>
+              <a:t>7/3/26</a:t>
             </a:fld>
             <a:endParaRPr lang="en-US"/>
           </a:p>
@@ -7168,7 +6575,7 @@
           <a:p>
             <a:fld id="{CB70D3E6-D921-5B44-AC8D-B7FDAFC8A532}" type="datetimeFigureOut">
               <a:rPr lang="en-US" smtClean="0"/>
-              <a:t>3/14/26</a:t>
+              <a:t>7/3/26</a:t>
             </a:fld>
             <a:endParaRPr lang="en-US"/>
           </a:p>
@@ -7479,7 +6886,7 @@
           <a:p>
             <a:fld id="{CB70D3E6-D921-5B44-AC8D-B7FDAFC8A532}" type="datetimeFigureOut">
               <a:rPr lang="en-US" smtClean="0"/>
-              <a:t>3/14/26</a:t>
+              <a:t>7/3/26</a:t>
             </a:fld>
             <a:endParaRPr lang="en-US"/>
           </a:p>
@@ -7767,7 +7174,7 @@
           <a:p>
             <a:fld id="{CB70D3E6-D921-5B44-AC8D-B7FDAFC8A532}" type="datetimeFigureOut">
               <a:rPr lang="en-US" smtClean="0"/>
-              <a:t>3/14/26</a:t>
+              <a:t>7/3/26</a:t>
             </a:fld>
             <a:endParaRPr lang="en-US"/>
           </a:p>
@@ -8008,7 +7415,7 @@
           <a:p>
             <a:fld id="{CB70D3E6-D921-5B44-AC8D-B7FDAFC8A532}" type="datetimeFigureOut">
               <a:rPr lang="en-US" smtClean="0"/>
-              <a:t>3/14/26</a:t>
+              <a:t>7/3/26</a:t>
             </a:fld>
             <a:endParaRPr lang="en-US"/>
           </a:p>
@@ -8408,580 +7815,6 @@
 </p:sldMaster>
 </file>
 
-<file path=ppt/slideMasters/slideMaster2.xml><?xml version="1.0" encoding="utf-8"?>
-<p:sldMaster xmlns:a="http://schemas.openxmlformats.org/drawingml/2006/main" xmlns:r="http://schemas.openxmlformats.org/officeDocument/2006/relationships" xmlns:p="http://schemas.openxmlformats.org/presentationml/2006/main">
-  <p:cSld>
-    <p:bg>
-      <p:bgRef idx="1001">
-        <a:schemeClr val="bg1"/>
-      </p:bgRef>
-    </p:bg>
-    <p:spTree>
-      <p:nvGrpSpPr>
-        <p:cNvPr id="1" name=""/>
-        <p:cNvGrpSpPr/>
-        <p:nvPr/>
-      </p:nvGrpSpPr>
-      <p:grpSpPr>
-        <a:xfrm>
-          <a:off x="0" y="0"/>
-          <a:ext cx="0" cy="0"/>
-          <a:chOff x="0" y="0"/>
-          <a:chExt cx="0" cy="0"/>
-        </a:xfrm>
-      </p:grpSpPr>
-      <p:sp>
-        <p:nvSpPr>
-          <p:cNvPr id="2" name="Title Placeholder 1">
-            <a:extLst>
-              <a:ext uri="{FF2B5EF4-FFF2-40B4-BE49-F238E27FC236}">
-                <a16:creationId xmlns:a16="http://schemas.microsoft.com/office/drawing/2014/main" id="{4C79A1DB-155B-0846-9CED-8B75F56E0E58}"/>
-              </a:ext>
-            </a:extLst>
-          </p:cNvPr>
-          <p:cNvSpPr>
-            <a:spLocks noGrp="1"/>
-          </p:cNvSpPr>
-          <p:nvPr>
-            <p:ph type="title"/>
-          </p:nvPr>
-        </p:nvSpPr>
-        <p:spPr>
-          <a:xfrm>
-            <a:off x="838200" y="365125"/>
-            <a:ext cx="10515600" cy="1325563"/>
-          </a:xfrm>
-          <a:prstGeom prst="rect">
-            <a:avLst/>
-          </a:prstGeom>
-        </p:spPr>
-        <p:txBody>
-          <a:bodyPr vert="horz" lIns="91440" tIns="45720" rIns="91440" bIns="45720" rtlCol="0" anchor="ctr">
-            <a:normAutofit/>
-          </a:bodyPr>
-          <a:lstStyle/>
-          <a:p>
-            <a:r>
-              <a:rPr lang="en-US" dirty="0"/>
-              <a:t>Click to edit Master title style</a:t>
-            </a:r>
-          </a:p>
-        </p:txBody>
-      </p:sp>
-      <p:sp>
-        <p:nvSpPr>
-          <p:cNvPr id="3" name="Text Placeholder 2">
-            <a:extLst>
-              <a:ext uri="{FF2B5EF4-FFF2-40B4-BE49-F238E27FC236}">
-                <a16:creationId xmlns:a16="http://schemas.microsoft.com/office/drawing/2014/main" id="{FD69736F-08D5-7643-A656-ABAEB9457A7A}"/>
-              </a:ext>
-            </a:extLst>
-          </p:cNvPr>
-          <p:cNvSpPr>
-            <a:spLocks noGrp="1"/>
-          </p:cNvSpPr>
-          <p:nvPr>
-            <p:ph type="body" idx="1"/>
-          </p:nvPr>
-        </p:nvSpPr>
-        <p:spPr>
-          <a:xfrm>
-            <a:off x="838200" y="1825625"/>
-            <a:ext cx="10515600" cy="4351338"/>
-          </a:xfrm>
-          <a:prstGeom prst="rect">
-            <a:avLst/>
-          </a:prstGeom>
-        </p:spPr>
-        <p:txBody>
-          <a:bodyPr vert="horz" lIns="91440" tIns="45720" rIns="91440" bIns="45720" rtlCol="0">
-            <a:normAutofit/>
-          </a:bodyPr>
-          <a:lstStyle/>
-          <a:p>
-            <a:pPr lvl="0"/>
-            <a:r>
-              <a:rPr lang="en-US"/>
-              <a:t>Edit Master text styles</a:t>
-            </a:r>
-          </a:p>
-          <a:p>
-            <a:pPr lvl="1"/>
-            <a:r>
-              <a:rPr lang="en-US"/>
-              <a:t>Second level</a:t>
-            </a:r>
-          </a:p>
-          <a:p>
-            <a:pPr lvl="2"/>
-            <a:r>
-              <a:rPr lang="en-US"/>
-              <a:t>Third level</a:t>
-            </a:r>
-          </a:p>
-          <a:p>
-            <a:pPr lvl="3"/>
-            <a:r>
-              <a:rPr lang="en-US"/>
-              <a:t>Fourth level</a:t>
-            </a:r>
-          </a:p>
-          <a:p>
-            <a:pPr lvl="4"/>
-            <a:r>
-              <a:rPr lang="en-US"/>
-              <a:t>Fifth level</a:t>
-            </a:r>
-          </a:p>
-        </p:txBody>
-      </p:sp>
-      <p:sp>
-        <p:nvSpPr>
-          <p:cNvPr id="4" name="Date Placeholder 3">
-            <a:extLst>
-              <a:ext uri="{FF2B5EF4-FFF2-40B4-BE49-F238E27FC236}">
-                <a16:creationId xmlns:a16="http://schemas.microsoft.com/office/drawing/2014/main" id="{C0433D04-66F5-D74B-8EEA-459FDC00D1E4}"/>
-              </a:ext>
-            </a:extLst>
-          </p:cNvPr>
-          <p:cNvSpPr>
-            <a:spLocks noGrp="1"/>
-          </p:cNvSpPr>
-          <p:nvPr>
-            <p:ph type="dt" sz="half" idx="2"/>
-          </p:nvPr>
-        </p:nvSpPr>
-        <p:spPr>
-          <a:xfrm>
-            <a:off x="838200" y="6356350"/>
-            <a:ext cx="2743200" cy="365125"/>
-          </a:xfrm>
-          <a:prstGeom prst="rect">
-            <a:avLst/>
-          </a:prstGeom>
-        </p:spPr>
-        <p:txBody>
-          <a:bodyPr vert="horz" lIns="91440" tIns="45720" rIns="91440" bIns="45720" rtlCol="0" anchor="ctr"/>
-          <a:lstStyle>
-            <a:lvl1pPr algn="l">
-              <a:defRPr sz="1200">
-                <a:solidFill>
-                  <a:schemeClr val="tx1">
-                    <a:tint val="75000"/>
-                  </a:schemeClr>
-                </a:solidFill>
-                <a:latin typeface="Helvetica Neue" panose="02000503000000020004" pitchFamily="2" charset="0"/>
-                <a:ea typeface="Helvetica Neue" panose="02000503000000020004" pitchFamily="2" charset="0"/>
-                <a:cs typeface="Helvetica Neue" panose="02000503000000020004" pitchFamily="2" charset="0"/>
-              </a:defRPr>
-            </a:lvl1pPr>
-          </a:lstStyle>
-          <a:p>
-            <a:fld id="{2005EE61-3907-C44D-8624-D47E09E871DB}" type="datetime1">
-              <a:rPr lang="en-US" smtClean="0"/>
-              <a:t>3/14/26</a:t>
-            </a:fld>
-            <a:endParaRPr lang="en-US"/>
-          </a:p>
-        </p:txBody>
-      </p:sp>
-      <p:sp>
-        <p:nvSpPr>
-          <p:cNvPr id="5" name="Footer Placeholder 4">
-            <a:extLst>
-              <a:ext uri="{FF2B5EF4-FFF2-40B4-BE49-F238E27FC236}">
-                <a16:creationId xmlns:a16="http://schemas.microsoft.com/office/drawing/2014/main" id="{9FDE6E67-6F97-E149-8437-635D11E7ED43}"/>
-              </a:ext>
-            </a:extLst>
-          </p:cNvPr>
-          <p:cNvSpPr>
-            <a:spLocks noGrp="1"/>
-          </p:cNvSpPr>
-          <p:nvPr>
-            <p:ph type="ftr" sz="quarter" idx="3"/>
-          </p:nvPr>
-        </p:nvSpPr>
-        <p:spPr>
-          <a:xfrm>
-            <a:off x="4038600" y="6356350"/>
-            <a:ext cx="4114800" cy="365125"/>
-          </a:xfrm>
-          <a:prstGeom prst="rect">
-            <a:avLst/>
-          </a:prstGeom>
-        </p:spPr>
-        <p:txBody>
-          <a:bodyPr vert="horz" lIns="91440" tIns="45720" rIns="91440" bIns="45720" rtlCol="0" anchor="ctr"/>
-          <a:lstStyle>
-            <a:lvl1pPr algn="ctr">
-              <a:defRPr sz="1200">
-                <a:solidFill>
-                  <a:schemeClr val="tx1">
-                    <a:tint val="75000"/>
-                  </a:schemeClr>
-                </a:solidFill>
-                <a:latin typeface="Helvetica Neue" panose="02000503000000020004" pitchFamily="2" charset="0"/>
-                <a:ea typeface="Helvetica Neue" panose="02000503000000020004" pitchFamily="2" charset="0"/>
-                <a:cs typeface="Helvetica Neue" panose="02000503000000020004" pitchFamily="2" charset="0"/>
-              </a:defRPr>
-            </a:lvl1pPr>
-          </a:lstStyle>
-          <a:p>
-            <a:r>
-              <a:rPr lang="en-US"/>
-              <a:t>J Mark Morris - Model of Nature - April 2019</a:t>
-            </a:r>
-          </a:p>
-        </p:txBody>
-      </p:sp>
-      <p:sp>
-        <p:nvSpPr>
-          <p:cNvPr id="6" name="Slide Number Placeholder 5">
-            <a:extLst>
-              <a:ext uri="{FF2B5EF4-FFF2-40B4-BE49-F238E27FC236}">
-                <a16:creationId xmlns:a16="http://schemas.microsoft.com/office/drawing/2014/main" id="{D585CC1E-0AB1-F34A-83C6-0956BF9B4AF3}"/>
-              </a:ext>
-            </a:extLst>
-          </p:cNvPr>
-          <p:cNvSpPr>
-            <a:spLocks noGrp="1"/>
-          </p:cNvSpPr>
-          <p:nvPr>
-            <p:ph type="sldNum" sz="quarter" idx="4"/>
-          </p:nvPr>
-        </p:nvSpPr>
-        <p:spPr>
-          <a:xfrm>
-            <a:off x="8610600" y="6356350"/>
-            <a:ext cx="2743200" cy="365125"/>
-          </a:xfrm>
-          <a:prstGeom prst="rect">
-            <a:avLst/>
-          </a:prstGeom>
-        </p:spPr>
-        <p:txBody>
-          <a:bodyPr vert="horz" lIns="91440" tIns="45720" rIns="91440" bIns="45720" rtlCol="0" anchor="ctr"/>
-          <a:lstStyle>
-            <a:lvl1pPr algn="r">
-              <a:defRPr sz="1200">
-                <a:solidFill>
-                  <a:schemeClr val="tx1">
-                    <a:tint val="75000"/>
-                  </a:schemeClr>
-                </a:solidFill>
-                <a:latin typeface="Helvetica Neue" panose="02000503000000020004" pitchFamily="2" charset="0"/>
-                <a:ea typeface="Helvetica Neue" panose="02000503000000020004" pitchFamily="2" charset="0"/>
-                <a:cs typeface="Helvetica Neue" panose="02000503000000020004" pitchFamily="2" charset="0"/>
-              </a:defRPr>
-            </a:lvl1pPr>
-          </a:lstStyle>
-          <a:p>
-            <a:fld id="{D73D4D4B-2FF7-BE46-958C-B004BD45EF6F}" type="slidenum">
-              <a:rPr lang="en-US" smtClean="0"/>
-              <a:pPr/>
-              <a:t>‹#›</a:t>
-            </a:fld>
-            <a:endParaRPr lang="en-US"/>
-          </a:p>
-        </p:txBody>
-      </p:sp>
-    </p:spTree>
-    <p:extLst>
-      <p:ext uri="{BB962C8B-B14F-4D97-AF65-F5344CB8AC3E}">
-        <p14:creationId xmlns:p14="http://schemas.microsoft.com/office/powerpoint/2010/main" val="4188259015"/>
-      </p:ext>
-    </p:extLst>
-  </p:cSld>
-  <p:clrMap bg1="lt1" tx1="dk1" bg2="lt2" tx2="dk2" accent1="accent1" accent2="accent2" accent3="accent3" accent4="accent4" accent5="accent5" accent6="accent6" hlink="hlink" folHlink="folHlink"/>
-  <p:sldLayoutIdLst>
-    <p:sldLayoutId id="2147483665" r:id="rId1"/>
-    <p:sldLayoutId id="2147483666" r:id="rId2"/>
-    <p:sldLayoutId id="2147483667" r:id="rId3"/>
-  </p:sldLayoutIdLst>
-  <p:hf sldNum="0" hdr="0" dt="0"/>
-  <p:txStyles>
-    <p:titleStyle>
-      <a:lvl1pPr algn="l" defTabSz="914400" rtl="0" eaLnBrk="1" latinLnBrk="0" hangingPunct="1">
-        <a:lnSpc>
-          <a:spcPct val="90000"/>
-        </a:lnSpc>
-        <a:spcBef>
-          <a:spcPct val="0"/>
-        </a:spcBef>
-        <a:buNone/>
-        <a:defRPr sz="4400" kern="1200">
-          <a:solidFill>
-            <a:schemeClr val="tx1"/>
-          </a:solidFill>
-          <a:latin typeface="Helvetica Neue" panose="02000503000000020004" pitchFamily="2" charset="0"/>
-          <a:ea typeface="Helvetica Neue" panose="02000503000000020004" pitchFamily="2" charset="0"/>
-          <a:cs typeface="Helvetica Neue" panose="02000503000000020004" pitchFamily="2" charset="0"/>
-        </a:defRPr>
-      </a:lvl1pPr>
-    </p:titleStyle>
-    <p:bodyStyle>
-      <a:lvl1pPr marL="228600" indent="-228600" algn="l" defTabSz="914400" rtl="0" eaLnBrk="1" latinLnBrk="0" hangingPunct="1">
-        <a:lnSpc>
-          <a:spcPct val="90000"/>
-        </a:lnSpc>
-        <a:spcBef>
-          <a:spcPts val="1000"/>
-        </a:spcBef>
-        <a:buFont typeface="Arial" panose="020B0604020202020204" pitchFamily="34" charset="0"/>
-        <a:buChar char="•"/>
-        <a:defRPr sz="2800" kern="1200">
-          <a:solidFill>
-            <a:schemeClr val="tx1"/>
-          </a:solidFill>
-          <a:latin typeface="Helvetica Neue" panose="02000503000000020004" pitchFamily="2" charset="0"/>
-          <a:ea typeface="Helvetica Neue" panose="02000503000000020004" pitchFamily="2" charset="0"/>
-          <a:cs typeface="Helvetica Neue" panose="02000503000000020004" pitchFamily="2" charset="0"/>
-        </a:defRPr>
-      </a:lvl1pPr>
-      <a:lvl2pPr marL="685800" indent="-228600" algn="l" defTabSz="914400" rtl="0" eaLnBrk="1" latinLnBrk="0" hangingPunct="1">
-        <a:lnSpc>
-          <a:spcPct val="90000"/>
-        </a:lnSpc>
-        <a:spcBef>
-          <a:spcPts val="500"/>
-        </a:spcBef>
-        <a:buFont typeface="Arial" panose="020B0604020202020204" pitchFamily="34" charset="0"/>
-        <a:buChar char="•"/>
-        <a:defRPr sz="2400" kern="1200">
-          <a:solidFill>
-            <a:schemeClr val="tx1"/>
-          </a:solidFill>
-          <a:latin typeface="Helvetica Neue" panose="02000503000000020004" pitchFamily="2" charset="0"/>
-          <a:ea typeface="Helvetica Neue" panose="02000503000000020004" pitchFamily="2" charset="0"/>
-          <a:cs typeface="Helvetica Neue" panose="02000503000000020004" pitchFamily="2" charset="0"/>
-        </a:defRPr>
-      </a:lvl2pPr>
-      <a:lvl3pPr marL="1143000" indent="-228600" algn="l" defTabSz="914400" rtl="0" eaLnBrk="1" latinLnBrk="0" hangingPunct="1">
-        <a:lnSpc>
-          <a:spcPct val="90000"/>
-        </a:lnSpc>
-        <a:spcBef>
-          <a:spcPts val="500"/>
-        </a:spcBef>
-        <a:buFont typeface="Arial" panose="020B0604020202020204" pitchFamily="34" charset="0"/>
-        <a:buChar char="•"/>
-        <a:defRPr sz="2000" kern="1200">
-          <a:solidFill>
-            <a:schemeClr val="tx1"/>
-          </a:solidFill>
-          <a:latin typeface="Helvetica Neue" panose="02000503000000020004" pitchFamily="2" charset="0"/>
-          <a:ea typeface="Helvetica Neue" panose="02000503000000020004" pitchFamily="2" charset="0"/>
-          <a:cs typeface="Helvetica Neue" panose="02000503000000020004" pitchFamily="2" charset="0"/>
-        </a:defRPr>
-      </a:lvl3pPr>
-      <a:lvl4pPr marL="1600200" indent="-228600" algn="l" defTabSz="914400" rtl="0" eaLnBrk="1" latinLnBrk="0" hangingPunct="1">
-        <a:lnSpc>
-          <a:spcPct val="90000"/>
-        </a:lnSpc>
-        <a:spcBef>
-          <a:spcPts val="500"/>
-        </a:spcBef>
-        <a:buFont typeface="Arial" panose="020B0604020202020204" pitchFamily="34" charset="0"/>
-        <a:buChar char="•"/>
-        <a:defRPr sz="1800" kern="1200">
-          <a:solidFill>
-            <a:schemeClr val="tx1"/>
-          </a:solidFill>
-          <a:latin typeface="Helvetica Neue" panose="02000503000000020004" pitchFamily="2" charset="0"/>
-          <a:ea typeface="Helvetica Neue" panose="02000503000000020004" pitchFamily="2" charset="0"/>
-          <a:cs typeface="Helvetica Neue" panose="02000503000000020004" pitchFamily="2" charset="0"/>
-        </a:defRPr>
-      </a:lvl4pPr>
-      <a:lvl5pPr marL="2057400" indent="-228600" algn="l" defTabSz="914400" rtl="0" eaLnBrk="1" latinLnBrk="0" hangingPunct="1">
-        <a:lnSpc>
-          <a:spcPct val="90000"/>
-        </a:lnSpc>
-        <a:spcBef>
-          <a:spcPts val="500"/>
-        </a:spcBef>
-        <a:buFont typeface="Arial" panose="020B0604020202020204" pitchFamily="34" charset="0"/>
-        <a:buChar char="•"/>
-        <a:defRPr sz="1800" kern="1200">
-          <a:solidFill>
-            <a:schemeClr val="tx1"/>
-          </a:solidFill>
-          <a:latin typeface="Helvetica Neue" panose="02000503000000020004" pitchFamily="2" charset="0"/>
-          <a:ea typeface="Helvetica Neue" panose="02000503000000020004" pitchFamily="2" charset="0"/>
-          <a:cs typeface="Helvetica Neue" panose="02000503000000020004" pitchFamily="2" charset="0"/>
-        </a:defRPr>
-      </a:lvl5pPr>
-      <a:lvl6pPr marL="2514600" indent="-228600" algn="l" defTabSz="914400" rtl="0" eaLnBrk="1" latinLnBrk="0" hangingPunct="1">
-        <a:lnSpc>
-          <a:spcPct val="90000"/>
-        </a:lnSpc>
-        <a:spcBef>
-          <a:spcPts val="500"/>
-        </a:spcBef>
-        <a:buFont typeface="Arial" panose="020B0604020202020204" pitchFamily="34" charset="0"/>
-        <a:buChar char="•"/>
-        <a:defRPr sz="1800" kern="1200">
-          <a:solidFill>
-            <a:schemeClr val="tx1"/>
-          </a:solidFill>
-          <a:latin typeface="+mn-lt"/>
-          <a:ea typeface="+mn-ea"/>
-          <a:cs typeface="+mn-cs"/>
-        </a:defRPr>
-      </a:lvl6pPr>
-      <a:lvl7pPr marL="2971800" indent="-228600" algn="l" defTabSz="914400" rtl="0" eaLnBrk="1" latinLnBrk="0" hangingPunct="1">
-        <a:lnSpc>
-          <a:spcPct val="90000"/>
-        </a:lnSpc>
-        <a:spcBef>
-          <a:spcPts val="500"/>
-        </a:spcBef>
-        <a:buFont typeface="Arial" panose="020B0604020202020204" pitchFamily="34" charset="0"/>
-        <a:buChar char="•"/>
-        <a:defRPr sz="1800" kern="1200">
-          <a:solidFill>
-            <a:schemeClr val="tx1"/>
-          </a:solidFill>
-          <a:latin typeface="+mn-lt"/>
-          <a:ea typeface="+mn-ea"/>
-          <a:cs typeface="+mn-cs"/>
-        </a:defRPr>
-      </a:lvl7pPr>
-      <a:lvl8pPr marL="3429000" indent="-228600" algn="l" defTabSz="914400" rtl="0" eaLnBrk="1" latinLnBrk="0" hangingPunct="1">
-        <a:lnSpc>
-          <a:spcPct val="90000"/>
-        </a:lnSpc>
-        <a:spcBef>
-          <a:spcPts val="500"/>
-        </a:spcBef>
-        <a:buFont typeface="Arial" panose="020B0604020202020204" pitchFamily="34" charset="0"/>
-        <a:buChar char="•"/>
-        <a:defRPr sz="1800" kern="1200">
-          <a:solidFill>
-            <a:schemeClr val="tx1"/>
-          </a:solidFill>
-          <a:latin typeface="+mn-lt"/>
-          <a:ea typeface="+mn-ea"/>
-          <a:cs typeface="+mn-cs"/>
-        </a:defRPr>
-      </a:lvl8pPr>
-      <a:lvl9pPr marL="3886200" indent="-228600" algn="l" defTabSz="914400" rtl="0" eaLnBrk="1" latinLnBrk="0" hangingPunct="1">
-        <a:lnSpc>
-          <a:spcPct val="90000"/>
-        </a:lnSpc>
-        <a:spcBef>
-          <a:spcPts val="500"/>
-        </a:spcBef>
-        <a:buFont typeface="Arial" panose="020B0604020202020204" pitchFamily="34" charset="0"/>
-        <a:buChar char="•"/>
-        <a:defRPr sz="1800" kern="1200">
-          <a:solidFill>
-            <a:schemeClr val="tx1"/>
-          </a:solidFill>
-          <a:latin typeface="+mn-lt"/>
-          <a:ea typeface="+mn-ea"/>
-          <a:cs typeface="+mn-cs"/>
-        </a:defRPr>
-      </a:lvl9pPr>
-    </p:bodyStyle>
-    <p:otherStyle>
-      <a:defPPr>
-        <a:defRPr lang="en-US"/>
-      </a:defPPr>
-      <a:lvl1pPr marL="0" algn="l" defTabSz="914400" rtl="0" eaLnBrk="1" latinLnBrk="0" hangingPunct="1">
-        <a:defRPr sz="1800" kern="1200">
-          <a:solidFill>
-            <a:schemeClr val="tx1"/>
-          </a:solidFill>
-          <a:latin typeface="+mn-lt"/>
-          <a:ea typeface="+mn-ea"/>
-          <a:cs typeface="+mn-cs"/>
-        </a:defRPr>
-      </a:lvl1pPr>
-      <a:lvl2pPr marL="457200" algn="l" defTabSz="914400" rtl="0" eaLnBrk="1" latinLnBrk="0" hangingPunct="1">
-        <a:defRPr sz="1800" kern="1200">
-          <a:solidFill>
-            <a:schemeClr val="tx1"/>
-          </a:solidFill>
-          <a:latin typeface="+mn-lt"/>
-          <a:ea typeface="+mn-ea"/>
-          <a:cs typeface="+mn-cs"/>
-        </a:defRPr>
-      </a:lvl2pPr>
-      <a:lvl3pPr marL="914400" algn="l" defTabSz="914400" rtl="0" eaLnBrk="1" latinLnBrk="0" hangingPunct="1">
-        <a:defRPr sz="1800" kern="1200">
-          <a:solidFill>
-            <a:schemeClr val="tx1"/>
-          </a:solidFill>
-          <a:latin typeface="+mn-lt"/>
-          <a:ea typeface="+mn-ea"/>
-          <a:cs typeface="+mn-cs"/>
-        </a:defRPr>
-      </a:lvl3pPr>
-      <a:lvl4pPr marL="1371600" algn="l" defTabSz="914400" rtl="0" eaLnBrk="1" latinLnBrk="0" hangingPunct="1">
-        <a:defRPr sz="1800" kern="1200">
-          <a:solidFill>
-            <a:schemeClr val="tx1"/>
-          </a:solidFill>
-          <a:latin typeface="+mn-lt"/>
-          <a:ea typeface="+mn-ea"/>
-          <a:cs typeface="+mn-cs"/>
-        </a:defRPr>
-      </a:lvl4pPr>
-      <a:lvl5pPr marL="1828800" algn="l" defTabSz="914400" rtl="0" eaLnBrk="1" latinLnBrk="0" hangingPunct="1">
-        <a:defRPr sz="1800" kern="1200">
-          <a:solidFill>
-            <a:schemeClr val="tx1"/>
-          </a:solidFill>
-          <a:latin typeface="+mn-lt"/>
-          <a:ea typeface="+mn-ea"/>
-          <a:cs typeface="+mn-cs"/>
-        </a:defRPr>
-      </a:lvl5pPr>
-      <a:lvl6pPr marL="2286000" algn="l" defTabSz="914400" rtl="0" eaLnBrk="1" latinLnBrk="0" hangingPunct="1">
-        <a:defRPr sz="1800" kern="1200">
-          <a:solidFill>
-            <a:schemeClr val="tx1"/>
-          </a:solidFill>
-          <a:latin typeface="+mn-lt"/>
-          <a:ea typeface="+mn-ea"/>
-          <a:cs typeface="+mn-cs"/>
-        </a:defRPr>
-      </a:lvl6pPr>
-      <a:lvl7pPr marL="2743200" algn="l" defTabSz="914400" rtl="0" eaLnBrk="1" latinLnBrk="0" hangingPunct="1">
-        <a:defRPr sz="1800" kern="1200">
-          <a:solidFill>
-            <a:schemeClr val="tx1"/>
-          </a:solidFill>
-          <a:latin typeface="+mn-lt"/>
-          <a:ea typeface="+mn-ea"/>
-          <a:cs typeface="+mn-cs"/>
-        </a:defRPr>
-      </a:lvl7pPr>
-      <a:lvl8pPr marL="3200400" algn="l" defTabSz="914400" rtl="0" eaLnBrk="1" latinLnBrk="0" hangingPunct="1">
-        <a:defRPr sz="1800" kern="1200">
-          <a:solidFill>
-            <a:schemeClr val="tx1"/>
-          </a:solidFill>
-          <a:latin typeface="+mn-lt"/>
-          <a:ea typeface="+mn-ea"/>
-          <a:cs typeface="+mn-cs"/>
-        </a:defRPr>
-      </a:lvl8pPr>
-      <a:lvl9pPr marL="3657600" algn="l" defTabSz="914400" rtl="0" eaLnBrk="1" latinLnBrk="0" hangingPunct="1">
-        <a:defRPr sz="1800" kern="1200">
-          <a:solidFill>
-            <a:schemeClr val="tx1"/>
-          </a:solidFill>
-          <a:latin typeface="+mn-lt"/>
-          <a:ea typeface="+mn-ea"/>
-          <a:cs typeface="+mn-cs"/>
-        </a:defRPr>
-      </a:lvl9pPr>
-    </p:otherStyle>
-  </p:txStyles>
-</p:sldMaster>
-</file>
-
 <file path=ppt/slides/slide1.xml><?xml version="1.0" encoding="utf-8"?>
 <p:sld xmlns:a="http://schemas.openxmlformats.org/drawingml/2006/main" xmlns:r="http://schemas.openxmlformats.org/officeDocument/2006/relationships" xmlns:p="http://schemas.openxmlformats.org/presentationml/2006/main">
   <p:cSld>
@@ -9081,427 +7914,6 @@
   </p:cSld>
   <p:clrMapOvr>
     <a:masterClrMapping/>
-  </p:clrMapOvr>
-</p:sld>
-</file>
-
-<file path=ppt/slides/slide10.xml><?xml version="1.0" encoding="utf-8"?>
-<p:sld xmlns:a="http://schemas.openxmlformats.org/drawingml/2006/main" xmlns:r="http://schemas.openxmlformats.org/officeDocument/2006/relationships" xmlns:p="http://schemas.openxmlformats.org/presentationml/2006/main">
-  <p:cSld>
-    <p:bg>
-      <p:bgPr>
-        <a:solidFill>
-          <a:schemeClr val="tx1"/>
-        </a:solidFill>
-        <a:effectLst/>
-      </p:bgPr>
-    </p:bg>
-    <p:spTree>
-      <p:nvGrpSpPr>
-        <p:cNvPr id="1" name=""/>
-        <p:cNvGrpSpPr/>
-        <p:nvPr/>
-      </p:nvGrpSpPr>
-      <p:grpSpPr>
-        <a:xfrm>
-          <a:off x="0" y="0"/>
-          <a:ext cx="0" cy="0"/>
-          <a:chOff x="0" y="0"/>
-          <a:chExt cx="0" cy="0"/>
-        </a:xfrm>
-      </p:grpSpPr>
-      <p:sp>
-        <p:nvSpPr>
-          <p:cNvPr id="9" name="Rectangle 8">
-            <a:extLst>
-              <a:ext uri="{FF2B5EF4-FFF2-40B4-BE49-F238E27FC236}">
-                <a16:creationId xmlns:a16="http://schemas.microsoft.com/office/drawing/2014/main" id="{2A8AA5BC-4F7A-4226-8F99-6D824B226A97}"/>
-              </a:ext>
-              <a:ext uri="{C183D7F6-B498-43B3-948B-1728B52AA6E4}">
-                <adec:decorative xmlns:adec="http://schemas.microsoft.com/office/drawing/2017/decorative" val="1"/>
-              </a:ext>
-            </a:extLst>
-          </p:cNvPr>
-          <p:cNvSpPr>
-            <a:spLocks noGrp="1" noRot="1" noChangeAspect="1" noMove="1" noResize="1" noEditPoints="1" noAdjustHandles="1" noChangeArrowheads="1" noChangeShapeType="1" noTextEdit="1"/>
-          </p:cNvSpPr>
-          <p:nvPr>
-            <p:extLst>
-              <p:ext uri="{386F3935-93C4-4BCD-93E2-E3B085C9AB24}">
-                <p16:designElem xmlns:p16="http://schemas.microsoft.com/office/powerpoint/2015/main" val="1"/>
-              </p:ext>
-            </p:extLst>
-          </p:nvPr>
-        </p:nvSpPr>
-        <p:spPr>
-          <a:xfrm>
-            <a:off x="0" y="-3324"/>
-            <a:ext cx="12192000" cy="6861324"/>
-          </a:xfrm>
-          <a:prstGeom prst="rect">
-            <a:avLst/>
-          </a:prstGeom>
-          <a:solidFill>
-            <a:schemeClr val="tx1"/>
-          </a:solidFill>
-          <a:ln>
-            <a:noFill/>
-          </a:ln>
-        </p:spPr>
-        <p:style>
-          <a:lnRef idx="2">
-            <a:schemeClr val="accent1">
-              <a:shade val="50000"/>
-            </a:schemeClr>
-          </a:lnRef>
-          <a:fillRef idx="1">
-            <a:schemeClr val="accent1"/>
-          </a:fillRef>
-          <a:effectRef idx="0">
-            <a:schemeClr val="accent1"/>
-          </a:effectRef>
-          <a:fontRef idx="minor">
-            <a:schemeClr val="lt1"/>
-          </a:fontRef>
-        </p:style>
-        <p:txBody>
-          <a:bodyPr rtlCol="0" anchor="ctr"/>
-          <a:lstStyle/>
-          <a:p>
-            <a:pPr marL="0" marR="0" lvl="0" indent="0" algn="ctr" defTabSz="914400" rtl="0" eaLnBrk="1" fontAlgn="auto" latinLnBrk="0" hangingPunct="1">
-              <a:lnSpc>
-                <a:spcPct val="100000"/>
-              </a:lnSpc>
-              <a:spcBef>
-                <a:spcPts val="0"/>
-              </a:spcBef>
-              <a:spcAft>
-                <a:spcPts val="0"/>
-              </a:spcAft>
-              <a:buClrTx/>
-              <a:buSzTx/>
-              <a:buFontTx/>
-              <a:buNone/>
-              <a:tabLst/>
-              <a:defRPr/>
-            </a:pPr>
-            <a:endParaRPr kumimoji="0" lang="en-US" sz="1800" b="0" i="0" u="none" strike="noStrike" kern="1200" cap="none" spc="0" normalizeH="0" baseline="0" noProof="0">
-              <a:ln>
-                <a:noFill/>
-              </a:ln>
-              <a:solidFill>
-                <a:prstClr val="white"/>
-              </a:solidFill>
-              <a:effectLst/>
-              <a:uLnTx/>
-              <a:uFillTx/>
-              <a:latin typeface="Calibri" panose="020F0502020204030204"/>
-              <a:ea typeface="+mn-ea"/>
-              <a:cs typeface="+mn-cs"/>
-            </a:endParaRPr>
-          </a:p>
-        </p:txBody>
-      </p:sp>
-      <p:sp>
-        <p:nvSpPr>
-          <p:cNvPr id="11" name="Rectangle 10">
-            <a:extLst>
-              <a:ext uri="{FF2B5EF4-FFF2-40B4-BE49-F238E27FC236}">
-                <a16:creationId xmlns:a16="http://schemas.microsoft.com/office/drawing/2014/main" id="{3E5445C6-DD42-4979-86FF-03730E8C6DB0}"/>
-              </a:ext>
-              <a:ext uri="{C183D7F6-B498-43B3-948B-1728B52AA6E4}">
-                <adec:decorative xmlns:adec="http://schemas.microsoft.com/office/drawing/2017/decorative" val="1"/>
-              </a:ext>
-            </a:extLst>
-          </p:cNvPr>
-          <p:cNvSpPr>
-            <a:spLocks noGrp="1" noRot="1" noChangeAspect="1" noMove="1" noResize="1" noEditPoints="1" noAdjustHandles="1" noChangeArrowheads="1" noChangeShapeType="1" noTextEdit="1"/>
-          </p:cNvSpPr>
-          <p:nvPr>
-            <p:extLst>
-              <p:ext uri="{386F3935-93C4-4BCD-93E2-E3B085C9AB24}">
-                <p16:designElem xmlns:p16="http://schemas.microsoft.com/office/powerpoint/2015/main" val="1"/>
-              </p:ext>
-            </p:extLst>
-          </p:nvPr>
-        </p:nvSpPr>
-        <p:spPr bwMode="ltGray">
-          <a:xfrm>
-            <a:off x="321734" y="321733"/>
-            <a:ext cx="11573488" cy="6214534"/>
-          </a:xfrm>
-          <a:prstGeom prst="rect">
-            <a:avLst/>
-          </a:prstGeom>
-          <a:solidFill>
-            <a:schemeClr val="bg1">
-              <a:lumMod val="75000"/>
-              <a:lumOff val="25000"/>
-            </a:schemeClr>
-          </a:solidFill>
-          <a:ln w="127000" cap="sq" cmpd="thinThick">
-            <a:solidFill>
-              <a:schemeClr val="bg1">
-                <a:lumMod val="75000"/>
-                <a:lumOff val="25000"/>
-              </a:schemeClr>
-            </a:solidFill>
-          </a:ln>
-        </p:spPr>
-        <p:style>
-          <a:lnRef idx="2">
-            <a:schemeClr val="accent1">
-              <a:shade val="50000"/>
-            </a:schemeClr>
-          </a:lnRef>
-          <a:fillRef idx="1">
-            <a:schemeClr val="accent1"/>
-          </a:fillRef>
-          <a:effectRef idx="0">
-            <a:schemeClr val="accent1"/>
-          </a:effectRef>
-          <a:fontRef idx="minor">
-            <a:schemeClr val="lt1"/>
-          </a:fontRef>
-        </p:style>
-        <p:txBody>
-          <a:bodyPr rtlCol="0" anchor="ctr"/>
-          <a:lstStyle/>
-          <a:p>
-            <a:pPr marL="0" marR="0" lvl="0" indent="0" algn="ctr" defTabSz="914400" rtl="0" eaLnBrk="1" fontAlgn="auto" latinLnBrk="0" hangingPunct="1">
-              <a:lnSpc>
-                <a:spcPct val="100000"/>
-              </a:lnSpc>
-              <a:spcBef>
-                <a:spcPts val="0"/>
-              </a:spcBef>
-              <a:spcAft>
-                <a:spcPts val="0"/>
-              </a:spcAft>
-              <a:buClrTx/>
-              <a:buSzTx/>
-              <a:buFontTx/>
-              <a:buNone/>
-              <a:tabLst/>
-              <a:defRPr/>
-            </a:pPr>
-            <a:endParaRPr kumimoji="0" lang="en-US" sz="1800" b="0" i="0" u="none" strike="noStrike" kern="1200" cap="none" spc="0" normalizeH="0" baseline="0" noProof="0">
-              <a:ln>
-                <a:noFill/>
-              </a:ln>
-              <a:solidFill>
-                <a:prstClr val="white"/>
-              </a:solidFill>
-              <a:effectLst/>
-              <a:uLnTx/>
-              <a:uFillTx/>
-              <a:latin typeface="Calibri" panose="020F0502020204030204"/>
-              <a:ea typeface="+mn-ea"/>
-              <a:cs typeface="+mn-cs"/>
-            </a:endParaRPr>
-          </a:p>
-        </p:txBody>
-      </p:sp>
-      <p:sp>
-        <p:nvSpPr>
-          <p:cNvPr id="2" name="Title 1">
-            <a:extLst>
-              <a:ext uri="{FF2B5EF4-FFF2-40B4-BE49-F238E27FC236}">
-                <a16:creationId xmlns:a16="http://schemas.microsoft.com/office/drawing/2014/main" id="{7710B119-EC53-BA46-BAA3-CB758CDEDAF5}"/>
-              </a:ext>
-            </a:extLst>
-          </p:cNvPr>
-          <p:cNvSpPr>
-            <a:spLocks noGrp="1"/>
-          </p:cNvSpPr>
-          <p:nvPr>
-            <p:ph type="ctrTitle"/>
-          </p:nvPr>
-        </p:nvSpPr>
-        <p:spPr>
-          <a:xfrm>
-            <a:off x="1524000" y="1122362"/>
-            <a:ext cx="9144000" cy="2840037"/>
-          </a:xfrm>
-        </p:spPr>
-        <p:txBody>
-          <a:bodyPr>
-            <a:normAutofit/>
-          </a:bodyPr>
-          <a:lstStyle/>
-          <a:p>
-            <a:r>
-              <a:rPr lang="en-US" sz="5800" dirty="0"/>
-              <a:t>Thank You</a:t>
-            </a:r>
-          </a:p>
-        </p:txBody>
-      </p:sp>
-      <p:sp>
-        <p:nvSpPr>
-          <p:cNvPr id="3" name="Subtitle 2">
-            <a:extLst>
-              <a:ext uri="{FF2B5EF4-FFF2-40B4-BE49-F238E27FC236}">
-                <a16:creationId xmlns:a16="http://schemas.microsoft.com/office/drawing/2014/main" id="{44E6BC0E-0DB7-C346-A0CC-E3CB36C29A54}"/>
-              </a:ext>
-            </a:extLst>
-          </p:cNvPr>
-          <p:cNvSpPr>
-            <a:spLocks noGrp="1"/>
-          </p:cNvSpPr>
-          <p:nvPr>
-            <p:ph type="subTitle" idx="1"/>
-          </p:nvPr>
-        </p:nvSpPr>
-        <p:spPr>
-          <a:xfrm>
-            <a:off x="1524000" y="4256436"/>
-            <a:ext cx="9144000" cy="1600818"/>
-          </a:xfrm>
-        </p:spPr>
-        <p:txBody>
-          <a:bodyPr>
-            <a:normAutofit/>
-          </a:bodyPr>
-          <a:lstStyle/>
-          <a:p>
-            <a:r>
-              <a:rPr lang="en-US" dirty="0"/>
-              <a:t>Questions?</a:t>
-            </a:r>
-          </a:p>
-        </p:txBody>
-      </p:sp>
-      <p:cxnSp>
-        <p:nvCxnSpPr>
-          <p:cNvPr id="13" name="Straight Connector 12">
-            <a:extLst>
-              <a:ext uri="{FF2B5EF4-FFF2-40B4-BE49-F238E27FC236}">
-                <a16:creationId xmlns:a16="http://schemas.microsoft.com/office/drawing/2014/main" id="{45000665-DFC7-417E-8FD7-516A0F15C975}"/>
-              </a:ext>
-              <a:ext uri="{C183D7F6-B498-43B3-948B-1728B52AA6E4}">
-                <adec:decorative xmlns:adec="http://schemas.microsoft.com/office/drawing/2017/decorative" val="1"/>
-              </a:ext>
-            </a:extLst>
-          </p:cNvPr>
-          <p:cNvCxnSpPr>
-            <a:cxnSpLocks noGrp="1" noRot="1" noChangeAspect="1" noMove="1" noResize="1" noEditPoints="1" noAdjustHandles="1" noChangeArrowheads="1" noChangeShapeType="1"/>
-          </p:cNvCxnSpPr>
-          <p:nvPr>
-            <p:extLst>
-              <p:ext uri="{386F3935-93C4-4BCD-93E2-E3B085C9AB24}">
-                <p16:designElem xmlns:p16="http://schemas.microsoft.com/office/powerpoint/2015/main" val="1"/>
-              </p:ext>
-            </p:extLst>
-          </p:nvPr>
-        </p:nvCxnSpPr>
-        <p:spPr>
-          <a:xfrm>
-            <a:off x="4724400" y="4109417"/>
-            <a:ext cx="2743200" cy="0"/>
-          </a:xfrm>
-          <a:prstGeom prst="line">
-            <a:avLst/>
-          </a:prstGeom>
-          <a:ln w="12700">
-            <a:solidFill>
-              <a:schemeClr val="tx1">
-                <a:lumMod val="85000"/>
-              </a:schemeClr>
-            </a:solidFill>
-          </a:ln>
-        </p:spPr>
-        <p:style>
-          <a:lnRef idx="1">
-            <a:schemeClr val="accent1"/>
-          </a:lnRef>
-          <a:fillRef idx="0">
-            <a:schemeClr val="accent1"/>
-          </a:fillRef>
-          <a:effectRef idx="0">
-            <a:schemeClr val="accent1"/>
-          </a:effectRef>
-          <a:fontRef idx="minor">
-            <a:schemeClr val="tx1"/>
-          </a:fontRef>
-        </p:style>
-      </p:cxnSp>
-      <p:sp>
-        <p:nvSpPr>
-          <p:cNvPr id="4" name="Footer Placeholder 3">
-            <a:extLst>
-              <a:ext uri="{FF2B5EF4-FFF2-40B4-BE49-F238E27FC236}">
-                <a16:creationId xmlns:a16="http://schemas.microsoft.com/office/drawing/2014/main" id="{9E726E67-7B90-B642-8D26-6DDF890C4785}"/>
-              </a:ext>
-            </a:extLst>
-          </p:cNvPr>
-          <p:cNvSpPr>
-            <a:spLocks noGrp="1"/>
-          </p:cNvSpPr>
-          <p:nvPr>
-            <p:ph type="ftr" sz="quarter" idx="11"/>
-          </p:nvPr>
-        </p:nvSpPr>
-        <p:spPr>
-          <a:xfrm>
-            <a:off x="4038600" y="6159710"/>
-            <a:ext cx="4114800" cy="365125"/>
-          </a:xfrm>
-        </p:spPr>
-        <p:txBody>
-          <a:bodyPr>
-            <a:normAutofit/>
-          </a:bodyPr>
-          <a:lstStyle/>
-          <a:p>
-            <a:pPr marL="0" marR="0" lvl="0" indent="0" algn="ctr" defTabSz="914400" rtl="0" eaLnBrk="1" fontAlgn="auto" latinLnBrk="0" hangingPunct="1">
-              <a:lnSpc>
-                <a:spcPct val="100000"/>
-              </a:lnSpc>
-              <a:spcBef>
-                <a:spcPts val="0"/>
-              </a:spcBef>
-              <a:spcAft>
-                <a:spcPts val="600"/>
-              </a:spcAft>
-              <a:buClrTx/>
-              <a:buSzTx/>
-              <a:buFontTx/>
-              <a:buNone/>
-              <a:tabLst/>
-              <a:defRPr/>
-            </a:pPr>
-            <a:r>
-              <a:rPr kumimoji="0" lang="en-US" sz="1200" b="0" i="0" u="none" strike="noStrike" kern="1200" cap="none" spc="0" normalizeH="0" baseline="0" noProof="0" dirty="0">
-                <a:ln>
-                  <a:noFill/>
-                </a:ln>
-                <a:solidFill>
-                  <a:prstClr val="white">
-                    <a:tint val="75000"/>
-                  </a:prstClr>
-                </a:solidFill>
-                <a:effectLst/>
-                <a:uLnTx/>
-                <a:uFillTx/>
-                <a:latin typeface="Helvetica Neue" panose="02000503000000020004" pitchFamily="2" charset="0"/>
-                <a:ea typeface="Helvetica Neue" panose="02000503000000020004" pitchFamily="2" charset="0"/>
-                <a:cs typeface="Helvetica Neue" panose="02000503000000020004" pitchFamily="2" charset="0"/>
-              </a:rPr>
-              <a:t>J Mark Morris - Model of Nature</a:t>
-            </a:r>
-          </a:p>
-        </p:txBody>
-      </p:sp>
-    </p:spTree>
-    <p:extLst>
-      <p:ext uri="{BB962C8B-B14F-4D97-AF65-F5344CB8AC3E}">
-        <p14:creationId xmlns:p14="http://schemas.microsoft.com/office/powerpoint/2010/main" val="3747833275"/>
-      </p:ext>
-    </p:extLst>
-  </p:cSld>
-  <p:clrMapOvr>
-    <a:overrideClrMapping bg1="dk1" tx1="lt1" bg2="dk2" tx2="lt2" accent1="accent1" accent2="accent2" accent3="accent3" accent4="accent4" accent5="accent5" accent6="accent6" hlink="hlink" folHlink="folHlink"/>
   </p:clrMapOvr>
 </p:sld>
 </file>
@@ -13511,334 +11923,6 @@
 </file>
 
 <file path=ppt/theme/theme2.xml><?xml version="1.0" encoding="utf-8"?>
-<a:theme xmlns:a="http://schemas.openxmlformats.org/drawingml/2006/main" name="2_Office Theme">
-  <a:themeElements>
-    <a:clrScheme name="Office">
-      <a:dk1>
-        <a:sysClr val="windowText" lastClr="000000"/>
-      </a:dk1>
-      <a:lt1>
-        <a:sysClr val="window" lastClr="FFFFFF"/>
-      </a:lt1>
-      <a:dk2>
-        <a:srgbClr val="44546A"/>
-      </a:dk2>
-      <a:lt2>
-        <a:srgbClr val="E7E6E6"/>
-      </a:lt2>
-      <a:accent1>
-        <a:srgbClr val="4472C4"/>
-      </a:accent1>
-      <a:accent2>
-        <a:srgbClr val="ED7D31"/>
-      </a:accent2>
-      <a:accent3>
-        <a:srgbClr val="A5A5A5"/>
-      </a:accent3>
-      <a:accent4>
-        <a:srgbClr val="FFC000"/>
-      </a:accent4>
-      <a:accent5>
-        <a:srgbClr val="5B9BD5"/>
-      </a:accent5>
-      <a:accent6>
-        <a:srgbClr val="70AD47"/>
-      </a:accent6>
-      <a:hlink>
-        <a:srgbClr val="0563C1"/>
-      </a:hlink>
-      <a:folHlink>
-        <a:srgbClr val="954F72"/>
-      </a:folHlink>
-    </a:clrScheme>
-    <a:fontScheme name="Office">
-      <a:majorFont>
-        <a:latin typeface="Calibri Light" panose="020F0302020204030204"/>
-        <a:ea typeface=""/>
-        <a:cs typeface=""/>
-        <a:font script="Jpan" typeface="游ゴシック Light"/>
-        <a:font script="Hang" typeface="맑은 고딕"/>
-        <a:font script="Hans" typeface="等线 Light"/>
-        <a:font script="Hant" typeface="新細明體"/>
-        <a:font script="Arab" typeface="Times New Roman"/>
-        <a:font script="Hebr" typeface="Times New Roman"/>
-        <a:font script="Thai" typeface="Angsana New"/>
-        <a:font script="Ethi" typeface="Nyala"/>
-        <a:font script="Beng" typeface="Vrinda"/>
-        <a:font script="Gujr" typeface="Shruti"/>
-        <a:font script="Khmr" typeface="MoolBoran"/>
-        <a:font script="Knda" typeface="Tunga"/>
-        <a:font script="Guru" typeface="Raavi"/>
-        <a:font script="Cans" typeface="Euphemia"/>
-        <a:font script="Cher" typeface="Plantagenet Cherokee"/>
-        <a:font script="Yiii" typeface="Microsoft Yi Baiti"/>
-        <a:font script="Tibt" typeface="Microsoft Himalaya"/>
-        <a:font script="Thaa" typeface="MV Boli"/>
-        <a:font script="Deva" typeface="Mangal"/>
-        <a:font script="Telu" typeface="Gautami"/>
-        <a:font script="Taml" typeface="Latha"/>
-        <a:font script="Syrc" typeface="Estrangelo Edessa"/>
-        <a:font script="Orya" typeface="Kalinga"/>
-        <a:font script="Mlym" typeface="Kartika"/>
-        <a:font script="Laoo" typeface="DokChampa"/>
-        <a:font script="Sinh" typeface="Iskoola Pota"/>
-        <a:font script="Mong" typeface="Mongolian Baiti"/>
-        <a:font script="Viet" typeface="Times New Roman"/>
-        <a:font script="Uigh" typeface="Microsoft Uighur"/>
-        <a:font script="Geor" typeface="Sylfaen"/>
-        <a:font script="Armn" typeface="Arial"/>
-        <a:font script="Bugi" typeface="Leelawadee UI"/>
-        <a:font script="Bopo" typeface="Microsoft JhengHei"/>
-        <a:font script="Java" typeface="Javanese Text"/>
-        <a:font script="Lisu" typeface="Segoe UI"/>
-        <a:font script="Mymr" typeface="Myanmar Text"/>
-        <a:font script="Nkoo" typeface="Ebrima"/>
-        <a:font script="Olck" typeface="Nirmala UI"/>
-        <a:font script="Osma" typeface="Ebrima"/>
-        <a:font script="Phag" typeface="Phagspa"/>
-        <a:font script="Syrn" typeface="Estrangelo Edessa"/>
-        <a:font script="Syrj" typeface="Estrangelo Edessa"/>
-        <a:font script="Syre" typeface="Estrangelo Edessa"/>
-        <a:font script="Sora" typeface="Nirmala UI"/>
-        <a:font script="Tale" typeface="Microsoft Tai Le"/>
-        <a:font script="Talu" typeface="Microsoft New Tai Lue"/>
-        <a:font script="Tfng" typeface="Ebrima"/>
-      </a:majorFont>
-      <a:minorFont>
-        <a:latin typeface="Calibri" panose="020F0502020204030204"/>
-        <a:ea typeface=""/>
-        <a:cs typeface=""/>
-        <a:font script="Jpan" typeface="游ゴシック"/>
-        <a:font script="Hang" typeface="맑은 고딕"/>
-        <a:font script="Hans" typeface="等线"/>
-        <a:font script="Hant" typeface="新細明體"/>
-        <a:font script="Arab" typeface="Arial"/>
-        <a:font script="Hebr" typeface="Arial"/>
-        <a:font script="Thai" typeface="Cordia New"/>
-        <a:font script="Ethi" typeface="Nyala"/>
-        <a:font script="Beng" typeface="Vrinda"/>
-        <a:font script="Gujr" typeface="Shruti"/>
-        <a:font script="Khmr" typeface="DaunPenh"/>
-        <a:font script="Knda" typeface="Tunga"/>
-        <a:font script="Guru" typeface="Raavi"/>
-        <a:font script="Cans" typeface="Euphemia"/>
-        <a:font script="Cher" typeface="Plantagenet Cherokee"/>
-        <a:font script="Yiii" typeface="Microsoft Yi Baiti"/>
-        <a:font script="Tibt" typeface="Microsoft Himalaya"/>
-        <a:font script="Thaa" typeface="MV Boli"/>
-        <a:font script="Deva" typeface="Mangal"/>
-        <a:font script="Telu" typeface="Gautami"/>
-        <a:font script="Taml" typeface="Latha"/>
-        <a:font script="Syrc" typeface="Estrangelo Edessa"/>
-        <a:font script="Orya" typeface="Kalinga"/>
-        <a:font script="Mlym" typeface="Kartika"/>
-        <a:font script="Laoo" typeface="DokChampa"/>
-        <a:font script="Sinh" typeface="Iskoola Pota"/>
-        <a:font script="Mong" typeface="Mongolian Baiti"/>
-        <a:font script="Viet" typeface="Arial"/>
-        <a:font script="Uigh" typeface="Microsoft Uighur"/>
-        <a:font script="Geor" typeface="Sylfaen"/>
-        <a:font script="Armn" typeface="Arial"/>
-        <a:font script="Bugi" typeface="Leelawadee UI"/>
-        <a:font script="Bopo" typeface="Microsoft JhengHei"/>
-        <a:font script="Java" typeface="Javanese Text"/>
-        <a:font script="Lisu" typeface="Segoe UI"/>
-        <a:font script="Mymr" typeface="Myanmar Text"/>
-        <a:font script="Nkoo" typeface="Ebrima"/>
-        <a:font script="Olck" typeface="Nirmala UI"/>
-        <a:font script="Osma" typeface="Ebrima"/>
-        <a:font script="Phag" typeface="Phagspa"/>
-        <a:font script="Syrn" typeface="Estrangelo Edessa"/>
-        <a:font script="Syrj" typeface="Estrangelo Edessa"/>
-        <a:font script="Syre" typeface="Estrangelo Edessa"/>
-        <a:font script="Sora" typeface="Nirmala UI"/>
-        <a:font script="Tale" typeface="Microsoft Tai Le"/>
-        <a:font script="Talu" typeface="Microsoft New Tai Lue"/>
-        <a:font script="Tfng" typeface="Ebrima"/>
-      </a:minorFont>
-    </a:fontScheme>
-    <a:fmtScheme name="Office">
-      <a:fillStyleLst>
-        <a:solidFill>
-          <a:schemeClr val="phClr"/>
-        </a:solidFill>
-        <a:gradFill rotWithShape="1">
-          <a:gsLst>
-            <a:gs pos="0">
-              <a:schemeClr val="phClr">
-                <a:lumMod val="110000"/>
-                <a:satMod val="105000"/>
-                <a:tint val="67000"/>
-              </a:schemeClr>
-            </a:gs>
-            <a:gs pos="50000">
-              <a:schemeClr val="phClr">
-                <a:lumMod val="105000"/>
-                <a:satMod val="103000"/>
-                <a:tint val="73000"/>
-              </a:schemeClr>
-            </a:gs>
-            <a:gs pos="100000">
-              <a:schemeClr val="phClr">
-                <a:lumMod val="105000"/>
-                <a:satMod val="109000"/>
-                <a:tint val="81000"/>
-              </a:schemeClr>
-            </a:gs>
-          </a:gsLst>
-          <a:lin ang="5400000" scaled="0"/>
-        </a:gradFill>
-        <a:gradFill rotWithShape="1">
-          <a:gsLst>
-            <a:gs pos="0">
-              <a:schemeClr val="phClr">
-                <a:satMod val="103000"/>
-                <a:lumMod val="102000"/>
-                <a:tint val="94000"/>
-              </a:schemeClr>
-            </a:gs>
-            <a:gs pos="50000">
-              <a:schemeClr val="phClr">
-                <a:satMod val="110000"/>
-                <a:lumMod val="100000"/>
-                <a:shade val="100000"/>
-              </a:schemeClr>
-            </a:gs>
-            <a:gs pos="100000">
-              <a:schemeClr val="phClr">
-                <a:lumMod val="99000"/>
-                <a:satMod val="120000"/>
-                <a:shade val="78000"/>
-              </a:schemeClr>
-            </a:gs>
-          </a:gsLst>
-          <a:lin ang="5400000" scaled="0"/>
-        </a:gradFill>
-      </a:fillStyleLst>
-      <a:lnStyleLst>
-        <a:ln w="6350" cap="flat" cmpd="sng" algn="ctr">
-          <a:solidFill>
-            <a:schemeClr val="phClr"/>
-          </a:solidFill>
-          <a:prstDash val="solid"/>
-          <a:miter lim="800000"/>
-        </a:ln>
-        <a:ln w="12700" cap="flat" cmpd="sng" algn="ctr">
-          <a:solidFill>
-            <a:schemeClr val="phClr"/>
-          </a:solidFill>
-          <a:prstDash val="solid"/>
-          <a:miter lim="800000"/>
-        </a:ln>
-        <a:ln w="19050" cap="flat" cmpd="sng" algn="ctr">
-          <a:solidFill>
-            <a:schemeClr val="phClr"/>
-          </a:solidFill>
-          <a:prstDash val="solid"/>
-          <a:miter lim="800000"/>
-        </a:ln>
-      </a:lnStyleLst>
-      <a:effectStyleLst>
-        <a:effectStyle>
-          <a:effectLst/>
-        </a:effectStyle>
-        <a:effectStyle>
-          <a:effectLst/>
-        </a:effectStyle>
-        <a:effectStyle>
-          <a:effectLst>
-            <a:outerShdw blurRad="57150" dist="19050" dir="5400000" algn="ctr" rotWithShape="0">
-              <a:srgbClr val="000000">
-                <a:alpha val="63000"/>
-              </a:srgbClr>
-            </a:outerShdw>
-          </a:effectLst>
-        </a:effectStyle>
-      </a:effectStyleLst>
-      <a:bgFillStyleLst>
-        <a:solidFill>
-          <a:schemeClr val="phClr"/>
-        </a:solidFill>
-        <a:solidFill>
-          <a:schemeClr val="phClr">
-            <a:tint val="95000"/>
-            <a:satMod val="170000"/>
-          </a:schemeClr>
-        </a:solidFill>
-        <a:gradFill rotWithShape="1">
-          <a:gsLst>
-            <a:gs pos="0">
-              <a:schemeClr val="phClr">
-                <a:tint val="93000"/>
-                <a:satMod val="150000"/>
-                <a:shade val="98000"/>
-                <a:lumMod val="102000"/>
-              </a:schemeClr>
-            </a:gs>
-            <a:gs pos="50000">
-              <a:schemeClr val="phClr">
-                <a:tint val="98000"/>
-                <a:satMod val="130000"/>
-                <a:shade val="90000"/>
-                <a:lumMod val="103000"/>
-              </a:schemeClr>
-            </a:gs>
-            <a:gs pos="100000">
-              <a:schemeClr val="phClr">
-                <a:shade val="63000"/>
-                <a:satMod val="120000"/>
-              </a:schemeClr>
-            </a:gs>
-          </a:gsLst>
-          <a:lin ang="5400000" scaled="0"/>
-        </a:gradFill>
-      </a:bgFillStyleLst>
-    </a:fmtScheme>
-  </a:themeElements>
-  <a:objectDefaults>
-    <a:spDef>
-      <a:spPr/>
-      <a:bodyPr wrap="none">
-        <a:spAutoFit/>
-      </a:bodyPr>
-      <a:lstStyle>
-        <a:defPPr algn="l">
-          <a:defRPr sz="2400" dirty="0" smtClean="0">
-            <a:latin typeface="Helvetica Neue" panose="02000503000000020004" pitchFamily="2" charset="0"/>
-            <a:ea typeface="Helvetica Neue" panose="02000503000000020004" pitchFamily="2" charset="0"/>
-            <a:cs typeface="Helvetica Neue" panose="02000503000000020004" pitchFamily="2" charset="0"/>
-          </a:defRPr>
-        </a:defPPr>
-      </a:lstStyle>
-    </a:spDef>
-    <a:txDef>
-      <a:spPr>
-        <a:noFill/>
-      </a:spPr>
-      <a:bodyPr wrap="none" rtlCol="0">
-        <a:spAutoFit/>
-      </a:bodyPr>
-      <a:lstStyle>
-        <a:defPPr algn="l">
-          <a:defRPr dirty="0" smtClean="0">
-            <a:latin typeface="Helvetica Neue" panose="02000503000000020004" pitchFamily="2" charset="0"/>
-            <a:ea typeface="Helvetica Neue" panose="02000503000000020004" pitchFamily="2" charset="0"/>
-            <a:cs typeface="Helvetica Neue" panose="02000503000000020004" pitchFamily="2" charset="0"/>
-          </a:defRPr>
-        </a:defPPr>
-      </a:lstStyle>
-    </a:txDef>
-  </a:objectDefaults>
-  <a:extraClrSchemeLst/>
-  <a:extLst>
-    <a:ext uri="{05A4C25C-085E-4340-85A3-A5531E510DB2}">
-      <thm15:themeFamily xmlns:thm15="http://schemas.microsoft.com/office/thememl/2012/main" name="Office Theme" id="{62F939B6-93AF-4DB8-9C6B-D6C7DFDC589F}" vid="{4A3C46E8-61CC-4603-A589-7422A47A8E4A}"/>
-    </a:ext>
-  </a:extLst>
-</a:theme>
-</file>
-
-<file path=ppt/theme/theme3.xml><?xml version="1.0" encoding="utf-8"?>
 <a:theme xmlns:a="http://schemas.openxmlformats.org/drawingml/2006/main" name="Office Theme">
   <a:themeElements>
     <a:clrScheme name="Office">

--- a/reference/archie/presentations/NPQG Fundamentals - Time and Space.pptx
+++ b/reference/archie/presentations/NPQG Fundamentals - Time and Space.pptx
@@ -7816,7 +7816,7 @@
 </file>
 
 <file path=ppt/slides/slide1.xml><?xml version="1.0" encoding="utf-8"?>
-<p:sld xmlns:a="http://schemas.openxmlformats.org/drawingml/2006/main" xmlns:r="http://schemas.openxmlformats.org/officeDocument/2006/relationships" xmlns:p="http://schemas.openxmlformats.org/presentationml/2006/main">
+<p:sld xmlns:a="http://schemas.openxmlformats.org/drawingml/2006/main" xmlns:a16="http://schemas.microsoft.com/office/drawing/2014/main" xmlns:ns3="http://schemas.microsoft.com/office/powerpoint/2010/main" xmlns:p="http://schemas.openxmlformats.org/presentationml/2006/main">
   <p:cSld>
     <p:bg>
       <p:bgPr>
@@ -7845,7 +7845,7 @@
           <p:cNvPr id="2" name="TextBox 1">
             <a:extLst>
               <a:ext uri="{FF2B5EF4-FFF2-40B4-BE49-F238E27FC236}">
-                <a16:creationId xmlns:a16="http://schemas.microsoft.com/office/drawing/2014/main" id="{1D77ACA5-3691-8FEB-0266-8D47BBCCF4C6}"/>
+                <a16:creationId id="{1D77ACA5-3691-8FEB-0266-8D47BBCCF4C6}"/>
               </a:ext>
             </a:extLst>
           </p:cNvPr>
@@ -7905,10 +7905,166 @@
           </a:p>
         </p:txBody>
       </p:sp>
+      <p:sp>
+        <p:nvSpPr>
+          <p:cNvPr id="3" name="Footer Placeholder 3"/>
+          <p:cNvSpPr txBox="1">
+            <a:spLocks/>
+          </p:cNvSpPr>
+          <p:nvPr/>
+        </p:nvSpPr>
+        <p:spPr>
+          <a:xfrm>
+            <a:off x="10942204" y="6481737"/>
+            <a:ext cx="1217443" cy="365125"/>
+          </a:xfrm>
+          <a:prstGeom prst="rect">
+            <a:avLst/>
+          </a:prstGeom>
+        </p:spPr>
+        <p:txBody>
+          <a:bodyPr vert="horz" lIns="91440" tIns="45720" rIns="91440" bIns="45720" rtlCol="0" anchor="ctr"/>
+          <a:lstStyle>
+            <a:defPPr>
+              <a:defRPr lang="en-US"/>
+            </a:defPPr>
+            <a:lvl1pPr marL="0" algn="ctr" defTabSz="914400" rtl="0" eaLnBrk="1" latinLnBrk="0" hangingPunct="1">
+              <a:defRPr sz="1200" kern="1200">
+                <a:solidFill>
+                  <a:schemeClr val="tx1">
+                    <a:tint val="75000"/>
+                  </a:schemeClr>
+                </a:solidFill>
+                <a:latin typeface="+mn-lt"/>
+                <a:ea typeface="+mn-ea"/>
+                <a:cs typeface="+mn-cs"/>
+              </a:defRPr>
+            </a:lvl1pPr>
+            <a:lvl2pPr marL="457200" algn="l" defTabSz="914400" rtl="0" eaLnBrk="1" latinLnBrk="0" hangingPunct="1">
+              <a:defRPr sz="1800" kern="1200">
+                <a:solidFill>
+                  <a:schemeClr val="tx1"/>
+                </a:solidFill>
+                <a:latin typeface="+mn-lt"/>
+                <a:ea typeface="+mn-ea"/>
+                <a:cs typeface="+mn-cs"/>
+              </a:defRPr>
+            </a:lvl2pPr>
+            <a:lvl3pPr marL="914400" algn="l" defTabSz="914400" rtl="0" eaLnBrk="1" latinLnBrk="0" hangingPunct="1">
+              <a:defRPr sz="1800" kern="1200">
+                <a:solidFill>
+                  <a:schemeClr val="tx1"/>
+                </a:solidFill>
+                <a:latin typeface="+mn-lt"/>
+                <a:ea typeface="+mn-ea"/>
+                <a:cs typeface="+mn-cs"/>
+              </a:defRPr>
+            </a:lvl3pPr>
+            <a:lvl4pPr marL="1371600" algn="l" defTabSz="914400" rtl="0" eaLnBrk="1" latinLnBrk="0" hangingPunct="1">
+              <a:defRPr sz="1800" kern="1200">
+                <a:solidFill>
+                  <a:schemeClr val="tx1"/>
+                </a:solidFill>
+                <a:latin typeface="+mn-lt"/>
+                <a:ea typeface="+mn-ea"/>
+                <a:cs typeface="+mn-cs"/>
+              </a:defRPr>
+            </a:lvl4pPr>
+            <a:lvl5pPr marL="1828800" algn="l" defTabSz="914400" rtl="0" eaLnBrk="1" latinLnBrk="0" hangingPunct="1">
+              <a:defRPr sz="1800" kern="1200">
+                <a:solidFill>
+                  <a:schemeClr val="tx1"/>
+                </a:solidFill>
+                <a:latin typeface="+mn-lt"/>
+                <a:ea typeface="+mn-ea"/>
+                <a:cs typeface="+mn-cs"/>
+              </a:defRPr>
+            </a:lvl5pPr>
+            <a:lvl6pPr marL="2286000" algn="l" defTabSz="914400" rtl="0" eaLnBrk="1" latinLnBrk="0" hangingPunct="1">
+              <a:defRPr sz="1800" kern="1200">
+                <a:solidFill>
+                  <a:schemeClr val="tx1"/>
+                </a:solidFill>
+                <a:latin typeface="+mn-lt"/>
+                <a:ea typeface="+mn-ea"/>
+                <a:cs typeface="+mn-cs"/>
+              </a:defRPr>
+            </a:lvl6pPr>
+            <a:lvl7pPr marL="2743200" algn="l" defTabSz="914400" rtl="0" eaLnBrk="1" latinLnBrk="0" hangingPunct="1">
+              <a:defRPr sz="1800" kern="1200">
+                <a:solidFill>
+                  <a:schemeClr val="tx1"/>
+                </a:solidFill>
+                <a:latin typeface="+mn-lt"/>
+                <a:ea typeface="+mn-ea"/>
+                <a:cs typeface="+mn-cs"/>
+              </a:defRPr>
+            </a:lvl7pPr>
+            <a:lvl8pPr marL="3200400" algn="l" defTabSz="914400" rtl="0" eaLnBrk="1" latinLnBrk="0" hangingPunct="1">
+              <a:defRPr sz="1800" kern="1200">
+                <a:solidFill>
+                  <a:schemeClr val="tx1"/>
+                </a:solidFill>
+                <a:latin typeface="+mn-lt"/>
+                <a:ea typeface="+mn-ea"/>
+                <a:cs typeface="+mn-cs"/>
+              </a:defRPr>
+            </a:lvl8pPr>
+            <a:lvl9pPr marL="3657600" algn="l" defTabSz="914400" rtl="0" eaLnBrk="1" latinLnBrk="0" hangingPunct="1">
+              <a:defRPr sz="1800" kern="1200">
+                <a:solidFill>
+                  <a:schemeClr val="tx1"/>
+                </a:solidFill>
+                <a:latin typeface="+mn-lt"/>
+                <a:ea typeface="+mn-ea"/>
+                <a:cs typeface="+mn-cs"/>
+              </a:defRPr>
+            </a:lvl9pPr>
+          </a:lstStyle>
+          <a:p>
+            <a:pPr marL="0" marR="0" lvl="0" indent="0" algn="ctr" defTabSz="914400" rtl="0" eaLnBrk="1" fontAlgn="auto" latinLnBrk="0" hangingPunct="1">
+              <a:lnSpc>
+                <a:spcPct val="100000"/>
+              </a:lnSpc>
+              <a:spcBef>
+                <a:spcPts val="0"/>
+              </a:spcBef>
+              <a:spcAft>
+                <a:spcPts val="0"/>
+              </a:spcAft>
+              <a:buClrTx/>
+              <a:buSzTx/>
+              <a:buFontTx/>
+              <a:buNone/>
+              <a:tabLst/>
+              <a:defRPr/>
+            </a:pPr>
+            <a:r>
+              <a:rPr kumimoji="0" lang="en-US" sz="1200" b="0" i="0" u="none" strike="noStrike" kern="1200" cap="none" spc="0" normalizeH="0" baseline="0" noProof="0" dirty="0">
+                <a:ln>
+                  <a:noFill/>
+                </a:ln>
+                <a:solidFill>
+                  <a:prstClr val="black">
+                    <a:tint val="75000"/>
+                  </a:prstClr>
+                </a:solidFill>
+                <a:effectLst/>
+                <a:uLnTx/>
+                <a:uFillTx/>
+                <a:latin typeface="Helvetica Neue" panose="02000503000000020004" pitchFamily="2" charset="0"/>
+                <a:ea typeface="Helvetica Neue" panose="02000503000000020004" pitchFamily="2" charset="0"/>
+                <a:cs typeface="Helvetica Neue" panose="02000503000000020004" pitchFamily="2" charset="0"/>
+              </a:rPr>
+              <a:t>architrino.com</a:t>
+            </a:r>
+          </a:p>
+        </p:txBody>
+      </p:sp>
     </p:spTree>
     <p:extLst>
       <p:ext uri="{BB962C8B-B14F-4D97-AF65-F5344CB8AC3E}">
-        <p14:creationId xmlns:p14="http://schemas.microsoft.com/office/powerpoint/2010/main" val="2348934641"/>
+        <ns3:creationId val="2348934641"/>
       </p:ext>
     </p:extLst>
   </p:cSld>
@@ -7919,7 +8075,7 @@
 </file>
 
 <file path=ppt/slides/slide2.xml><?xml version="1.0" encoding="utf-8"?>
-<p:sld xmlns:a="http://schemas.openxmlformats.org/drawingml/2006/main" xmlns:r="http://schemas.openxmlformats.org/officeDocument/2006/relationships" xmlns:p="http://schemas.openxmlformats.org/presentationml/2006/main">
+<p:sld xmlns:a="http://schemas.openxmlformats.org/drawingml/2006/main" xmlns:a16="http://schemas.microsoft.com/office/drawing/2014/main" xmlns:ns3="http://schemas.microsoft.com/office/powerpoint/2010/main" xmlns:p="http://schemas.openxmlformats.org/presentationml/2006/main">
   <p:cSld>
     <p:bg>
       <p:bgPr>
@@ -7948,7 +8104,7 @@
           <p:cNvPr id="3" name="Footer Placeholder 3">
             <a:extLst>
               <a:ext uri="{FF2B5EF4-FFF2-40B4-BE49-F238E27FC236}">
-                <a16:creationId xmlns:a16="http://schemas.microsoft.com/office/drawing/2014/main" id="{3E7D1A46-6CBC-414E-A5E8-3168B31664F2}"/>
+                <a16:creationId id="{3E7D1A46-6CBC-414E-A5E8-3168B31664F2}"/>
               </a:ext>
             </a:extLst>
           </p:cNvPr>
@@ -8110,7 +8266,7 @@
           <p:cNvPr id="6" name="TextBox 5">
             <a:extLst>
               <a:ext uri="{FF2B5EF4-FFF2-40B4-BE49-F238E27FC236}">
-                <a16:creationId xmlns:a16="http://schemas.microsoft.com/office/drawing/2014/main" id="{CABB2FF6-BE6B-829E-697C-BADE07423A98}"/>
+                <a16:creationId id="{CABB2FF6-BE6B-829E-697C-BADE07423A98}"/>
               </a:ext>
             </a:extLst>
           </p:cNvPr>
@@ -8334,7 +8490,7 @@
           <p:cNvPr id="2" name="Group 1">
             <a:extLst>
               <a:ext uri="{FF2B5EF4-FFF2-40B4-BE49-F238E27FC236}">
-                <a16:creationId xmlns:a16="http://schemas.microsoft.com/office/drawing/2014/main" id="{8A870217-A4FC-5467-6EF3-60F128F4990F}"/>
+                <a16:creationId id="{8A870217-A4FC-5467-6EF3-60F128F4990F}"/>
               </a:ext>
             </a:extLst>
           </p:cNvPr>
@@ -8354,7 +8510,7 @@
             <p:cNvPr id="4" name="Rectangle 3">
               <a:extLst>
                 <a:ext uri="{FF2B5EF4-FFF2-40B4-BE49-F238E27FC236}">
-                  <a16:creationId xmlns:a16="http://schemas.microsoft.com/office/drawing/2014/main" id="{75AB2963-84E2-53E1-22D0-597AF4F756CB}"/>
+                  <a16:creationId id="{75AB2963-84E2-53E1-22D0-597AF4F756CB}"/>
                 </a:ext>
               </a:extLst>
             </p:cNvPr>
@@ -8490,7 +8646,7 @@
             <p:cNvPr id="7" name="Straight Arrow Connector 6">
               <a:extLst>
                 <a:ext uri="{FF2B5EF4-FFF2-40B4-BE49-F238E27FC236}">
-                  <a16:creationId xmlns:a16="http://schemas.microsoft.com/office/drawing/2014/main" id="{3EC0E443-C7DC-60F3-EAFC-E4DEAAD5372C}"/>
+                  <a16:creationId id="{3EC0E443-C7DC-60F3-EAFC-E4DEAAD5372C}"/>
                 </a:ext>
               </a:extLst>
             </p:cNvPr>
@@ -8537,7 +8693,7 @@
           <p:cNvPr id="8" name="Group 7">
             <a:extLst>
               <a:ext uri="{FF2B5EF4-FFF2-40B4-BE49-F238E27FC236}">
-                <a16:creationId xmlns:a16="http://schemas.microsoft.com/office/drawing/2014/main" id="{551A3B37-4989-6F0F-1718-9F1698C822DA}"/>
+                <a16:creationId id="{551A3B37-4989-6F0F-1718-9F1698C822DA}"/>
               </a:ext>
             </a:extLst>
           </p:cNvPr>
@@ -8557,7 +8713,7 @@
             <p:cNvPr id="9" name="Group 8">
               <a:extLst>
                 <a:ext uri="{FF2B5EF4-FFF2-40B4-BE49-F238E27FC236}">
-                  <a16:creationId xmlns:a16="http://schemas.microsoft.com/office/drawing/2014/main" id="{2DB89AFD-AAFA-0A63-3B58-63A4C0E967A9}"/>
+                  <a16:creationId id="{2DB89AFD-AAFA-0A63-3B58-63A4C0E967A9}"/>
                 </a:ext>
               </a:extLst>
             </p:cNvPr>
@@ -8577,7 +8733,7 @@
               <p:cNvPr id="11" name="Straight Arrow Connector 10">
                 <a:extLst>
                   <a:ext uri="{FF2B5EF4-FFF2-40B4-BE49-F238E27FC236}">
-                    <a16:creationId xmlns:a16="http://schemas.microsoft.com/office/drawing/2014/main" id="{71B24A4D-935C-9032-07F6-AE704ED13EAB}"/>
+                    <a16:creationId id="{71B24A4D-935C-9032-07F6-AE704ED13EAB}"/>
                   </a:ext>
                 </a:extLst>
               </p:cNvPr>
@@ -8623,7 +8779,7 @@
               <p:cNvPr id="12" name="Straight Arrow Connector 11">
                 <a:extLst>
                   <a:ext uri="{FF2B5EF4-FFF2-40B4-BE49-F238E27FC236}">
-                    <a16:creationId xmlns:a16="http://schemas.microsoft.com/office/drawing/2014/main" id="{9BFEC0FF-8745-6A86-6F7F-092E3A64C7DD}"/>
+                    <a16:creationId id="{9BFEC0FF-8745-6A86-6F7F-092E3A64C7DD}"/>
                   </a:ext>
                 </a:extLst>
               </p:cNvPr>
@@ -8669,7 +8825,7 @@
               <p:cNvPr id="13" name="Straight Arrow Connector 12">
                 <a:extLst>
                   <a:ext uri="{FF2B5EF4-FFF2-40B4-BE49-F238E27FC236}">
-                    <a16:creationId xmlns:a16="http://schemas.microsoft.com/office/drawing/2014/main" id="{FE659F7D-5067-2974-72EF-292AB4C98936}"/>
+                    <a16:creationId id="{FE659F7D-5067-2974-72EF-292AB4C98936}"/>
                   </a:ext>
                 </a:extLst>
               </p:cNvPr>
@@ -8716,7 +8872,7 @@
             <p:cNvPr id="10" name="Rectangle 9">
               <a:extLst>
                 <a:ext uri="{FF2B5EF4-FFF2-40B4-BE49-F238E27FC236}">
-                  <a16:creationId xmlns:a16="http://schemas.microsoft.com/office/drawing/2014/main" id="{DAFC367D-676E-3E87-4BD2-DC2541ED9645}"/>
+                  <a16:creationId id="{DAFC367D-676E-3E87-4BD2-DC2541ED9645}"/>
                 </a:ext>
               </a:extLst>
             </p:cNvPr>
@@ -8848,10 +9004,166 @@
           </p:txBody>
         </p:sp>
       </p:grpSp>
+      <p:sp>
+        <p:nvSpPr>
+          <p:cNvPr id="14" name="Footer Placeholder 3"/>
+          <p:cNvSpPr txBox="1">
+            <a:spLocks/>
+          </p:cNvSpPr>
+          <p:nvPr/>
+        </p:nvSpPr>
+        <p:spPr>
+          <a:xfrm>
+            <a:off x="10942204" y="6481737"/>
+            <a:ext cx="1217443" cy="365125"/>
+          </a:xfrm>
+          <a:prstGeom prst="rect">
+            <a:avLst/>
+          </a:prstGeom>
+        </p:spPr>
+        <p:txBody>
+          <a:bodyPr vert="horz" lIns="91440" tIns="45720" rIns="91440" bIns="45720" rtlCol="0" anchor="ctr"/>
+          <a:lstStyle>
+            <a:defPPr>
+              <a:defRPr lang="en-US"/>
+            </a:defPPr>
+            <a:lvl1pPr marL="0" algn="ctr" defTabSz="914400" rtl="0" eaLnBrk="1" latinLnBrk="0" hangingPunct="1">
+              <a:defRPr sz="1200" kern="1200">
+                <a:solidFill>
+                  <a:schemeClr val="tx1">
+                    <a:tint val="75000"/>
+                  </a:schemeClr>
+                </a:solidFill>
+                <a:latin typeface="+mn-lt"/>
+                <a:ea typeface="+mn-ea"/>
+                <a:cs typeface="+mn-cs"/>
+              </a:defRPr>
+            </a:lvl1pPr>
+            <a:lvl2pPr marL="457200" algn="l" defTabSz="914400" rtl="0" eaLnBrk="1" latinLnBrk="0" hangingPunct="1">
+              <a:defRPr sz="1800" kern="1200">
+                <a:solidFill>
+                  <a:schemeClr val="tx1"/>
+                </a:solidFill>
+                <a:latin typeface="+mn-lt"/>
+                <a:ea typeface="+mn-ea"/>
+                <a:cs typeface="+mn-cs"/>
+              </a:defRPr>
+            </a:lvl2pPr>
+            <a:lvl3pPr marL="914400" algn="l" defTabSz="914400" rtl="0" eaLnBrk="1" latinLnBrk="0" hangingPunct="1">
+              <a:defRPr sz="1800" kern="1200">
+                <a:solidFill>
+                  <a:schemeClr val="tx1"/>
+                </a:solidFill>
+                <a:latin typeface="+mn-lt"/>
+                <a:ea typeface="+mn-ea"/>
+                <a:cs typeface="+mn-cs"/>
+              </a:defRPr>
+            </a:lvl3pPr>
+            <a:lvl4pPr marL="1371600" algn="l" defTabSz="914400" rtl="0" eaLnBrk="1" latinLnBrk="0" hangingPunct="1">
+              <a:defRPr sz="1800" kern="1200">
+                <a:solidFill>
+                  <a:schemeClr val="tx1"/>
+                </a:solidFill>
+                <a:latin typeface="+mn-lt"/>
+                <a:ea typeface="+mn-ea"/>
+                <a:cs typeface="+mn-cs"/>
+              </a:defRPr>
+            </a:lvl4pPr>
+            <a:lvl5pPr marL="1828800" algn="l" defTabSz="914400" rtl="0" eaLnBrk="1" latinLnBrk="0" hangingPunct="1">
+              <a:defRPr sz="1800" kern="1200">
+                <a:solidFill>
+                  <a:schemeClr val="tx1"/>
+                </a:solidFill>
+                <a:latin typeface="+mn-lt"/>
+                <a:ea typeface="+mn-ea"/>
+                <a:cs typeface="+mn-cs"/>
+              </a:defRPr>
+            </a:lvl5pPr>
+            <a:lvl6pPr marL="2286000" algn="l" defTabSz="914400" rtl="0" eaLnBrk="1" latinLnBrk="0" hangingPunct="1">
+              <a:defRPr sz="1800" kern="1200">
+                <a:solidFill>
+                  <a:schemeClr val="tx1"/>
+                </a:solidFill>
+                <a:latin typeface="+mn-lt"/>
+                <a:ea typeface="+mn-ea"/>
+                <a:cs typeface="+mn-cs"/>
+              </a:defRPr>
+            </a:lvl6pPr>
+            <a:lvl7pPr marL="2743200" algn="l" defTabSz="914400" rtl="0" eaLnBrk="1" latinLnBrk="0" hangingPunct="1">
+              <a:defRPr sz="1800" kern="1200">
+                <a:solidFill>
+                  <a:schemeClr val="tx1"/>
+                </a:solidFill>
+                <a:latin typeface="+mn-lt"/>
+                <a:ea typeface="+mn-ea"/>
+                <a:cs typeface="+mn-cs"/>
+              </a:defRPr>
+            </a:lvl7pPr>
+            <a:lvl8pPr marL="3200400" algn="l" defTabSz="914400" rtl="0" eaLnBrk="1" latinLnBrk="0" hangingPunct="1">
+              <a:defRPr sz="1800" kern="1200">
+                <a:solidFill>
+                  <a:schemeClr val="tx1"/>
+                </a:solidFill>
+                <a:latin typeface="+mn-lt"/>
+                <a:ea typeface="+mn-ea"/>
+                <a:cs typeface="+mn-cs"/>
+              </a:defRPr>
+            </a:lvl8pPr>
+            <a:lvl9pPr marL="3657600" algn="l" defTabSz="914400" rtl="0" eaLnBrk="1" latinLnBrk="0" hangingPunct="1">
+              <a:defRPr sz="1800" kern="1200">
+                <a:solidFill>
+                  <a:schemeClr val="tx1"/>
+                </a:solidFill>
+                <a:latin typeface="+mn-lt"/>
+                <a:ea typeface="+mn-ea"/>
+                <a:cs typeface="+mn-cs"/>
+              </a:defRPr>
+            </a:lvl9pPr>
+          </a:lstStyle>
+          <a:p>
+            <a:pPr marL="0" marR="0" lvl="0" indent="0" algn="ctr" defTabSz="914400" rtl="0" eaLnBrk="1" fontAlgn="auto" latinLnBrk="0" hangingPunct="1">
+              <a:lnSpc>
+                <a:spcPct val="100000"/>
+              </a:lnSpc>
+              <a:spcBef>
+                <a:spcPts val="0"/>
+              </a:spcBef>
+              <a:spcAft>
+                <a:spcPts val="0"/>
+              </a:spcAft>
+              <a:buClrTx/>
+              <a:buSzTx/>
+              <a:buFontTx/>
+              <a:buNone/>
+              <a:tabLst/>
+              <a:defRPr/>
+            </a:pPr>
+            <a:r>
+              <a:rPr kumimoji="0" lang="en-US" sz="1200" b="0" i="0" u="none" strike="noStrike" kern="1200" cap="none" spc="0" normalizeH="0" baseline="0" noProof="0" dirty="0">
+                <a:ln>
+                  <a:noFill/>
+                </a:ln>
+                <a:solidFill>
+                  <a:prstClr val="black">
+                    <a:tint val="75000"/>
+                  </a:prstClr>
+                </a:solidFill>
+                <a:effectLst/>
+                <a:uLnTx/>
+                <a:uFillTx/>
+                <a:latin typeface="Helvetica Neue" panose="02000503000000020004" pitchFamily="2" charset="0"/>
+                <a:ea typeface="Helvetica Neue" panose="02000503000000020004" pitchFamily="2" charset="0"/>
+                <a:cs typeface="Helvetica Neue" panose="02000503000000020004" pitchFamily="2" charset="0"/>
+              </a:rPr>
+              <a:t>architrino.com</a:t>
+            </a:r>
+          </a:p>
+        </p:txBody>
+      </p:sp>
     </p:spTree>
     <p:extLst>
       <p:ext uri="{BB962C8B-B14F-4D97-AF65-F5344CB8AC3E}">
-        <p14:creationId xmlns:p14="http://schemas.microsoft.com/office/powerpoint/2010/main" val="3899871052"/>
+        <ns3:creationId val="3899871052"/>
       </p:ext>
     </p:extLst>
   </p:cSld>
@@ -8862,7 +9174,7 @@
 </file>
 
 <file path=ppt/slides/slide3.xml><?xml version="1.0" encoding="utf-8"?>
-<p:sld xmlns:a="http://schemas.openxmlformats.org/drawingml/2006/main" xmlns:r="http://schemas.openxmlformats.org/officeDocument/2006/relationships" xmlns:p="http://schemas.openxmlformats.org/presentationml/2006/main">
+<p:sld xmlns:a="http://schemas.openxmlformats.org/drawingml/2006/main" xmlns:a16="http://schemas.microsoft.com/office/drawing/2014/main" xmlns:ns3="http://schemas.microsoft.com/office/powerpoint/2010/main" xmlns:p="http://schemas.openxmlformats.org/presentationml/2006/main">
   <p:cSld>
     <p:bg>
       <p:bgPr>
@@ -8891,7 +9203,7 @@
           <p:cNvPr id="3" name="Footer Placeholder 3">
             <a:extLst>
               <a:ext uri="{FF2B5EF4-FFF2-40B4-BE49-F238E27FC236}">
-                <a16:creationId xmlns:a16="http://schemas.microsoft.com/office/drawing/2014/main" id="{3E7D1A46-6CBC-414E-A5E8-3168B31664F2}"/>
+                <a16:creationId id="{3E7D1A46-6CBC-414E-A5E8-3168B31664F2}"/>
               </a:ext>
             </a:extLst>
           </p:cNvPr>
@@ -9053,7 +9365,7 @@
           <p:cNvPr id="6" name="TextBox 5">
             <a:extLst>
               <a:ext uri="{FF2B5EF4-FFF2-40B4-BE49-F238E27FC236}">
-                <a16:creationId xmlns:a16="http://schemas.microsoft.com/office/drawing/2014/main" id="{CABB2FF6-BE6B-829E-697C-BADE07423A98}"/>
+                <a16:creationId id="{CABB2FF6-BE6B-829E-697C-BADE07423A98}"/>
               </a:ext>
             </a:extLst>
           </p:cNvPr>
@@ -9274,10 +9586,166 @@
           </a:p>
         </p:txBody>
       </p:sp>
+      <p:sp>
+        <p:nvSpPr>
+          <p:cNvPr id="7" name="Footer Placeholder 3"/>
+          <p:cNvSpPr txBox="1">
+            <a:spLocks/>
+          </p:cNvSpPr>
+          <p:nvPr/>
+        </p:nvSpPr>
+        <p:spPr>
+          <a:xfrm>
+            <a:off x="10942204" y="6481737"/>
+            <a:ext cx="1217443" cy="365125"/>
+          </a:xfrm>
+          <a:prstGeom prst="rect">
+            <a:avLst/>
+          </a:prstGeom>
+        </p:spPr>
+        <p:txBody>
+          <a:bodyPr vert="horz" lIns="91440" tIns="45720" rIns="91440" bIns="45720" rtlCol="0" anchor="ctr"/>
+          <a:lstStyle>
+            <a:defPPr>
+              <a:defRPr lang="en-US"/>
+            </a:defPPr>
+            <a:lvl1pPr marL="0" algn="ctr" defTabSz="914400" rtl="0" eaLnBrk="1" latinLnBrk="0" hangingPunct="1">
+              <a:defRPr sz="1200" kern="1200">
+                <a:solidFill>
+                  <a:schemeClr val="tx1">
+                    <a:tint val="75000"/>
+                  </a:schemeClr>
+                </a:solidFill>
+                <a:latin typeface="+mn-lt"/>
+                <a:ea typeface="+mn-ea"/>
+                <a:cs typeface="+mn-cs"/>
+              </a:defRPr>
+            </a:lvl1pPr>
+            <a:lvl2pPr marL="457200" algn="l" defTabSz="914400" rtl="0" eaLnBrk="1" latinLnBrk="0" hangingPunct="1">
+              <a:defRPr sz="1800" kern="1200">
+                <a:solidFill>
+                  <a:schemeClr val="tx1"/>
+                </a:solidFill>
+                <a:latin typeface="+mn-lt"/>
+                <a:ea typeface="+mn-ea"/>
+                <a:cs typeface="+mn-cs"/>
+              </a:defRPr>
+            </a:lvl2pPr>
+            <a:lvl3pPr marL="914400" algn="l" defTabSz="914400" rtl="0" eaLnBrk="1" latinLnBrk="0" hangingPunct="1">
+              <a:defRPr sz="1800" kern="1200">
+                <a:solidFill>
+                  <a:schemeClr val="tx1"/>
+                </a:solidFill>
+                <a:latin typeface="+mn-lt"/>
+                <a:ea typeface="+mn-ea"/>
+                <a:cs typeface="+mn-cs"/>
+              </a:defRPr>
+            </a:lvl3pPr>
+            <a:lvl4pPr marL="1371600" algn="l" defTabSz="914400" rtl="0" eaLnBrk="1" latinLnBrk="0" hangingPunct="1">
+              <a:defRPr sz="1800" kern="1200">
+                <a:solidFill>
+                  <a:schemeClr val="tx1"/>
+                </a:solidFill>
+                <a:latin typeface="+mn-lt"/>
+                <a:ea typeface="+mn-ea"/>
+                <a:cs typeface="+mn-cs"/>
+              </a:defRPr>
+            </a:lvl4pPr>
+            <a:lvl5pPr marL="1828800" algn="l" defTabSz="914400" rtl="0" eaLnBrk="1" latinLnBrk="0" hangingPunct="1">
+              <a:defRPr sz="1800" kern="1200">
+                <a:solidFill>
+                  <a:schemeClr val="tx1"/>
+                </a:solidFill>
+                <a:latin typeface="+mn-lt"/>
+                <a:ea typeface="+mn-ea"/>
+                <a:cs typeface="+mn-cs"/>
+              </a:defRPr>
+            </a:lvl5pPr>
+            <a:lvl6pPr marL="2286000" algn="l" defTabSz="914400" rtl="0" eaLnBrk="1" latinLnBrk="0" hangingPunct="1">
+              <a:defRPr sz="1800" kern="1200">
+                <a:solidFill>
+                  <a:schemeClr val="tx1"/>
+                </a:solidFill>
+                <a:latin typeface="+mn-lt"/>
+                <a:ea typeface="+mn-ea"/>
+                <a:cs typeface="+mn-cs"/>
+              </a:defRPr>
+            </a:lvl6pPr>
+            <a:lvl7pPr marL="2743200" algn="l" defTabSz="914400" rtl="0" eaLnBrk="1" latinLnBrk="0" hangingPunct="1">
+              <a:defRPr sz="1800" kern="1200">
+                <a:solidFill>
+                  <a:schemeClr val="tx1"/>
+                </a:solidFill>
+                <a:latin typeface="+mn-lt"/>
+                <a:ea typeface="+mn-ea"/>
+                <a:cs typeface="+mn-cs"/>
+              </a:defRPr>
+            </a:lvl7pPr>
+            <a:lvl8pPr marL="3200400" algn="l" defTabSz="914400" rtl="0" eaLnBrk="1" latinLnBrk="0" hangingPunct="1">
+              <a:defRPr sz="1800" kern="1200">
+                <a:solidFill>
+                  <a:schemeClr val="tx1"/>
+                </a:solidFill>
+                <a:latin typeface="+mn-lt"/>
+                <a:ea typeface="+mn-ea"/>
+                <a:cs typeface="+mn-cs"/>
+              </a:defRPr>
+            </a:lvl8pPr>
+            <a:lvl9pPr marL="3657600" algn="l" defTabSz="914400" rtl="0" eaLnBrk="1" latinLnBrk="0" hangingPunct="1">
+              <a:defRPr sz="1800" kern="1200">
+                <a:solidFill>
+                  <a:schemeClr val="tx1"/>
+                </a:solidFill>
+                <a:latin typeface="+mn-lt"/>
+                <a:ea typeface="+mn-ea"/>
+                <a:cs typeface="+mn-cs"/>
+              </a:defRPr>
+            </a:lvl9pPr>
+          </a:lstStyle>
+          <a:p>
+            <a:pPr marL="0" marR="0" lvl="0" indent="0" algn="ctr" defTabSz="914400" rtl="0" eaLnBrk="1" fontAlgn="auto" latinLnBrk="0" hangingPunct="1">
+              <a:lnSpc>
+                <a:spcPct val="100000"/>
+              </a:lnSpc>
+              <a:spcBef>
+                <a:spcPts val="0"/>
+              </a:spcBef>
+              <a:spcAft>
+                <a:spcPts val="0"/>
+              </a:spcAft>
+              <a:buClrTx/>
+              <a:buSzTx/>
+              <a:buFontTx/>
+              <a:buNone/>
+              <a:tabLst/>
+              <a:defRPr/>
+            </a:pPr>
+            <a:r>
+              <a:rPr kumimoji="0" lang="en-US" sz="1200" b="0" i="0" u="none" strike="noStrike" kern="1200" cap="none" spc="0" normalizeH="0" baseline="0" noProof="0" dirty="0">
+                <a:ln>
+                  <a:noFill/>
+                </a:ln>
+                <a:solidFill>
+                  <a:prstClr val="black">
+                    <a:tint val="75000"/>
+                  </a:prstClr>
+                </a:solidFill>
+                <a:effectLst/>
+                <a:uLnTx/>
+                <a:uFillTx/>
+                <a:latin typeface="Helvetica Neue" panose="02000503000000020004" pitchFamily="2" charset="0"/>
+                <a:ea typeface="Helvetica Neue" panose="02000503000000020004" pitchFamily="2" charset="0"/>
+                <a:cs typeface="Helvetica Neue" panose="02000503000000020004" pitchFamily="2" charset="0"/>
+              </a:rPr>
+              <a:t>architrino.com</a:t>
+            </a:r>
+          </a:p>
+        </p:txBody>
+      </p:sp>
     </p:spTree>
     <p:extLst>
       <p:ext uri="{BB962C8B-B14F-4D97-AF65-F5344CB8AC3E}">
-        <p14:creationId xmlns:p14="http://schemas.microsoft.com/office/powerpoint/2010/main" val="2571834048"/>
+        <ns3:creationId val="2571834048"/>
       </p:ext>
     </p:extLst>
   </p:cSld>
@@ -9288,7 +9756,7 @@
 </file>
 
 <file path=ppt/slides/slide4.xml><?xml version="1.0" encoding="utf-8"?>
-<p:sld xmlns:a="http://schemas.openxmlformats.org/drawingml/2006/main" xmlns:r="http://schemas.openxmlformats.org/officeDocument/2006/relationships" xmlns:p="http://schemas.openxmlformats.org/presentationml/2006/main">
+<p:sld xmlns:a="http://schemas.openxmlformats.org/drawingml/2006/main" xmlns:a16="http://schemas.microsoft.com/office/drawing/2014/main" xmlns:ns3="http://schemas.microsoft.com/office/powerpoint/2010/main" xmlns:p="http://schemas.openxmlformats.org/presentationml/2006/main">
   <p:cSld>
     <p:bg>
       <p:bgPr>
@@ -9317,7 +9785,7 @@
           <p:cNvPr id="5" name="Footer Placeholder 3">
             <a:extLst>
               <a:ext uri="{FF2B5EF4-FFF2-40B4-BE49-F238E27FC236}">
-                <a16:creationId xmlns:a16="http://schemas.microsoft.com/office/drawing/2014/main" id="{39D3BA72-1E87-6944-A0DE-BB8978697D5A}"/>
+                <a16:creationId id="{39D3BA72-1E87-6944-A0DE-BB8978697D5A}"/>
               </a:ext>
             </a:extLst>
           </p:cNvPr>
@@ -9479,7 +9947,7 @@
           <p:cNvPr id="3" name="TextBox 2">
             <a:extLst>
               <a:ext uri="{FF2B5EF4-FFF2-40B4-BE49-F238E27FC236}">
-                <a16:creationId xmlns:a16="http://schemas.microsoft.com/office/drawing/2014/main" id="{96DF0645-8B53-9FBF-CA5E-9D115D31C225}"/>
+                <a16:creationId id="{96DF0645-8B53-9FBF-CA5E-9D115D31C225}"/>
               </a:ext>
             </a:extLst>
           </p:cNvPr>
@@ -9604,7 +10072,7 @@
                 <a:ea typeface="Helvetica Neue" panose="02000503000000020004" pitchFamily="2" charset="0"/>
                 <a:cs typeface="Helvetica Neue" panose="02000503000000020004" pitchFamily="2" charset="0"/>
               </a:rPr>
-              <a:t>energetic point potentials </a:t>
+              <a:t>energetic architrinos </a:t>
             </a:r>
           </a:p>
           <a:p>
@@ -9678,7 +10146,7 @@
                 <a:ea typeface="Helvetica Neue" panose="02000503000000020004" pitchFamily="2" charset="0"/>
                 <a:cs typeface="Helvetica Neue" panose="02000503000000020004" pitchFamily="2" charset="0"/>
               </a:rPr>
-              <a:t>potential sphere streams.</a:t>
+              <a:t>causal wake streams.</a:t>
             </a:r>
           </a:p>
           <a:p>
@@ -9760,10 +10228,166 @@
           </a:p>
         </p:txBody>
       </p:sp>
+      <p:sp>
+        <p:nvSpPr>
+          <p:cNvPr id="6" name="Footer Placeholder 3"/>
+          <p:cNvSpPr txBox="1">
+            <a:spLocks/>
+          </p:cNvSpPr>
+          <p:nvPr/>
+        </p:nvSpPr>
+        <p:spPr>
+          <a:xfrm>
+            <a:off x="10942204" y="6481737"/>
+            <a:ext cx="1217443" cy="365125"/>
+          </a:xfrm>
+          <a:prstGeom prst="rect">
+            <a:avLst/>
+          </a:prstGeom>
+        </p:spPr>
+        <p:txBody>
+          <a:bodyPr vert="horz" lIns="91440" tIns="45720" rIns="91440" bIns="45720" rtlCol="0" anchor="ctr"/>
+          <a:lstStyle>
+            <a:defPPr>
+              <a:defRPr lang="en-US"/>
+            </a:defPPr>
+            <a:lvl1pPr marL="0" algn="ctr" defTabSz="914400" rtl="0" eaLnBrk="1" latinLnBrk="0" hangingPunct="1">
+              <a:defRPr sz="1200" kern="1200">
+                <a:solidFill>
+                  <a:schemeClr val="tx1">
+                    <a:tint val="75000"/>
+                  </a:schemeClr>
+                </a:solidFill>
+                <a:latin typeface="+mn-lt"/>
+                <a:ea typeface="+mn-ea"/>
+                <a:cs typeface="+mn-cs"/>
+              </a:defRPr>
+            </a:lvl1pPr>
+            <a:lvl2pPr marL="457200" algn="l" defTabSz="914400" rtl="0" eaLnBrk="1" latinLnBrk="0" hangingPunct="1">
+              <a:defRPr sz="1800" kern="1200">
+                <a:solidFill>
+                  <a:schemeClr val="tx1"/>
+                </a:solidFill>
+                <a:latin typeface="+mn-lt"/>
+                <a:ea typeface="+mn-ea"/>
+                <a:cs typeface="+mn-cs"/>
+              </a:defRPr>
+            </a:lvl2pPr>
+            <a:lvl3pPr marL="914400" algn="l" defTabSz="914400" rtl="0" eaLnBrk="1" latinLnBrk="0" hangingPunct="1">
+              <a:defRPr sz="1800" kern="1200">
+                <a:solidFill>
+                  <a:schemeClr val="tx1"/>
+                </a:solidFill>
+                <a:latin typeface="+mn-lt"/>
+                <a:ea typeface="+mn-ea"/>
+                <a:cs typeface="+mn-cs"/>
+              </a:defRPr>
+            </a:lvl3pPr>
+            <a:lvl4pPr marL="1371600" algn="l" defTabSz="914400" rtl="0" eaLnBrk="1" latinLnBrk="0" hangingPunct="1">
+              <a:defRPr sz="1800" kern="1200">
+                <a:solidFill>
+                  <a:schemeClr val="tx1"/>
+                </a:solidFill>
+                <a:latin typeface="+mn-lt"/>
+                <a:ea typeface="+mn-ea"/>
+                <a:cs typeface="+mn-cs"/>
+              </a:defRPr>
+            </a:lvl4pPr>
+            <a:lvl5pPr marL="1828800" algn="l" defTabSz="914400" rtl="0" eaLnBrk="1" latinLnBrk="0" hangingPunct="1">
+              <a:defRPr sz="1800" kern="1200">
+                <a:solidFill>
+                  <a:schemeClr val="tx1"/>
+                </a:solidFill>
+                <a:latin typeface="+mn-lt"/>
+                <a:ea typeface="+mn-ea"/>
+                <a:cs typeface="+mn-cs"/>
+              </a:defRPr>
+            </a:lvl5pPr>
+            <a:lvl6pPr marL="2286000" algn="l" defTabSz="914400" rtl="0" eaLnBrk="1" latinLnBrk="0" hangingPunct="1">
+              <a:defRPr sz="1800" kern="1200">
+                <a:solidFill>
+                  <a:schemeClr val="tx1"/>
+                </a:solidFill>
+                <a:latin typeface="+mn-lt"/>
+                <a:ea typeface="+mn-ea"/>
+                <a:cs typeface="+mn-cs"/>
+              </a:defRPr>
+            </a:lvl6pPr>
+            <a:lvl7pPr marL="2743200" algn="l" defTabSz="914400" rtl="0" eaLnBrk="1" latinLnBrk="0" hangingPunct="1">
+              <a:defRPr sz="1800" kern="1200">
+                <a:solidFill>
+                  <a:schemeClr val="tx1"/>
+                </a:solidFill>
+                <a:latin typeface="+mn-lt"/>
+                <a:ea typeface="+mn-ea"/>
+                <a:cs typeface="+mn-cs"/>
+              </a:defRPr>
+            </a:lvl7pPr>
+            <a:lvl8pPr marL="3200400" algn="l" defTabSz="914400" rtl="0" eaLnBrk="1" latinLnBrk="0" hangingPunct="1">
+              <a:defRPr sz="1800" kern="1200">
+                <a:solidFill>
+                  <a:schemeClr val="tx1"/>
+                </a:solidFill>
+                <a:latin typeface="+mn-lt"/>
+                <a:ea typeface="+mn-ea"/>
+                <a:cs typeface="+mn-cs"/>
+              </a:defRPr>
+            </a:lvl8pPr>
+            <a:lvl9pPr marL="3657600" algn="l" defTabSz="914400" rtl="0" eaLnBrk="1" latinLnBrk="0" hangingPunct="1">
+              <a:defRPr sz="1800" kern="1200">
+                <a:solidFill>
+                  <a:schemeClr val="tx1"/>
+                </a:solidFill>
+                <a:latin typeface="+mn-lt"/>
+                <a:ea typeface="+mn-ea"/>
+                <a:cs typeface="+mn-cs"/>
+              </a:defRPr>
+            </a:lvl9pPr>
+          </a:lstStyle>
+          <a:p>
+            <a:pPr marL="0" marR="0" lvl="0" indent="0" algn="ctr" defTabSz="914400" rtl="0" eaLnBrk="1" fontAlgn="auto" latinLnBrk="0" hangingPunct="1">
+              <a:lnSpc>
+                <a:spcPct val="100000"/>
+              </a:lnSpc>
+              <a:spcBef>
+                <a:spcPts val="0"/>
+              </a:spcBef>
+              <a:spcAft>
+                <a:spcPts val="0"/>
+              </a:spcAft>
+              <a:buClrTx/>
+              <a:buSzTx/>
+              <a:buFontTx/>
+              <a:buNone/>
+              <a:tabLst/>
+              <a:defRPr/>
+            </a:pPr>
+            <a:r>
+              <a:rPr kumimoji="0" lang="en-US" sz="1200" b="0" i="0" u="none" strike="noStrike" kern="1200" cap="none" spc="0" normalizeH="0" baseline="0" noProof="0" dirty="0">
+                <a:ln>
+                  <a:noFill/>
+                </a:ln>
+                <a:solidFill>
+                  <a:prstClr val="black">
+                    <a:tint val="75000"/>
+                  </a:prstClr>
+                </a:solidFill>
+                <a:effectLst/>
+                <a:uLnTx/>
+                <a:uFillTx/>
+                <a:latin typeface="Helvetica Neue" panose="02000503000000020004" pitchFamily="2" charset="0"/>
+                <a:ea typeface="Helvetica Neue" panose="02000503000000020004" pitchFamily="2" charset="0"/>
+                <a:cs typeface="Helvetica Neue" panose="02000503000000020004" pitchFamily="2" charset="0"/>
+              </a:rPr>
+              <a:t>architrino.com</a:t>
+            </a:r>
+          </a:p>
+        </p:txBody>
+      </p:sp>
     </p:spTree>
     <p:extLst>
       <p:ext uri="{BB962C8B-B14F-4D97-AF65-F5344CB8AC3E}">
-        <p14:creationId xmlns:p14="http://schemas.microsoft.com/office/powerpoint/2010/main" val="4031215449"/>
+        <ns3:creationId val="4031215449"/>
       </p:ext>
     </p:extLst>
   </p:cSld>
@@ -9774,7 +10398,7 @@
 </file>
 
 <file path=ppt/slides/slide5.xml><?xml version="1.0" encoding="utf-8"?>
-<p:sld xmlns:a="http://schemas.openxmlformats.org/drawingml/2006/main" xmlns:r="http://schemas.openxmlformats.org/officeDocument/2006/relationships" xmlns:p="http://schemas.openxmlformats.org/presentationml/2006/main">
+<p:sld xmlns:a="http://schemas.openxmlformats.org/drawingml/2006/main" xmlns:a16="http://schemas.microsoft.com/office/drawing/2014/main" xmlns:ns3="http://schemas.microsoft.com/office/powerpoint/2010/main" xmlns:p="http://schemas.openxmlformats.org/presentationml/2006/main">
   <p:cSld>
     <p:bg>
       <p:bgPr>
@@ -9803,7 +10427,7 @@
           <p:cNvPr id="5" name="Footer Placeholder 3">
             <a:extLst>
               <a:ext uri="{FF2B5EF4-FFF2-40B4-BE49-F238E27FC236}">
-                <a16:creationId xmlns:a16="http://schemas.microsoft.com/office/drawing/2014/main" id="{39D3BA72-1E87-6944-A0DE-BB8978697D5A}"/>
+                <a16:creationId id="{39D3BA72-1E87-6944-A0DE-BB8978697D5A}"/>
               </a:ext>
             </a:extLst>
           </p:cNvPr>
@@ -9965,7 +10589,7 @@
           <p:cNvPr id="3" name="TextBox 2">
             <a:extLst>
               <a:ext uri="{FF2B5EF4-FFF2-40B4-BE49-F238E27FC236}">
-                <a16:creationId xmlns:a16="http://schemas.microsoft.com/office/drawing/2014/main" id="{96DF0645-8B53-9FBF-CA5E-9D115D31C225}"/>
+                <a16:creationId id="{96DF0645-8B53-9FBF-CA5E-9D115D31C225}"/>
               </a:ext>
             </a:extLst>
           </p:cNvPr>
@@ -10022,7 +10646,7 @@
                 <a:ea typeface="Helvetica Neue" panose="02000503000000020004" pitchFamily="2" charset="0"/>
                 <a:cs typeface="Helvetica Neue" panose="02000503000000020004" pitchFamily="2" charset="0"/>
               </a:rPr>
-              <a:t>Point Potential Sphere Streams </a:t>
+              <a:t>Architrino Sphere Streams </a:t>
             </a:r>
             <a:r>
               <a:rPr kumimoji="0" lang="en-US" sz="5400" b="1" i="0" u="none" strike="noStrike" kern="1200" cap="none" spc="0" normalizeH="0" baseline="0" noProof="0" dirty="0">
@@ -10123,7 +10747,163 @@
                 <a:ea typeface="Helvetica Neue" panose="02000503000000020004" pitchFamily="2" charset="0"/>
                 <a:cs typeface="Helvetica Neue" panose="02000503000000020004" pitchFamily="2" charset="0"/>
               </a:rPr>
-              <a:t>The intersection of sphere streams with point potentials is where the action is.</a:t>
+              <a:t>The intersection of sphere streams with architrinos is where the action is.</a:t>
+            </a:r>
+          </a:p>
+        </p:txBody>
+      </p:sp>
+      <p:sp>
+        <p:nvSpPr>
+          <p:cNvPr id="6" name="Footer Placeholder 3"/>
+          <p:cNvSpPr txBox="1">
+            <a:spLocks/>
+          </p:cNvSpPr>
+          <p:nvPr/>
+        </p:nvSpPr>
+        <p:spPr>
+          <a:xfrm>
+            <a:off x="10942204" y="6481737"/>
+            <a:ext cx="1217443" cy="365125"/>
+          </a:xfrm>
+          <a:prstGeom prst="rect">
+            <a:avLst/>
+          </a:prstGeom>
+        </p:spPr>
+        <p:txBody>
+          <a:bodyPr vert="horz" lIns="91440" tIns="45720" rIns="91440" bIns="45720" rtlCol="0" anchor="ctr"/>
+          <a:lstStyle>
+            <a:defPPr>
+              <a:defRPr lang="en-US"/>
+            </a:defPPr>
+            <a:lvl1pPr marL="0" algn="ctr" defTabSz="914400" rtl="0" eaLnBrk="1" latinLnBrk="0" hangingPunct="1">
+              <a:defRPr sz="1200" kern="1200">
+                <a:solidFill>
+                  <a:schemeClr val="tx1">
+                    <a:tint val="75000"/>
+                  </a:schemeClr>
+                </a:solidFill>
+                <a:latin typeface="+mn-lt"/>
+                <a:ea typeface="+mn-ea"/>
+                <a:cs typeface="+mn-cs"/>
+              </a:defRPr>
+            </a:lvl1pPr>
+            <a:lvl2pPr marL="457200" algn="l" defTabSz="914400" rtl="0" eaLnBrk="1" latinLnBrk="0" hangingPunct="1">
+              <a:defRPr sz="1800" kern="1200">
+                <a:solidFill>
+                  <a:schemeClr val="tx1"/>
+                </a:solidFill>
+                <a:latin typeface="+mn-lt"/>
+                <a:ea typeface="+mn-ea"/>
+                <a:cs typeface="+mn-cs"/>
+              </a:defRPr>
+            </a:lvl2pPr>
+            <a:lvl3pPr marL="914400" algn="l" defTabSz="914400" rtl="0" eaLnBrk="1" latinLnBrk="0" hangingPunct="1">
+              <a:defRPr sz="1800" kern="1200">
+                <a:solidFill>
+                  <a:schemeClr val="tx1"/>
+                </a:solidFill>
+                <a:latin typeface="+mn-lt"/>
+                <a:ea typeface="+mn-ea"/>
+                <a:cs typeface="+mn-cs"/>
+              </a:defRPr>
+            </a:lvl3pPr>
+            <a:lvl4pPr marL="1371600" algn="l" defTabSz="914400" rtl="0" eaLnBrk="1" latinLnBrk="0" hangingPunct="1">
+              <a:defRPr sz="1800" kern="1200">
+                <a:solidFill>
+                  <a:schemeClr val="tx1"/>
+                </a:solidFill>
+                <a:latin typeface="+mn-lt"/>
+                <a:ea typeface="+mn-ea"/>
+                <a:cs typeface="+mn-cs"/>
+              </a:defRPr>
+            </a:lvl4pPr>
+            <a:lvl5pPr marL="1828800" algn="l" defTabSz="914400" rtl="0" eaLnBrk="1" latinLnBrk="0" hangingPunct="1">
+              <a:defRPr sz="1800" kern="1200">
+                <a:solidFill>
+                  <a:schemeClr val="tx1"/>
+                </a:solidFill>
+                <a:latin typeface="+mn-lt"/>
+                <a:ea typeface="+mn-ea"/>
+                <a:cs typeface="+mn-cs"/>
+              </a:defRPr>
+            </a:lvl5pPr>
+            <a:lvl6pPr marL="2286000" algn="l" defTabSz="914400" rtl="0" eaLnBrk="1" latinLnBrk="0" hangingPunct="1">
+              <a:defRPr sz="1800" kern="1200">
+                <a:solidFill>
+                  <a:schemeClr val="tx1"/>
+                </a:solidFill>
+                <a:latin typeface="+mn-lt"/>
+                <a:ea typeface="+mn-ea"/>
+                <a:cs typeface="+mn-cs"/>
+              </a:defRPr>
+            </a:lvl6pPr>
+            <a:lvl7pPr marL="2743200" algn="l" defTabSz="914400" rtl="0" eaLnBrk="1" latinLnBrk="0" hangingPunct="1">
+              <a:defRPr sz="1800" kern="1200">
+                <a:solidFill>
+                  <a:schemeClr val="tx1"/>
+                </a:solidFill>
+                <a:latin typeface="+mn-lt"/>
+                <a:ea typeface="+mn-ea"/>
+                <a:cs typeface="+mn-cs"/>
+              </a:defRPr>
+            </a:lvl7pPr>
+            <a:lvl8pPr marL="3200400" algn="l" defTabSz="914400" rtl="0" eaLnBrk="1" latinLnBrk="0" hangingPunct="1">
+              <a:defRPr sz="1800" kern="1200">
+                <a:solidFill>
+                  <a:schemeClr val="tx1"/>
+                </a:solidFill>
+                <a:latin typeface="+mn-lt"/>
+                <a:ea typeface="+mn-ea"/>
+                <a:cs typeface="+mn-cs"/>
+              </a:defRPr>
+            </a:lvl8pPr>
+            <a:lvl9pPr marL="3657600" algn="l" defTabSz="914400" rtl="0" eaLnBrk="1" latinLnBrk="0" hangingPunct="1">
+              <a:defRPr sz="1800" kern="1200">
+                <a:solidFill>
+                  <a:schemeClr val="tx1"/>
+                </a:solidFill>
+                <a:latin typeface="+mn-lt"/>
+                <a:ea typeface="+mn-ea"/>
+                <a:cs typeface="+mn-cs"/>
+              </a:defRPr>
+            </a:lvl9pPr>
+          </a:lstStyle>
+          <a:p>
+            <a:pPr marL="0" marR="0" lvl="0" indent="0" algn="ctr" defTabSz="914400" rtl="0" eaLnBrk="1" fontAlgn="auto" latinLnBrk="0" hangingPunct="1">
+              <a:lnSpc>
+                <a:spcPct val="100000"/>
+              </a:lnSpc>
+              <a:spcBef>
+                <a:spcPts val="0"/>
+              </a:spcBef>
+              <a:spcAft>
+                <a:spcPts val="0"/>
+              </a:spcAft>
+              <a:buClrTx/>
+              <a:buSzTx/>
+              <a:buFontTx/>
+              <a:buNone/>
+              <a:tabLst/>
+              <a:defRPr/>
+            </a:pPr>
+            <a:r>
+              <a:rPr kumimoji="0" lang="en-US" sz="1200" b="0" i="0" u="none" strike="noStrike" kern="1200" cap="none" spc="0" normalizeH="0" baseline="0" noProof="0" dirty="0">
+                <a:ln>
+                  <a:noFill/>
+                </a:ln>
+                <a:solidFill>
+                  <a:prstClr val="black">
+                    <a:tint val="75000"/>
+                  </a:prstClr>
+                </a:solidFill>
+                <a:effectLst/>
+                <a:uLnTx/>
+                <a:uFillTx/>
+                <a:latin typeface="Helvetica Neue" panose="02000503000000020004" pitchFamily="2" charset="0"/>
+                <a:ea typeface="Helvetica Neue" panose="02000503000000020004" pitchFamily="2" charset="0"/>
+                <a:cs typeface="Helvetica Neue" panose="02000503000000020004" pitchFamily="2" charset="0"/>
+              </a:rPr>
+              <a:t>architrino.com</a:t>
             </a:r>
           </a:p>
         </p:txBody>
@@ -10131,7 +10911,7 @@
     </p:spTree>
     <p:extLst>
       <p:ext uri="{BB962C8B-B14F-4D97-AF65-F5344CB8AC3E}">
-        <p14:creationId xmlns:p14="http://schemas.microsoft.com/office/powerpoint/2010/main" val="895472186"/>
+        <ns3:creationId val="895472186"/>
       </p:ext>
     </p:extLst>
   </p:cSld>
@@ -10142,7 +10922,7 @@
 </file>
 
 <file path=ppt/slides/slide6.xml><?xml version="1.0" encoding="utf-8"?>
-<p:sld xmlns:a="http://schemas.openxmlformats.org/drawingml/2006/main" xmlns:r="http://schemas.openxmlformats.org/officeDocument/2006/relationships" xmlns:p="http://schemas.openxmlformats.org/presentationml/2006/main">
+<p:sld xmlns:a="http://schemas.openxmlformats.org/drawingml/2006/main" xmlns:a16="http://schemas.microsoft.com/office/drawing/2014/main" xmlns:ns3="http://schemas.microsoft.com/office/powerpoint/2010/main" xmlns:p="http://schemas.openxmlformats.org/presentationml/2006/main">
   <p:cSld>
     <p:bg>
       <p:bgPr>
@@ -10157,7 +10937,7 @@
         <p:cNvPr id="1" name="">
           <a:extLst>
             <a:ext uri="{FF2B5EF4-FFF2-40B4-BE49-F238E27FC236}">
-              <a16:creationId xmlns:a16="http://schemas.microsoft.com/office/drawing/2014/main" id="{67C65214-D702-75CD-A867-A5A8C3A0B26F}"/>
+              <a16:creationId id="{67C65214-D702-75CD-A867-A5A8C3A0B26F}"/>
             </a:ext>
           </a:extLst>
         </p:cNvPr>
@@ -10177,7 +10957,7 @@
           <p:cNvPr id="5" name="Footer Placeholder 3">
             <a:extLst>
               <a:ext uri="{FF2B5EF4-FFF2-40B4-BE49-F238E27FC236}">
-                <a16:creationId xmlns:a16="http://schemas.microsoft.com/office/drawing/2014/main" id="{B0F877B9-FC4A-6906-225E-A59E28334793}"/>
+                <a16:creationId id="{B0F877B9-FC4A-6906-225E-A59E28334793}"/>
               </a:ext>
             </a:extLst>
           </p:cNvPr>
@@ -10339,7 +11119,7 @@
           <p:cNvPr id="3" name="TextBox 2">
             <a:extLst>
               <a:ext uri="{FF2B5EF4-FFF2-40B4-BE49-F238E27FC236}">
-                <a16:creationId xmlns:a16="http://schemas.microsoft.com/office/drawing/2014/main" id="{853A6030-A110-4128-6225-20F0FD3C147E}"/>
+                <a16:creationId id="{853A6030-A110-4128-6225-20F0FD3C147E}"/>
               </a:ext>
             </a:extLst>
           </p:cNvPr>
@@ -10481,7 +11261,7 @@
                 <a:ea typeface="Helvetica Neue" panose="02000503000000020004" pitchFamily="2" charset="0"/>
                 <a:cs typeface="Helvetica Neue" panose="02000503000000020004" pitchFamily="2" charset="0"/>
               </a:rPr>
-              <a:t>path history of all point potentials, </a:t>
+              <a:t>path history of all architrinos, </a:t>
             </a:r>
           </a:p>
           <a:p>
@@ -10511,7 +11291,7 @@
                 <a:ea typeface="Helvetica Neue" panose="02000503000000020004" pitchFamily="2" charset="0"/>
                 <a:cs typeface="Helvetica Neue" panose="02000503000000020004" pitchFamily="2" charset="0"/>
               </a:rPr>
-              <a:t>and their emitted potential sphere streams intersecting each point potential at time t = </a:t>
+              <a:t>and their emitted causal wake streams intersecting each architrino at time t = </a:t>
             </a:r>
             <a:r>
               <a:rPr lang="en-US" sz="4000" dirty="0" err="1">
@@ -10616,10 +11396,166 @@
           </a:p>
         </p:txBody>
       </p:sp>
+      <p:sp>
+        <p:nvSpPr>
+          <p:cNvPr id="6" name="Footer Placeholder 3"/>
+          <p:cNvSpPr txBox="1">
+            <a:spLocks/>
+          </p:cNvSpPr>
+          <p:nvPr/>
+        </p:nvSpPr>
+        <p:spPr>
+          <a:xfrm>
+            <a:off x="10942204" y="6481737"/>
+            <a:ext cx="1217443" cy="365125"/>
+          </a:xfrm>
+          <a:prstGeom prst="rect">
+            <a:avLst/>
+          </a:prstGeom>
+        </p:spPr>
+        <p:txBody>
+          <a:bodyPr vert="horz" lIns="91440" tIns="45720" rIns="91440" bIns="45720" rtlCol="0" anchor="ctr"/>
+          <a:lstStyle>
+            <a:defPPr>
+              <a:defRPr lang="en-US"/>
+            </a:defPPr>
+            <a:lvl1pPr marL="0" algn="ctr" defTabSz="914400" rtl="0" eaLnBrk="1" latinLnBrk="0" hangingPunct="1">
+              <a:defRPr sz="1200" kern="1200">
+                <a:solidFill>
+                  <a:schemeClr val="tx1">
+                    <a:tint val="75000"/>
+                  </a:schemeClr>
+                </a:solidFill>
+                <a:latin typeface="+mn-lt"/>
+                <a:ea typeface="+mn-ea"/>
+                <a:cs typeface="+mn-cs"/>
+              </a:defRPr>
+            </a:lvl1pPr>
+            <a:lvl2pPr marL="457200" algn="l" defTabSz="914400" rtl="0" eaLnBrk="1" latinLnBrk="0" hangingPunct="1">
+              <a:defRPr sz="1800" kern="1200">
+                <a:solidFill>
+                  <a:schemeClr val="tx1"/>
+                </a:solidFill>
+                <a:latin typeface="+mn-lt"/>
+                <a:ea typeface="+mn-ea"/>
+                <a:cs typeface="+mn-cs"/>
+              </a:defRPr>
+            </a:lvl2pPr>
+            <a:lvl3pPr marL="914400" algn="l" defTabSz="914400" rtl="0" eaLnBrk="1" latinLnBrk="0" hangingPunct="1">
+              <a:defRPr sz="1800" kern="1200">
+                <a:solidFill>
+                  <a:schemeClr val="tx1"/>
+                </a:solidFill>
+                <a:latin typeface="+mn-lt"/>
+                <a:ea typeface="+mn-ea"/>
+                <a:cs typeface="+mn-cs"/>
+              </a:defRPr>
+            </a:lvl3pPr>
+            <a:lvl4pPr marL="1371600" algn="l" defTabSz="914400" rtl="0" eaLnBrk="1" latinLnBrk="0" hangingPunct="1">
+              <a:defRPr sz="1800" kern="1200">
+                <a:solidFill>
+                  <a:schemeClr val="tx1"/>
+                </a:solidFill>
+                <a:latin typeface="+mn-lt"/>
+                <a:ea typeface="+mn-ea"/>
+                <a:cs typeface="+mn-cs"/>
+              </a:defRPr>
+            </a:lvl4pPr>
+            <a:lvl5pPr marL="1828800" algn="l" defTabSz="914400" rtl="0" eaLnBrk="1" latinLnBrk="0" hangingPunct="1">
+              <a:defRPr sz="1800" kern="1200">
+                <a:solidFill>
+                  <a:schemeClr val="tx1"/>
+                </a:solidFill>
+                <a:latin typeface="+mn-lt"/>
+                <a:ea typeface="+mn-ea"/>
+                <a:cs typeface="+mn-cs"/>
+              </a:defRPr>
+            </a:lvl5pPr>
+            <a:lvl6pPr marL="2286000" algn="l" defTabSz="914400" rtl="0" eaLnBrk="1" latinLnBrk="0" hangingPunct="1">
+              <a:defRPr sz="1800" kern="1200">
+                <a:solidFill>
+                  <a:schemeClr val="tx1"/>
+                </a:solidFill>
+                <a:latin typeface="+mn-lt"/>
+                <a:ea typeface="+mn-ea"/>
+                <a:cs typeface="+mn-cs"/>
+              </a:defRPr>
+            </a:lvl6pPr>
+            <a:lvl7pPr marL="2743200" algn="l" defTabSz="914400" rtl="0" eaLnBrk="1" latinLnBrk="0" hangingPunct="1">
+              <a:defRPr sz="1800" kern="1200">
+                <a:solidFill>
+                  <a:schemeClr val="tx1"/>
+                </a:solidFill>
+                <a:latin typeface="+mn-lt"/>
+                <a:ea typeface="+mn-ea"/>
+                <a:cs typeface="+mn-cs"/>
+              </a:defRPr>
+            </a:lvl7pPr>
+            <a:lvl8pPr marL="3200400" algn="l" defTabSz="914400" rtl="0" eaLnBrk="1" latinLnBrk="0" hangingPunct="1">
+              <a:defRPr sz="1800" kern="1200">
+                <a:solidFill>
+                  <a:schemeClr val="tx1"/>
+                </a:solidFill>
+                <a:latin typeface="+mn-lt"/>
+                <a:ea typeface="+mn-ea"/>
+                <a:cs typeface="+mn-cs"/>
+              </a:defRPr>
+            </a:lvl8pPr>
+            <a:lvl9pPr marL="3657600" algn="l" defTabSz="914400" rtl="0" eaLnBrk="1" latinLnBrk="0" hangingPunct="1">
+              <a:defRPr sz="1800" kern="1200">
+                <a:solidFill>
+                  <a:schemeClr val="tx1"/>
+                </a:solidFill>
+                <a:latin typeface="+mn-lt"/>
+                <a:ea typeface="+mn-ea"/>
+                <a:cs typeface="+mn-cs"/>
+              </a:defRPr>
+            </a:lvl9pPr>
+          </a:lstStyle>
+          <a:p>
+            <a:pPr marL="0" marR="0" lvl="0" indent="0" algn="ctr" defTabSz="914400" rtl="0" eaLnBrk="1" fontAlgn="auto" latinLnBrk="0" hangingPunct="1">
+              <a:lnSpc>
+                <a:spcPct val="100000"/>
+              </a:lnSpc>
+              <a:spcBef>
+                <a:spcPts val="0"/>
+              </a:spcBef>
+              <a:spcAft>
+                <a:spcPts val="0"/>
+              </a:spcAft>
+              <a:buClrTx/>
+              <a:buSzTx/>
+              <a:buFontTx/>
+              <a:buNone/>
+              <a:tabLst/>
+              <a:defRPr/>
+            </a:pPr>
+            <a:r>
+              <a:rPr kumimoji="0" lang="en-US" sz="1200" b="0" i="0" u="none" strike="noStrike" kern="1200" cap="none" spc="0" normalizeH="0" baseline="0" noProof="0" dirty="0">
+                <a:ln>
+                  <a:noFill/>
+                </a:ln>
+                <a:solidFill>
+                  <a:prstClr val="black">
+                    <a:tint val="75000"/>
+                  </a:prstClr>
+                </a:solidFill>
+                <a:effectLst/>
+                <a:uLnTx/>
+                <a:uFillTx/>
+                <a:latin typeface="Helvetica Neue" panose="02000503000000020004" pitchFamily="2" charset="0"/>
+                <a:ea typeface="Helvetica Neue" panose="02000503000000020004" pitchFamily="2" charset="0"/>
+                <a:cs typeface="Helvetica Neue" panose="02000503000000020004" pitchFamily="2" charset="0"/>
+              </a:rPr>
+              <a:t>architrino.com</a:t>
+            </a:r>
+          </a:p>
+        </p:txBody>
+      </p:sp>
     </p:spTree>
     <p:extLst>
       <p:ext uri="{BB962C8B-B14F-4D97-AF65-F5344CB8AC3E}">
-        <p14:creationId xmlns:p14="http://schemas.microsoft.com/office/powerpoint/2010/main" val="1431186611"/>
+        <ns3:creationId val="1431186611"/>
       </p:ext>
     </p:extLst>
   </p:cSld>
@@ -10630,7 +11566,7 @@
 </file>
 
 <file path=ppt/slides/slide7.xml><?xml version="1.0" encoding="utf-8"?>
-<p:sld xmlns:a="http://schemas.openxmlformats.org/drawingml/2006/main" xmlns:r="http://schemas.openxmlformats.org/officeDocument/2006/relationships" xmlns:p="http://schemas.openxmlformats.org/presentationml/2006/main">
+<p:sld xmlns:a="http://schemas.openxmlformats.org/drawingml/2006/main" xmlns:a16="http://schemas.microsoft.com/office/drawing/2014/main" xmlns:ns3="http://schemas.microsoft.com/office/powerpoint/2010/main" xmlns:p="http://schemas.openxmlformats.org/presentationml/2006/main">
   <p:cSld>
     <p:bg>
       <p:bgPr>
@@ -10659,7 +11595,7 @@
           <p:cNvPr id="5" name="Footer Placeholder 3">
             <a:extLst>
               <a:ext uri="{FF2B5EF4-FFF2-40B4-BE49-F238E27FC236}">
-                <a16:creationId xmlns:a16="http://schemas.microsoft.com/office/drawing/2014/main" id="{668F77D6-DFDA-5A46-8DF1-47F6A167C2B1}"/>
+                <a16:creationId id="{668F77D6-DFDA-5A46-8DF1-47F6A167C2B1}"/>
               </a:ext>
             </a:extLst>
           </p:cNvPr>
@@ -10821,7 +11757,7 @@
           <p:cNvPr id="4" name="Footer Placeholder 3">
             <a:extLst>
               <a:ext uri="{FF2B5EF4-FFF2-40B4-BE49-F238E27FC236}">
-                <a16:creationId xmlns:a16="http://schemas.microsoft.com/office/drawing/2014/main" id="{1B68B07E-A769-534E-8796-40D7B0B5F6BC}"/>
+                <a16:creationId id="{1B68B07E-A769-534E-8796-40D7B0B5F6BC}"/>
               </a:ext>
             </a:extLst>
           </p:cNvPr>
@@ -10876,7 +11812,7 @@
                 <a:ea typeface="Helvetica Neue" panose="02000503000000020004" pitchFamily="2" charset="0"/>
                 <a:cs typeface="Helvetica Neue" panose="02000503000000020004" pitchFamily="2" charset="0"/>
               </a:rPr>
-              <a:t>The concept of distance requires a minimum of two point potentials.</a:t>
+              <a:t>The concept of distance requires a minimum of two architrinos.</a:t>
             </a:r>
           </a:p>
         </p:txBody>
@@ -10886,7 +11822,7 @@
           <p:cNvPr id="8" name="TextBox 7">
             <a:extLst>
               <a:ext uri="{FF2B5EF4-FFF2-40B4-BE49-F238E27FC236}">
-                <a16:creationId xmlns:a16="http://schemas.microsoft.com/office/drawing/2014/main" id="{FC88E0D2-CC04-C29A-89B5-522618061201}"/>
+                <a16:creationId id="{FC88E0D2-CC04-C29A-89B5-522618061201}"/>
               </a:ext>
             </a:extLst>
           </p:cNvPr>
@@ -11053,7 +11989,163 @@
                 <a:ea typeface="Helvetica Neue" panose="02000503000000020004" pitchFamily="2" charset="0"/>
                 <a:cs typeface="Helvetica Neue" panose="02000503000000020004" pitchFamily="2" charset="0"/>
               </a:rPr>
-              <a:t>relative to point potential locations in time and space.</a:t>
+              <a:t>relative to architrino locations in time and space.</a:t>
+            </a:r>
+          </a:p>
+        </p:txBody>
+      </p:sp>
+      <p:sp>
+        <p:nvSpPr>
+          <p:cNvPr id="3" name="Footer Placeholder 3"/>
+          <p:cNvSpPr txBox="1">
+            <a:spLocks/>
+          </p:cNvSpPr>
+          <p:nvPr/>
+        </p:nvSpPr>
+        <p:spPr>
+          <a:xfrm>
+            <a:off x="10942204" y="6481737"/>
+            <a:ext cx="1217443" cy="365125"/>
+          </a:xfrm>
+          <a:prstGeom prst="rect">
+            <a:avLst/>
+          </a:prstGeom>
+        </p:spPr>
+        <p:txBody>
+          <a:bodyPr vert="horz" lIns="91440" tIns="45720" rIns="91440" bIns="45720" rtlCol="0" anchor="ctr"/>
+          <a:lstStyle>
+            <a:defPPr>
+              <a:defRPr lang="en-US"/>
+            </a:defPPr>
+            <a:lvl1pPr marL="0" algn="ctr" defTabSz="914400" rtl="0" eaLnBrk="1" latinLnBrk="0" hangingPunct="1">
+              <a:defRPr sz="1200" kern="1200">
+                <a:solidFill>
+                  <a:schemeClr val="tx1">
+                    <a:tint val="75000"/>
+                  </a:schemeClr>
+                </a:solidFill>
+                <a:latin typeface="+mn-lt"/>
+                <a:ea typeface="+mn-ea"/>
+                <a:cs typeface="+mn-cs"/>
+              </a:defRPr>
+            </a:lvl1pPr>
+            <a:lvl2pPr marL="457200" algn="l" defTabSz="914400" rtl="0" eaLnBrk="1" latinLnBrk="0" hangingPunct="1">
+              <a:defRPr sz="1800" kern="1200">
+                <a:solidFill>
+                  <a:schemeClr val="tx1"/>
+                </a:solidFill>
+                <a:latin typeface="+mn-lt"/>
+                <a:ea typeface="+mn-ea"/>
+                <a:cs typeface="+mn-cs"/>
+              </a:defRPr>
+            </a:lvl2pPr>
+            <a:lvl3pPr marL="914400" algn="l" defTabSz="914400" rtl="0" eaLnBrk="1" latinLnBrk="0" hangingPunct="1">
+              <a:defRPr sz="1800" kern="1200">
+                <a:solidFill>
+                  <a:schemeClr val="tx1"/>
+                </a:solidFill>
+                <a:latin typeface="+mn-lt"/>
+                <a:ea typeface="+mn-ea"/>
+                <a:cs typeface="+mn-cs"/>
+              </a:defRPr>
+            </a:lvl3pPr>
+            <a:lvl4pPr marL="1371600" algn="l" defTabSz="914400" rtl="0" eaLnBrk="1" latinLnBrk="0" hangingPunct="1">
+              <a:defRPr sz="1800" kern="1200">
+                <a:solidFill>
+                  <a:schemeClr val="tx1"/>
+                </a:solidFill>
+                <a:latin typeface="+mn-lt"/>
+                <a:ea typeface="+mn-ea"/>
+                <a:cs typeface="+mn-cs"/>
+              </a:defRPr>
+            </a:lvl4pPr>
+            <a:lvl5pPr marL="1828800" algn="l" defTabSz="914400" rtl="0" eaLnBrk="1" latinLnBrk="0" hangingPunct="1">
+              <a:defRPr sz="1800" kern="1200">
+                <a:solidFill>
+                  <a:schemeClr val="tx1"/>
+                </a:solidFill>
+                <a:latin typeface="+mn-lt"/>
+                <a:ea typeface="+mn-ea"/>
+                <a:cs typeface="+mn-cs"/>
+              </a:defRPr>
+            </a:lvl5pPr>
+            <a:lvl6pPr marL="2286000" algn="l" defTabSz="914400" rtl="0" eaLnBrk="1" latinLnBrk="0" hangingPunct="1">
+              <a:defRPr sz="1800" kern="1200">
+                <a:solidFill>
+                  <a:schemeClr val="tx1"/>
+                </a:solidFill>
+                <a:latin typeface="+mn-lt"/>
+                <a:ea typeface="+mn-ea"/>
+                <a:cs typeface="+mn-cs"/>
+              </a:defRPr>
+            </a:lvl6pPr>
+            <a:lvl7pPr marL="2743200" algn="l" defTabSz="914400" rtl="0" eaLnBrk="1" latinLnBrk="0" hangingPunct="1">
+              <a:defRPr sz="1800" kern="1200">
+                <a:solidFill>
+                  <a:schemeClr val="tx1"/>
+                </a:solidFill>
+                <a:latin typeface="+mn-lt"/>
+                <a:ea typeface="+mn-ea"/>
+                <a:cs typeface="+mn-cs"/>
+              </a:defRPr>
+            </a:lvl7pPr>
+            <a:lvl8pPr marL="3200400" algn="l" defTabSz="914400" rtl="0" eaLnBrk="1" latinLnBrk="0" hangingPunct="1">
+              <a:defRPr sz="1800" kern="1200">
+                <a:solidFill>
+                  <a:schemeClr val="tx1"/>
+                </a:solidFill>
+                <a:latin typeface="+mn-lt"/>
+                <a:ea typeface="+mn-ea"/>
+                <a:cs typeface="+mn-cs"/>
+              </a:defRPr>
+            </a:lvl8pPr>
+            <a:lvl9pPr marL="3657600" algn="l" defTabSz="914400" rtl="0" eaLnBrk="1" latinLnBrk="0" hangingPunct="1">
+              <a:defRPr sz="1800" kern="1200">
+                <a:solidFill>
+                  <a:schemeClr val="tx1"/>
+                </a:solidFill>
+                <a:latin typeface="+mn-lt"/>
+                <a:ea typeface="+mn-ea"/>
+                <a:cs typeface="+mn-cs"/>
+              </a:defRPr>
+            </a:lvl9pPr>
+          </a:lstStyle>
+          <a:p>
+            <a:pPr marL="0" marR="0" lvl="0" indent="0" algn="ctr" defTabSz="914400" rtl="0" eaLnBrk="1" fontAlgn="auto" latinLnBrk="0" hangingPunct="1">
+              <a:lnSpc>
+                <a:spcPct val="100000"/>
+              </a:lnSpc>
+              <a:spcBef>
+                <a:spcPts val="0"/>
+              </a:spcBef>
+              <a:spcAft>
+                <a:spcPts val="0"/>
+              </a:spcAft>
+              <a:buClrTx/>
+              <a:buSzTx/>
+              <a:buFontTx/>
+              <a:buNone/>
+              <a:tabLst/>
+              <a:defRPr/>
+            </a:pPr>
+            <a:r>
+              <a:rPr kumimoji="0" lang="en-US" sz="1200" b="0" i="0" u="none" strike="noStrike" kern="1200" cap="none" spc="0" normalizeH="0" baseline="0" noProof="0" dirty="0">
+                <a:ln>
+                  <a:noFill/>
+                </a:ln>
+                <a:solidFill>
+                  <a:prstClr val="black">
+                    <a:tint val="75000"/>
+                  </a:prstClr>
+                </a:solidFill>
+                <a:effectLst/>
+                <a:uLnTx/>
+                <a:uFillTx/>
+                <a:latin typeface="Helvetica Neue" panose="02000503000000020004" pitchFamily="2" charset="0"/>
+                <a:ea typeface="Helvetica Neue" panose="02000503000000020004" pitchFamily="2" charset="0"/>
+                <a:cs typeface="Helvetica Neue" panose="02000503000000020004" pitchFamily="2" charset="0"/>
+              </a:rPr>
+              <a:t>architrino.com</a:t>
             </a:r>
           </a:p>
         </p:txBody>
@@ -11061,7 +12153,7 @@
     </p:spTree>
     <p:extLst>
       <p:ext uri="{BB962C8B-B14F-4D97-AF65-F5344CB8AC3E}">
-        <p14:creationId xmlns:p14="http://schemas.microsoft.com/office/powerpoint/2010/main" val="4002265670"/>
+        <ns3:creationId val="4002265670"/>
       </p:ext>
     </p:extLst>
   </p:cSld>
@@ -11072,7 +12164,7 @@
 </file>
 
 <file path=ppt/slides/slide8.xml><?xml version="1.0" encoding="utf-8"?>
-<p:sld xmlns:a="http://schemas.openxmlformats.org/drawingml/2006/main" xmlns:r="http://schemas.openxmlformats.org/officeDocument/2006/relationships" xmlns:p="http://schemas.openxmlformats.org/presentationml/2006/main">
+<p:sld xmlns:a="http://schemas.openxmlformats.org/drawingml/2006/main" xmlns:a16="http://schemas.microsoft.com/office/drawing/2014/main" xmlns:ns3="http://schemas.microsoft.com/office/powerpoint/2010/main" xmlns:p="http://schemas.openxmlformats.org/presentationml/2006/main">
   <p:cSld>
     <p:bg>
       <p:bgPr>
@@ -11101,7 +12193,7 @@
           <p:cNvPr id="5" name="Footer Placeholder 3">
             <a:extLst>
               <a:ext uri="{FF2B5EF4-FFF2-40B4-BE49-F238E27FC236}">
-                <a16:creationId xmlns:a16="http://schemas.microsoft.com/office/drawing/2014/main" id="{668F77D6-DFDA-5A46-8DF1-47F6A167C2B1}"/>
+                <a16:creationId id="{668F77D6-DFDA-5A46-8DF1-47F6A167C2B1}"/>
               </a:ext>
             </a:extLst>
           </p:cNvPr>
@@ -11263,7 +12355,7 @@
           <p:cNvPr id="8" name="TextBox 7">
             <a:extLst>
               <a:ext uri="{FF2B5EF4-FFF2-40B4-BE49-F238E27FC236}">
-                <a16:creationId xmlns:a16="http://schemas.microsoft.com/office/drawing/2014/main" id="{FC88E0D2-CC04-C29A-89B5-522618061201}"/>
+                <a16:creationId id="{FC88E0D2-CC04-C29A-89B5-522618061201}"/>
               </a:ext>
             </a:extLst>
           </p:cNvPr>
@@ -11421,7 +12513,7 @@
                 <a:ea typeface="Helvetica Neue" panose="02000503000000020004" pitchFamily="2" charset="0"/>
                 <a:cs typeface="Helvetica Neue" panose="02000503000000020004" pitchFamily="2" charset="0"/>
               </a:rPr>
-              <a:t> potential spheres emitted by a stationary (v = 0) point potential </a:t>
+              <a:t> causal wakes emitted by a stationary (v = 0) architrino </a:t>
             </a:r>
             <a:r>
               <a:rPr lang="en-US" sz="5400" b="1" dirty="0">
@@ -11498,10 +12590,166 @@
           </a:p>
         </p:txBody>
       </p:sp>
+      <p:sp>
+        <p:nvSpPr>
+          <p:cNvPr id="3" name="Footer Placeholder 3"/>
+          <p:cNvSpPr txBox="1">
+            <a:spLocks/>
+          </p:cNvSpPr>
+          <p:nvPr/>
+        </p:nvSpPr>
+        <p:spPr>
+          <a:xfrm>
+            <a:off x="10942204" y="6481737"/>
+            <a:ext cx="1217443" cy="365125"/>
+          </a:xfrm>
+          <a:prstGeom prst="rect">
+            <a:avLst/>
+          </a:prstGeom>
+        </p:spPr>
+        <p:txBody>
+          <a:bodyPr vert="horz" lIns="91440" tIns="45720" rIns="91440" bIns="45720" rtlCol="0" anchor="ctr"/>
+          <a:lstStyle>
+            <a:defPPr>
+              <a:defRPr lang="en-US"/>
+            </a:defPPr>
+            <a:lvl1pPr marL="0" algn="ctr" defTabSz="914400" rtl="0" eaLnBrk="1" latinLnBrk="0" hangingPunct="1">
+              <a:defRPr sz="1200" kern="1200">
+                <a:solidFill>
+                  <a:schemeClr val="tx1">
+                    <a:tint val="75000"/>
+                  </a:schemeClr>
+                </a:solidFill>
+                <a:latin typeface="+mn-lt"/>
+                <a:ea typeface="+mn-ea"/>
+                <a:cs typeface="+mn-cs"/>
+              </a:defRPr>
+            </a:lvl1pPr>
+            <a:lvl2pPr marL="457200" algn="l" defTabSz="914400" rtl="0" eaLnBrk="1" latinLnBrk="0" hangingPunct="1">
+              <a:defRPr sz="1800" kern="1200">
+                <a:solidFill>
+                  <a:schemeClr val="tx1"/>
+                </a:solidFill>
+                <a:latin typeface="+mn-lt"/>
+                <a:ea typeface="+mn-ea"/>
+                <a:cs typeface="+mn-cs"/>
+              </a:defRPr>
+            </a:lvl2pPr>
+            <a:lvl3pPr marL="914400" algn="l" defTabSz="914400" rtl="0" eaLnBrk="1" latinLnBrk="0" hangingPunct="1">
+              <a:defRPr sz="1800" kern="1200">
+                <a:solidFill>
+                  <a:schemeClr val="tx1"/>
+                </a:solidFill>
+                <a:latin typeface="+mn-lt"/>
+                <a:ea typeface="+mn-ea"/>
+                <a:cs typeface="+mn-cs"/>
+              </a:defRPr>
+            </a:lvl3pPr>
+            <a:lvl4pPr marL="1371600" algn="l" defTabSz="914400" rtl="0" eaLnBrk="1" latinLnBrk="0" hangingPunct="1">
+              <a:defRPr sz="1800" kern="1200">
+                <a:solidFill>
+                  <a:schemeClr val="tx1"/>
+                </a:solidFill>
+                <a:latin typeface="+mn-lt"/>
+                <a:ea typeface="+mn-ea"/>
+                <a:cs typeface="+mn-cs"/>
+              </a:defRPr>
+            </a:lvl4pPr>
+            <a:lvl5pPr marL="1828800" algn="l" defTabSz="914400" rtl="0" eaLnBrk="1" latinLnBrk="0" hangingPunct="1">
+              <a:defRPr sz="1800" kern="1200">
+                <a:solidFill>
+                  <a:schemeClr val="tx1"/>
+                </a:solidFill>
+                <a:latin typeface="+mn-lt"/>
+                <a:ea typeface="+mn-ea"/>
+                <a:cs typeface="+mn-cs"/>
+              </a:defRPr>
+            </a:lvl5pPr>
+            <a:lvl6pPr marL="2286000" algn="l" defTabSz="914400" rtl="0" eaLnBrk="1" latinLnBrk="0" hangingPunct="1">
+              <a:defRPr sz="1800" kern="1200">
+                <a:solidFill>
+                  <a:schemeClr val="tx1"/>
+                </a:solidFill>
+                <a:latin typeface="+mn-lt"/>
+                <a:ea typeface="+mn-ea"/>
+                <a:cs typeface="+mn-cs"/>
+              </a:defRPr>
+            </a:lvl6pPr>
+            <a:lvl7pPr marL="2743200" algn="l" defTabSz="914400" rtl="0" eaLnBrk="1" latinLnBrk="0" hangingPunct="1">
+              <a:defRPr sz="1800" kern="1200">
+                <a:solidFill>
+                  <a:schemeClr val="tx1"/>
+                </a:solidFill>
+                <a:latin typeface="+mn-lt"/>
+                <a:ea typeface="+mn-ea"/>
+                <a:cs typeface="+mn-cs"/>
+              </a:defRPr>
+            </a:lvl7pPr>
+            <a:lvl8pPr marL="3200400" algn="l" defTabSz="914400" rtl="0" eaLnBrk="1" latinLnBrk="0" hangingPunct="1">
+              <a:defRPr sz="1800" kern="1200">
+                <a:solidFill>
+                  <a:schemeClr val="tx1"/>
+                </a:solidFill>
+                <a:latin typeface="+mn-lt"/>
+                <a:ea typeface="+mn-ea"/>
+                <a:cs typeface="+mn-cs"/>
+              </a:defRPr>
+            </a:lvl8pPr>
+            <a:lvl9pPr marL="3657600" algn="l" defTabSz="914400" rtl="0" eaLnBrk="1" latinLnBrk="0" hangingPunct="1">
+              <a:defRPr sz="1800" kern="1200">
+                <a:solidFill>
+                  <a:schemeClr val="tx1"/>
+                </a:solidFill>
+                <a:latin typeface="+mn-lt"/>
+                <a:ea typeface="+mn-ea"/>
+                <a:cs typeface="+mn-cs"/>
+              </a:defRPr>
+            </a:lvl9pPr>
+          </a:lstStyle>
+          <a:p>
+            <a:pPr marL="0" marR="0" lvl="0" indent="0" algn="ctr" defTabSz="914400" rtl="0" eaLnBrk="1" fontAlgn="auto" latinLnBrk="0" hangingPunct="1">
+              <a:lnSpc>
+                <a:spcPct val="100000"/>
+              </a:lnSpc>
+              <a:spcBef>
+                <a:spcPts val="0"/>
+              </a:spcBef>
+              <a:spcAft>
+                <a:spcPts val="0"/>
+              </a:spcAft>
+              <a:buClrTx/>
+              <a:buSzTx/>
+              <a:buFontTx/>
+              <a:buNone/>
+              <a:tabLst/>
+              <a:defRPr/>
+            </a:pPr>
+            <a:r>
+              <a:rPr kumimoji="0" lang="en-US" sz="1200" b="0" i="0" u="none" strike="noStrike" kern="1200" cap="none" spc="0" normalizeH="0" baseline="0" noProof="0" dirty="0">
+                <a:ln>
+                  <a:noFill/>
+                </a:ln>
+                <a:solidFill>
+                  <a:prstClr val="black">
+                    <a:tint val="75000"/>
+                  </a:prstClr>
+                </a:solidFill>
+                <a:effectLst/>
+                <a:uLnTx/>
+                <a:uFillTx/>
+                <a:latin typeface="Helvetica Neue" panose="02000503000000020004" pitchFamily="2" charset="0"/>
+                <a:ea typeface="Helvetica Neue" panose="02000503000000020004" pitchFamily="2" charset="0"/>
+                <a:cs typeface="Helvetica Neue" panose="02000503000000020004" pitchFamily="2" charset="0"/>
+              </a:rPr>
+              <a:t>architrino.com</a:t>
+            </a:r>
+          </a:p>
+        </p:txBody>
+      </p:sp>
     </p:spTree>
     <p:extLst>
       <p:ext uri="{BB962C8B-B14F-4D97-AF65-F5344CB8AC3E}">
-        <p14:creationId xmlns:p14="http://schemas.microsoft.com/office/powerpoint/2010/main" val="2532534914"/>
+        <ns3:creationId val="2532534914"/>
       </p:ext>
     </p:extLst>
   </p:cSld>
@@ -11512,7 +12760,7 @@
 </file>
 
 <file path=ppt/slides/slide9.xml><?xml version="1.0" encoding="utf-8"?>
-<p:sld xmlns:a="http://schemas.openxmlformats.org/drawingml/2006/main" xmlns:r="http://schemas.openxmlformats.org/officeDocument/2006/relationships" xmlns:p="http://schemas.openxmlformats.org/presentationml/2006/main">
+<p:sld xmlns:a="http://schemas.openxmlformats.org/drawingml/2006/main" xmlns:a16="http://schemas.microsoft.com/office/drawing/2014/main" xmlns:ns3="http://schemas.microsoft.com/office/powerpoint/2010/main" xmlns:ns4="http://schemas.openxmlformats.org/drawingml/2006/diagram" xmlns:p="http://schemas.openxmlformats.org/presentationml/2006/main" xmlns:r="http://schemas.openxmlformats.org/officeDocument/2006/relationships">
   <p:cSld>
     <p:bg>
       <p:bgPr>
@@ -11541,7 +12789,7 @@
           <p:cNvPr id="3" name="Content Placeholder 2">
             <a:extLst>
               <a:ext uri="{FF2B5EF4-FFF2-40B4-BE49-F238E27FC236}">
-                <a16:creationId xmlns:a16="http://schemas.microsoft.com/office/drawing/2014/main" id="{655016B4-9A13-3344-B498-1697D51A95EF}"/>
+                <a16:creationId id="{655016B4-9A13-3344-B498-1697D51A95EF}"/>
               </a:ext>
             </a:extLst>
           </p:cNvPr>
@@ -11591,7 +12839,7 @@
           <p:cNvPr id="2" name="Diagram 1">
             <a:extLst>
               <a:ext uri="{FF2B5EF4-FFF2-40B4-BE49-F238E27FC236}">
-                <a16:creationId xmlns:a16="http://schemas.microsoft.com/office/drawing/2014/main" id="{1B6E1679-1C21-B23A-E791-875861BEDA0B}"/>
+                <a16:creationId id="{1B6E1679-1C21-B23A-E791-875861BEDA0B}"/>
               </a:ext>
             </a:extLst>
           </p:cNvPr>
@@ -11599,7 +12847,7 @@
           <p:nvPr>
             <p:extLst>
               <p:ext uri="{D42A27DB-BD31-4B8C-83A1-F6EECF244321}">
-                <p14:modId xmlns:p14="http://schemas.microsoft.com/office/powerpoint/2010/main" val="1687234936"/>
+                <ns3:modId val="1687234936"/>
               </p:ext>
             </p:extLst>
           </p:nvPr>
@@ -11610,14 +12858,170 @@
         </p:xfrm>
         <a:graphic>
           <a:graphicData uri="http://schemas.openxmlformats.org/drawingml/2006/diagram">
-            <dgm:relIds xmlns:dgm="http://schemas.openxmlformats.org/drawingml/2006/diagram" xmlns:r="http://schemas.openxmlformats.org/officeDocument/2006/relationships" r:dm="rId2" r:lo="rId3" r:qs="rId4" r:cs="rId5"/>
+            <ns4:relIds r:dm="rId2" r:lo="rId3" r:qs="rId4" r:cs="rId5"/>
           </a:graphicData>
         </a:graphic>
       </p:graphicFrame>
+      <p:sp>
+        <p:nvSpPr>
+          <p:cNvPr id="4" name="Footer Placeholder 3"/>
+          <p:cNvSpPr txBox="1">
+            <a:spLocks/>
+          </p:cNvSpPr>
+          <p:nvPr/>
+        </p:nvSpPr>
+        <p:spPr>
+          <a:xfrm>
+            <a:off x="10942204" y="6481737"/>
+            <a:ext cx="1217443" cy="365125"/>
+          </a:xfrm>
+          <a:prstGeom prst="rect">
+            <a:avLst/>
+          </a:prstGeom>
+        </p:spPr>
+        <p:txBody>
+          <a:bodyPr vert="horz" lIns="91440" tIns="45720" rIns="91440" bIns="45720" rtlCol="0" anchor="ctr"/>
+          <a:lstStyle>
+            <a:defPPr>
+              <a:defRPr lang="en-US"/>
+            </a:defPPr>
+            <a:lvl1pPr marL="0" algn="ctr" defTabSz="914400" rtl="0" eaLnBrk="1" latinLnBrk="0" hangingPunct="1">
+              <a:defRPr sz="1200" kern="1200">
+                <a:solidFill>
+                  <a:schemeClr val="tx1">
+                    <a:tint val="75000"/>
+                  </a:schemeClr>
+                </a:solidFill>
+                <a:latin typeface="+mn-lt"/>
+                <a:ea typeface="+mn-ea"/>
+                <a:cs typeface="+mn-cs"/>
+              </a:defRPr>
+            </a:lvl1pPr>
+            <a:lvl2pPr marL="457200" algn="l" defTabSz="914400" rtl="0" eaLnBrk="1" latinLnBrk="0" hangingPunct="1">
+              <a:defRPr sz="1800" kern="1200">
+                <a:solidFill>
+                  <a:schemeClr val="tx1"/>
+                </a:solidFill>
+                <a:latin typeface="+mn-lt"/>
+                <a:ea typeface="+mn-ea"/>
+                <a:cs typeface="+mn-cs"/>
+              </a:defRPr>
+            </a:lvl2pPr>
+            <a:lvl3pPr marL="914400" algn="l" defTabSz="914400" rtl="0" eaLnBrk="1" latinLnBrk="0" hangingPunct="1">
+              <a:defRPr sz="1800" kern="1200">
+                <a:solidFill>
+                  <a:schemeClr val="tx1"/>
+                </a:solidFill>
+                <a:latin typeface="+mn-lt"/>
+                <a:ea typeface="+mn-ea"/>
+                <a:cs typeface="+mn-cs"/>
+              </a:defRPr>
+            </a:lvl3pPr>
+            <a:lvl4pPr marL="1371600" algn="l" defTabSz="914400" rtl="0" eaLnBrk="1" latinLnBrk="0" hangingPunct="1">
+              <a:defRPr sz="1800" kern="1200">
+                <a:solidFill>
+                  <a:schemeClr val="tx1"/>
+                </a:solidFill>
+                <a:latin typeface="+mn-lt"/>
+                <a:ea typeface="+mn-ea"/>
+                <a:cs typeface="+mn-cs"/>
+              </a:defRPr>
+            </a:lvl4pPr>
+            <a:lvl5pPr marL="1828800" algn="l" defTabSz="914400" rtl="0" eaLnBrk="1" latinLnBrk="0" hangingPunct="1">
+              <a:defRPr sz="1800" kern="1200">
+                <a:solidFill>
+                  <a:schemeClr val="tx1"/>
+                </a:solidFill>
+                <a:latin typeface="+mn-lt"/>
+                <a:ea typeface="+mn-ea"/>
+                <a:cs typeface="+mn-cs"/>
+              </a:defRPr>
+            </a:lvl5pPr>
+            <a:lvl6pPr marL="2286000" algn="l" defTabSz="914400" rtl="0" eaLnBrk="1" latinLnBrk="0" hangingPunct="1">
+              <a:defRPr sz="1800" kern="1200">
+                <a:solidFill>
+                  <a:schemeClr val="tx1"/>
+                </a:solidFill>
+                <a:latin typeface="+mn-lt"/>
+                <a:ea typeface="+mn-ea"/>
+                <a:cs typeface="+mn-cs"/>
+              </a:defRPr>
+            </a:lvl6pPr>
+            <a:lvl7pPr marL="2743200" algn="l" defTabSz="914400" rtl="0" eaLnBrk="1" latinLnBrk="0" hangingPunct="1">
+              <a:defRPr sz="1800" kern="1200">
+                <a:solidFill>
+                  <a:schemeClr val="tx1"/>
+                </a:solidFill>
+                <a:latin typeface="+mn-lt"/>
+                <a:ea typeface="+mn-ea"/>
+                <a:cs typeface="+mn-cs"/>
+              </a:defRPr>
+            </a:lvl7pPr>
+            <a:lvl8pPr marL="3200400" algn="l" defTabSz="914400" rtl="0" eaLnBrk="1" latinLnBrk="0" hangingPunct="1">
+              <a:defRPr sz="1800" kern="1200">
+                <a:solidFill>
+                  <a:schemeClr val="tx1"/>
+                </a:solidFill>
+                <a:latin typeface="+mn-lt"/>
+                <a:ea typeface="+mn-ea"/>
+                <a:cs typeface="+mn-cs"/>
+              </a:defRPr>
+            </a:lvl8pPr>
+            <a:lvl9pPr marL="3657600" algn="l" defTabSz="914400" rtl="0" eaLnBrk="1" latinLnBrk="0" hangingPunct="1">
+              <a:defRPr sz="1800" kern="1200">
+                <a:solidFill>
+                  <a:schemeClr val="tx1"/>
+                </a:solidFill>
+                <a:latin typeface="+mn-lt"/>
+                <a:ea typeface="+mn-ea"/>
+                <a:cs typeface="+mn-cs"/>
+              </a:defRPr>
+            </a:lvl9pPr>
+          </a:lstStyle>
+          <a:p>
+            <a:pPr marL="0" marR="0" lvl="0" indent="0" algn="ctr" defTabSz="914400" rtl="0" eaLnBrk="1" fontAlgn="auto" latinLnBrk="0" hangingPunct="1">
+              <a:lnSpc>
+                <a:spcPct val="100000"/>
+              </a:lnSpc>
+              <a:spcBef>
+                <a:spcPts val="0"/>
+              </a:spcBef>
+              <a:spcAft>
+                <a:spcPts val="0"/>
+              </a:spcAft>
+              <a:buClrTx/>
+              <a:buSzTx/>
+              <a:buFontTx/>
+              <a:buNone/>
+              <a:tabLst/>
+              <a:defRPr/>
+            </a:pPr>
+            <a:r>
+              <a:rPr kumimoji="0" lang="en-US" sz="1200" b="0" i="0" u="none" strike="noStrike" kern="1200" cap="none" spc="0" normalizeH="0" baseline="0" noProof="0" dirty="0">
+                <a:ln>
+                  <a:noFill/>
+                </a:ln>
+                <a:solidFill>
+                  <a:prstClr val="black">
+                    <a:tint val="75000"/>
+                  </a:prstClr>
+                </a:solidFill>
+                <a:effectLst/>
+                <a:uLnTx/>
+                <a:uFillTx/>
+                <a:latin typeface="Helvetica Neue" panose="02000503000000020004" pitchFamily="2" charset="0"/>
+                <a:ea typeface="Helvetica Neue" panose="02000503000000020004" pitchFamily="2" charset="0"/>
+                <a:cs typeface="Helvetica Neue" panose="02000503000000020004" pitchFamily="2" charset="0"/>
+              </a:rPr>
+              <a:t>architrino.com</a:t>
+            </a:r>
+          </a:p>
+        </p:txBody>
+      </p:sp>
     </p:spTree>
     <p:extLst>
       <p:ext uri="{BB962C8B-B14F-4D97-AF65-F5344CB8AC3E}">
-        <p14:creationId xmlns:p14="http://schemas.microsoft.com/office/powerpoint/2010/main" val="3392193694"/>
+        <ns3:creationId val="3392193694"/>
       </p:ext>
     </p:extLst>
   </p:cSld>

--- a/reference/archie/presentations/NPQG Fundamentals - Time and Space.pptx
+++ b/reference/archie/presentations/NPQG Fundamentals - Time and Space.pptx
@@ -1152,7 +1152,7 @@
               <a:ea typeface="Helvetica Neue" panose="02000503000000020004" pitchFamily="2" charset="0"/>
               <a:cs typeface="Helvetica Neue" panose="02000503000000020004" pitchFamily="2" charset="0"/>
             </a:rPr>
-            <a:t>No Physical Coordinates in Time or Space</a:t>
+            <a:t>No Intrinsic Coordinates</a:t>
           </a:r>
         </a:p>
       </dgm:t>
@@ -1388,7 +1388,7 @@
               <a:ea typeface="Helvetica Neue" panose="02000503000000020004" pitchFamily="2" charset="0"/>
               <a:cs typeface="Helvetica Neue" panose="02000503000000020004" pitchFamily="2" charset="0"/>
             </a:rPr>
-            <a:t>Simply a Vessel</a:t>
+            <a:t>Passive Container</a:t>
           </a:r>
         </a:p>
       </dgm:t>
@@ -2350,7 +2350,7 @@
               <a:ea typeface="Helvetica Neue" panose="02000503000000020004" pitchFamily="2" charset="0"/>
               <a:cs typeface="Helvetica Neue" panose="02000503000000020004" pitchFamily="2" charset="0"/>
             </a:rPr>
-            <a:t>No Physical Coordinates in Time or Space</a:t>
+            <a:t>No Intrinsic Coordinates</a:t>
           </a:r>
         </a:p>
       </dsp:txBody>
@@ -2852,7 +2852,7 @@
               <a:ea typeface="Helvetica Neue" panose="02000503000000020004" pitchFamily="2" charset="0"/>
               <a:cs typeface="Helvetica Neue" panose="02000503000000020004" pitchFamily="2" charset="0"/>
             </a:rPr>
-            <a:t>Simply a Vessel</a:t>
+            <a:t>Passive Container</a:t>
           </a:r>
         </a:p>
       </dsp:txBody>
@@ -4524,55 +4524,37 @@
           <a:bodyPr/>
           <a:lstStyle/>
           <a:p>
-            <a:r>
-              <a:rPr lang="en-US" dirty="0"/>
-              <a:t>Hi. Welcome to this episode of Emergent Nature. </a:t>
-            </a:r>
+            <a:endParaRPr/>
           </a:p>
           <a:p>
             <a:endParaRPr lang="en-US" dirty="0"/>
           </a:p>
           <a:p>
-            <a:r>
-              <a:rPr lang="en-US" dirty="0"/>
-              <a:t>My name is J Mark Morris. I go by Mark.</a:t>
-            </a:r>
-          </a:p>
-          <a:p>
             <a:endParaRPr lang="en-US" dirty="0"/>
           </a:p>
           <a:p>
-            <a:r>
-              <a:rPr lang="en-US" dirty="0"/>
-              <a:t>In this episode I’ll discuss the error that caused science to go off track into general relativity and quantum mechanics.</a:t>
-            </a:r>
-          </a:p>
-          <a:p>
             <a:endParaRPr lang="en-US" dirty="0"/>
           </a:p>
           <a:p>
-            <a:r>
-              <a:rPr lang="en-US" dirty="0"/>
-              <a:t>That may seem like an unusual thing to say, since general relativity and quantum theory are generally considered to be successful effective theories.</a:t>
-            </a:r>
-          </a:p>
-          <a:p>
             <a:endParaRPr lang="en-US" dirty="0"/>
           </a:p>
           <a:p>
-            <a:r>
-              <a:rPr lang="en-US" dirty="0"/>
-              <a:t>However, as we will see, an error circa 1900 threw science off track.</a:t>
-            </a:r>
-          </a:p>
-          <a:p>
             <a:endParaRPr lang="en-US" dirty="0"/>
           </a:p>
           <a:p>
-            <a:r>
-              <a:rPr lang="en-US" dirty="0"/>
-              <a:t>There is a parsimonious solution to nature.</a:t>
-            </a:r>
+            <a:endParaRPr lang="en-US" dirty="0"/>
+          </a:p>
+          <a:p>
+            <a:endParaRPr lang="en-US" dirty="0"/>
+          </a:p>
+          <a:p>
+            <a:endParaRPr lang="en-US" dirty="0"/>
+          </a:p>
+          <a:p>
+            <a:endParaRPr lang="en-US" dirty="0"/>
+          </a:p>
+          <a:p>
+            <a:endParaRPr lang="en-US" dirty="0"/>
           </a:p>
           <a:p>
             <a:endParaRPr lang="en-US" dirty="0"/>
@@ -7816,7 +7798,7 @@
 </file>
 
 <file path=ppt/slides/slide1.xml><?xml version="1.0" encoding="utf-8"?>
-<p:sld xmlns:a="http://schemas.openxmlformats.org/drawingml/2006/main" xmlns:a16="http://schemas.microsoft.com/office/drawing/2014/main" xmlns:ns3="http://schemas.microsoft.com/office/powerpoint/2010/main" xmlns:p="http://schemas.openxmlformats.org/presentationml/2006/main">
+<p:sld xmlns:a="http://schemas.openxmlformats.org/drawingml/2006/main" xmlns:r="http://schemas.openxmlformats.org/officeDocument/2006/relationships" xmlns:p="http://schemas.openxmlformats.org/presentationml/2006/main">
   <p:cSld>
     <p:bg>
       <p:bgPr>
@@ -7845,7 +7827,7 @@
           <p:cNvPr id="2" name="TextBox 1">
             <a:extLst>
               <a:ext uri="{FF2B5EF4-FFF2-40B4-BE49-F238E27FC236}">
-                <a16:creationId id="{1D77ACA5-3691-8FEB-0266-8D47BBCCF4C6}"/>
+                <a16:creationId xmlns:a16="http://schemas.microsoft.com/office/drawing/2014/main" id="{1D77ACA5-3691-8FEB-0266-8D47BBCCF4C6}"/>
               </a:ext>
             </a:extLst>
           </p:cNvPr>
@@ -7854,7 +7836,7 @@
         </p:nvSpPr>
         <p:spPr>
           <a:xfrm>
-            <a:off x="0" y="358254"/>
+            <a:off x="1" y="1332944"/>
             <a:ext cx="12191999" cy="2657138"/>
           </a:xfrm>
           <a:prstGeom prst="rect">
@@ -8064,7 +8046,7 @@
     </p:spTree>
     <p:extLst>
       <p:ext uri="{BB962C8B-B14F-4D97-AF65-F5344CB8AC3E}">
-        <ns3:creationId val="2348934641"/>
+        <p14:creationId xmlns:p14="http://schemas.microsoft.com/office/powerpoint/2010/main" val="2348934641"/>
       </p:ext>
     </p:extLst>
   </p:cSld>
@@ -8075,7 +8057,7 @@
 </file>
 
 <file path=ppt/slides/slide2.xml><?xml version="1.0" encoding="utf-8"?>
-<p:sld xmlns:a="http://schemas.openxmlformats.org/drawingml/2006/main" xmlns:a16="http://schemas.microsoft.com/office/drawing/2014/main" xmlns:ns3="http://schemas.microsoft.com/office/powerpoint/2010/main" xmlns:p="http://schemas.openxmlformats.org/presentationml/2006/main">
+<p:sld xmlns:a="http://schemas.openxmlformats.org/drawingml/2006/main" xmlns:r="http://schemas.openxmlformats.org/officeDocument/2006/relationships" xmlns:p="http://schemas.openxmlformats.org/presentationml/2006/main">
   <p:cSld>
     <p:bg>
       <p:bgPr>
@@ -8101,172 +8083,10 @@
       </p:grpSpPr>
       <p:sp>
         <p:nvSpPr>
-          <p:cNvPr id="3" name="Footer Placeholder 3">
-            <a:extLst>
-              <a:ext uri="{FF2B5EF4-FFF2-40B4-BE49-F238E27FC236}">
-                <a16:creationId id="{3E7D1A46-6CBC-414E-A5E8-3168B31664F2}"/>
-              </a:ext>
-            </a:extLst>
-          </p:cNvPr>
-          <p:cNvSpPr txBox="1">
-            <a:spLocks/>
-          </p:cNvSpPr>
-          <p:nvPr/>
-        </p:nvSpPr>
-        <p:spPr>
-          <a:xfrm>
-            <a:off x="10924248" y="6388602"/>
-            <a:ext cx="1142262" cy="365125"/>
-          </a:xfrm>
-          <a:prstGeom prst="rect">
-            <a:avLst/>
-          </a:prstGeom>
-        </p:spPr>
-        <p:txBody>
-          <a:bodyPr vert="horz" lIns="91440" tIns="45720" rIns="91440" bIns="45720" rtlCol="0" anchor="ctr"/>
-          <a:lstStyle>
-            <a:defPPr>
-              <a:defRPr lang="en-US"/>
-            </a:defPPr>
-            <a:lvl1pPr marL="0" algn="ctr" defTabSz="914400" rtl="0" eaLnBrk="1" latinLnBrk="0" hangingPunct="1">
-              <a:defRPr sz="1200" kern="1200">
-                <a:solidFill>
-                  <a:schemeClr val="tx1">
-                    <a:tint val="75000"/>
-                  </a:schemeClr>
-                </a:solidFill>
-                <a:latin typeface="+mn-lt"/>
-                <a:ea typeface="+mn-ea"/>
-                <a:cs typeface="+mn-cs"/>
-              </a:defRPr>
-            </a:lvl1pPr>
-            <a:lvl2pPr marL="457200" algn="l" defTabSz="914400" rtl="0" eaLnBrk="1" latinLnBrk="0" hangingPunct="1">
-              <a:defRPr sz="1800" kern="1200">
-                <a:solidFill>
-                  <a:schemeClr val="tx1"/>
-                </a:solidFill>
-                <a:latin typeface="+mn-lt"/>
-                <a:ea typeface="+mn-ea"/>
-                <a:cs typeface="+mn-cs"/>
-              </a:defRPr>
-            </a:lvl2pPr>
-            <a:lvl3pPr marL="914400" algn="l" defTabSz="914400" rtl="0" eaLnBrk="1" latinLnBrk="0" hangingPunct="1">
-              <a:defRPr sz="1800" kern="1200">
-                <a:solidFill>
-                  <a:schemeClr val="tx1"/>
-                </a:solidFill>
-                <a:latin typeface="+mn-lt"/>
-                <a:ea typeface="+mn-ea"/>
-                <a:cs typeface="+mn-cs"/>
-              </a:defRPr>
-            </a:lvl3pPr>
-            <a:lvl4pPr marL="1371600" algn="l" defTabSz="914400" rtl="0" eaLnBrk="1" latinLnBrk="0" hangingPunct="1">
-              <a:defRPr sz="1800" kern="1200">
-                <a:solidFill>
-                  <a:schemeClr val="tx1"/>
-                </a:solidFill>
-                <a:latin typeface="+mn-lt"/>
-                <a:ea typeface="+mn-ea"/>
-                <a:cs typeface="+mn-cs"/>
-              </a:defRPr>
-            </a:lvl4pPr>
-            <a:lvl5pPr marL="1828800" algn="l" defTabSz="914400" rtl="0" eaLnBrk="1" latinLnBrk="0" hangingPunct="1">
-              <a:defRPr sz="1800" kern="1200">
-                <a:solidFill>
-                  <a:schemeClr val="tx1"/>
-                </a:solidFill>
-                <a:latin typeface="+mn-lt"/>
-                <a:ea typeface="+mn-ea"/>
-                <a:cs typeface="+mn-cs"/>
-              </a:defRPr>
-            </a:lvl5pPr>
-            <a:lvl6pPr marL="2286000" algn="l" defTabSz="914400" rtl="0" eaLnBrk="1" latinLnBrk="0" hangingPunct="1">
-              <a:defRPr sz="1800" kern="1200">
-                <a:solidFill>
-                  <a:schemeClr val="tx1"/>
-                </a:solidFill>
-                <a:latin typeface="+mn-lt"/>
-                <a:ea typeface="+mn-ea"/>
-                <a:cs typeface="+mn-cs"/>
-              </a:defRPr>
-            </a:lvl6pPr>
-            <a:lvl7pPr marL="2743200" algn="l" defTabSz="914400" rtl="0" eaLnBrk="1" latinLnBrk="0" hangingPunct="1">
-              <a:defRPr sz="1800" kern="1200">
-                <a:solidFill>
-                  <a:schemeClr val="tx1"/>
-                </a:solidFill>
-                <a:latin typeface="+mn-lt"/>
-                <a:ea typeface="+mn-ea"/>
-                <a:cs typeface="+mn-cs"/>
-              </a:defRPr>
-            </a:lvl7pPr>
-            <a:lvl8pPr marL="3200400" algn="l" defTabSz="914400" rtl="0" eaLnBrk="1" latinLnBrk="0" hangingPunct="1">
-              <a:defRPr sz="1800" kern="1200">
-                <a:solidFill>
-                  <a:schemeClr val="tx1"/>
-                </a:solidFill>
-                <a:latin typeface="+mn-lt"/>
-                <a:ea typeface="+mn-ea"/>
-                <a:cs typeface="+mn-cs"/>
-              </a:defRPr>
-            </a:lvl8pPr>
-            <a:lvl9pPr marL="3657600" algn="l" defTabSz="914400" rtl="0" eaLnBrk="1" latinLnBrk="0" hangingPunct="1">
-              <a:defRPr sz="1800" kern="1200">
-                <a:solidFill>
-                  <a:schemeClr val="tx1"/>
-                </a:solidFill>
-                <a:latin typeface="+mn-lt"/>
-                <a:ea typeface="+mn-ea"/>
-                <a:cs typeface="+mn-cs"/>
-              </a:defRPr>
-            </a:lvl9pPr>
-          </a:lstStyle>
-          <a:p>
-            <a:pPr marL="0" marR="0" lvl="0" indent="0" algn="ctr" defTabSz="914400" rtl="0" eaLnBrk="1" fontAlgn="auto" latinLnBrk="0" hangingPunct="1">
-              <a:lnSpc>
-                <a:spcPct val="100000"/>
-              </a:lnSpc>
-              <a:spcBef>
-                <a:spcPts val="0"/>
-              </a:spcBef>
-              <a:spcAft>
-                <a:spcPts val="0"/>
-              </a:spcAft>
-              <a:buClrTx/>
-              <a:buSzTx/>
-              <a:buFontTx/>
-              <a:buNone/>
-              <a:tabLst/>
-              <a:defRPr/>
-            </a:pPr>
-            <a:r>
-              <a:rPr kumimoji="0" lang="en-US" sz="1200" b="0" i="0" u="none" strike="noStrike" kern="1200" cap="none" spc="0" normalizeH="0" baseline="0" noProof="0" dirty="0">
-                <a:ln>
-                  <a:noFill/>
-                </a:ln>
-                <a:solidFill>
-                  <a:prstClr val="black">
-                    <a:tint val="75000"/>
-                  </a:prstClr>
-                </a:solidFill>
-                <a:effectLst/>
-                <a:uLnTx/>
-                <a:uFillTx/>
-                <a:latin typeface="Helvetica Neue" panose="02000503000000020004" pitchFamily="2" charset="0"/>
-                <a:ea typeface="Helvetica Neue" panose="02000503000000020004" pitchFamily="2" charset="0"/>
-                <a:cs typeface="Helvetica Neue" panose="02000503000000020004" pitchFamily="2" charset="0"/>
-              </a:rPr>
-              <a:t>J Mark Morris</a:t>
-            </a:r>
-          </a:p>
-        </p:txBody>
-      </p:sp>
-      <p:sp>
-        <p:nvSpPr>
           <p:cNvPr id="6" name="TextBox 5">
             <a:extLst>
               <a:ext uri="{FF2B5EF4-FFF2-40B4-BE49-F238E27FC236}">
-                <a16:creationId id="{CABB2FF6-BE6B-829E-697C-BADE07423A98}"/>
+                <a16:creationId xmlns:a16="http://schemas.microsoft.com/office/drawing/2014/main" id="{CABB2FF6-BE6B-829E-697C-BADE07423A98}"/>
               </a:ext>
             </a:extLst>
           </p:cNvPr>
@@ -8275,8 +8095,8 @@
         </p:nvSpPr>
         <p:spPr>
           <a:xfrm>
-            <a:off x="1853514" y="782954"/>
-            <a:ext cx="8303973" cy="4247317"/>
+            <a:off x="1791946" y="1642416"/>
+            <a:ext cx="8303973" cy="3416320"/>
           </a:xfrm>
           <a:prstGeom prst="rect">
             <a:avLst/>
@@ -8289,47 +8109,43 @@
           </a:bodyPr>
           <a:lstStyle/>
           <a:p>
-            <a:pPr marL="0" marR="0" lvl="0" indent="0" algn="ctr" defTabSz="914400" rtl="0" eaLnBrk="1" fontAlgn="auto" latinLnBrk="0" hangingPunct="1">
-              <a:lnSpc>
-                <a:spcPct val="100000"/>
-              </a:lnSpc>
-              <a:spcBef>
-                <a:spcPts val="0"/>
-              </a:spcBef>
-              <a:spcAft>
-                <a:spcPts val="0"/>
-              </a:spcAft>
-              <a:buClrTx/>
-              <a:buSzTx/>
-              <a:buFontTx/>
-              <a:buNone/>
-              <a:tabLst/>
+            <a:pPr algn="ctr">
               <a:defRPr/>
             </a:pPr>
             <a:r>
               <a:rPr lang="en-US" sz="5400" b="1" dirty="0">
                 <a:solidFill>
-                  <a:prstClr val="white">
-                    <a:lumMod val="95000"/>
-                  </a:prstClr>
+                  <a:schemeClr val="accent4"/>
                 </a:solidFill>
                 <a:latin typeface="Helvetica Neue" panose="02000503000000020004" pitchFamily="2" charset="0"/>
                 <a:ea typeface="Helvetica Neue" panose="02000503000000020004" pitchFamily="2" charset="0"/>
                 <a:cs typeface="Helvetica Neue" panose="02000503000000020004" pitchFamily="2" charset="0"/>
               </a:rPr>
-              <a:t>The </a:t>
+              <a:t>Absolute Time and the Euclidean Void.</a:t>
             </a:r>
+          </a:p>
+          <a:p>
+            <a:pPr algn="ctr">
+              <a:defRPr/>
+            </a:pPr>
             <a:r>
               <a:rPr lang="en-US" sz="5400" b="1" dirty="0">
                 <a:solidFill>
-                  <a:srgbClr val="FFC000"/>
+                  <a:prstClr val="white">
+                    <a:lumMod val="95000"/>
+                  </a:prstClr>
                 </a:solidFill>
                 <a:latin typeface="Helvetica Neue" panose="02000503000000020004" pitchFamily="2" charset="0"/>
                 <a:ea typeface="Helvetica Neue" panose="02000503000000020004" pitchFamily="2" charset="0"/>
                 <a:cs typeface="Helvetica Neue" panose="02000503000000020004" pitchFamily="2" charset="0"/>
               </a:rPr>
-              <a:t>Background</a:t>
+              <a:t>The fixed background</a:t>
             </a:r>
+          </a:p>
+          <a:p>
+            <a:pPr algn="ctr">
+              <a:defRPr/>
+            </a:pPr>
             <a:r>
               <a:rPr lang="en-US" sz="5400" b="1" dirty="0">
                 <a:solidFill>
@@ -8341,147 +8157,8 @@
                 <a:ea typeface="Helvetica Neue" panose="02000503000000020004" pitchFamily="2" charset="0"/>
                 <a:cs typeface="Helvetica Neue" panose="02000503000000020004" pitchFamily="2" charset="0"/>
               </a:rPr>
-              <a:t> of </a:t>
+              <a:t>of the universe. </a:t>
             </a:r>
-            <a:br>
-              <a:rPr lang="en-US" sz="5400" b="1" dirty="0">
-                <a:solidFill>
-                  <a:prstClr val="white">
-                    <a:lumMod val="95000"/>
-                  </a:prstClr>
-                </a:solidFill>
-                <a:latin typeface="Helvetica Neue" panose="02000503000000020004" pitchFamily="2" charset="0"/>
-                <a:ea typeface="Helvetica Neue" panose="02000503000000020004" pitchFamily="2" charset="0"/>
-                <a:cs typeface="Helvetica Neue" panose="02000503000000020004" pitchFamily="2" charset="0"/>
-              </a:rPr>
-            </a:br>
-            <a:r>
-              <a:rPr lang="en-US" sz="5400" b="1" dirty="0">
-                <a:solidFill>
-                  <a:prstClr val="white">
-                    <a:lumMod val="95000"/>
-                  </a:prstClr>
-                </a:solidFill>
-                <a:latin typeface="Helvetica Neue" panose="02000503000000020004" pitchFamily="2" charset="0"/>
-                <a:ea typeface="Helvetica Neue" panose="02000503000000020004" pitchFamily="2" charset="0"/>
-                <a:cs typeface="Helvetica Neue" panose="02000503000000020004" pitchFamily="2" charset="0"/>
-              </a:rPr>
-              <a:t>the Universe is an</a:t>
-            </a:r>
-          </a:p>
-          <a:p>
-            <a:pPr marL="0" marR="0" lvl="0" indent="0" algn="ctr" defTabSz="914400" rtl="0" eaLnBrk="1" fontAlgn="auto" latinLnBrk="0" hangingPunct="1">
-              <a:lnSpc>
-                <a:spcPct val="100000"/>
-              </a:lnSpc>
-              <a:spcBef>
-                <a:spcPts val="0"/>
-              </a:spcBef>
-              <a:spcAft>
-                <a:spcPts val="0"/>
-              </a:spcAft>
-              <a:buClrTx/>
-              <a:buSzTx/>
-              <a:buFontTx/>
-              <a:buNone/>
-              <a:tabLst/>
-              <a:defRPr/>
-            </a:pPr>
-            <a:r>
-              <a:rPr lang="en-US" sz="5400" b="1" dirty="0">
-                <a:solidFill>
-                  <a:prstClr val="white">
-                    <a:lumMod val="95000"/>
-                  </a:prstClr>
-                </a:solidFill>
-                <a:latin typeface="Helvetica Neue" panose="02000503000000020004" pitchFamily="2" charset="0"/>
-                <a:ea typeface="Helvetica Neue" panose="02000503000000020004" pitchFamily="2" charset="0"/>
-                <a:cs typeface="Helvetica Neue" panose="02000503000000020004" pitchFamily="2" charset="0"/>
-              </a:rPr>
-              <a:t>Empty Euclidean Void of </a:t>
-            </a:r>
-          </a:p>
-          <a:p>
-            <a:pPr marL="0" marR="0" lvl="0" indent="0" algn="ctr" defTabSz="914400" rtl="0" eaLnBrk="1" fontAlgn="auto" latinLnBrk="0" hangingPunct="1">
-              <a:lnSpc>
-                <a:spcPct val="100000"/>
-              </a:lnSpc>
-              <a:spcBef>
-                <a:spcPts val="0"/>
-              </a:spcBef>
-              <a:spcAft>
-                <a:spcPts val="0"/>
-              </a:spcAft>
-              <a:buClrTx/>
-              <a:buSzTx/>
-              <a:buFontTx/>
-              <a:buNone/>
-              <a:tabLst/>
-              <a:defRPr/>
-            </a:pPr>
-            <a:r>
-              <a:rPr kumimoji="0" lang="en-US" sz="5400" b="1" i="0" u="none" strike="noStrike" kern="1200" cap="none" spc="0" normalizeH="0" baseline="0" noProof="0" dirty="0">
-                <a:ln>
-                  <a:noFill/>
-                </a:ln>
-                <a:solidFill>
-                  <a:prstClr val="white">
-                    <a:lumMod val="95000"/>
-                  </a:prstClr>
-                </a:solidFill>
-                <a:effectLst/>
-                <a:uLnTx/>
-                <a:uFillTx/>
-                <a:latin typeface="Helvetica Neue" panose="02000503000000020004" pitchFamily="2" charset="0"/>
-                <a:ea typeface="Helvetica Neue" panose="02000503000000020004" pitchFamily="2" charset="0"/>
-                <a:cs typeface="Helvetica Neue" panose="02000503000000020004" pitchFamily="2" charset="0"/>
-              </a:rPr>
-              <a:t>1D Time and 3D Space</a:t>
-            </a:r>
-          </a:p>
-          <a:p>
-            <a:pPr marL="0" marR="0" lvl="0" indent="0" algn="ctr" defTabSz="914400" rtl="0" eaLnBrk="1" fontAlgn="auto" latinLnBrk="0" hangingPunct="1">
-              <a:lnSpc>
-                <a:spcPct val="100000"/>
-              </a:lnSpc>
-              <a:spcBef>
-                <a:spcPts val="0"/>
-              </a:spcBef>
-              <a:spcAft>
-                <a:spcPts val="0"/>
-              </a:spcAft>
-              <a:buClrTx/>
-              <a:buSzTx/>
-              <a:buFontTx/>
-              <a:buNone/>
-              <a:tabLst/>
-              <a:defRPr/>
-            </a:pPr>
-            <a:r>
-              <a:rPr lang="en-US" sz="5400" b="1" dirty="0">
-                <a:solidFill>
-                  <a:srgbClr val="FFC000"/>
-                </a:solidFill>
-                <a:latin typeface="Helvetica Neue" panose="02000503000000020004" pitchFamily="2" charset="0"/>
-                <a:ea typeface="Helvetica Neue" panose="02000503000000020004" pitchFamily="2" charset="0"/>
-                <a:cs typeface="Helvetica Neue" panose="02000503000000020004" pitchFamily="2" charset="0"/>
-              </a:rPr>
-              <a:t>Empty = Nothingness</a:t>
-            </a:r>
-            <a:endParaRPr kumimoji="0" lang="en-US" sz="5400" b="1" i="0" u="none" strike="noStrike" kern="1200" cap="none" spc="0" normalizeH="0" baseline="0" noProof="0" dirty="0">
-              <a:ln>
-                <a:noFill/>
-              </a:ln>
-              <a:solidFill>
-                <a:srgbClr val="FFC000"/>
-              </a:solidFill>
-              <a:effectLst/>
-              <a:uLnTx/>
-              <a:uFillTx/>
-              <a:latin typeface="Helvetica Neue" panose="02000503000000020004" pitchFamily="2" charset="0"/>
-              <a:ea typeface="Helvetica Neue" panose="02000503000000020004" pitchFamily="2" charset="0"/>
-              <a:cs typeface="Helvetica Neue" panose="02000503000000020004" pitchFamily="2" charset="0"/>
-            </a:endParaRPr>
           </a:p>
         </p:txBody>
       </p:sp>
@@ -8490,7 +8167,7 @@
           <p:cNvPr id="2" name="Group 1">
             <a:extLst>
               <a:ext uri="{FF2B5EF4-FFF2-40B4-BE49-F238E27FC236}">
-                <a16:creationId id="{8A870217-A4FC-5467-6EF3-60F128F4990F}"/>
+                <a16:creationId xmlns:a16="http://schemas.microsoft.com/office/drawing/2014/main" id="{8A870217-A4FC-5467-6EF3-60F128F4990F}"/>
               </a:ext>
             </a:extLst>
           </p:cNvPr>
@@ -8499,7 +8176,7 @@
         </p:nvGrpSpPr>
         <p:grpSpPr>
           <a:xfrm>
-            <a:off x="635207" y="782954"/>
+            <a:off x="635207" y="2571554"/>
             <a:ext cx="872354" cy="1101131"/>
             <a:chOff x="1035610" y="4601259"/>
             <a:chExt cx="872354" cy="1101131"/>
@@ -8510,7 +8187,7 @@
             <p:cNvPr id="4" name="Rectangle 3">
               <a:extLst>
                 <a:ext uri="{FF2B5EF4-FFF2-40B4-BE49-F238E27FC236}">
-                  <a16:creationId id="{75AB2963-84E2-53E1-22D0-597AF4F756CB}"/>
+                  <a16:creationId xmlns:a16="http://schemas.microsoft.com/office/drawing/2014/main" id="{75AB2963-84E2-53E1-22D0-597AF4F756CB}"/>
                 </a:ext>
               </a:extLst>
             </p:cNvPr>
@@ -8646,7 +8323,7 @@
             <p:cNvPr id="7" name="Straight Arrow Connector 6">
               <a:extLst>
                 <a:ext uri="{FF2B5EF4-FFF2-40B4-BE49-F238E27FC236}">
-                  <a16:creationId id="{3EC0E443-C7DC-60F3-EAFC-E4DEAAD5372C}"/>
+                  <a16:creationId xmlns:a16="http://schemas.microsoft.com/office/drawing/2014/main" id="{3EC0E443-C7DC-60F3-EAFC-E4DEAAD5372C}"/>
                 </a:ext>
               </a:extLst>
             </p:cNvPr>
@@ -8693,7 +8370,7 @@
           <p:cNvPr id="8" name="Group 7">
             <a:extLst>
               <a:ext uri="{FF2B5EF4-FFF2-40B4-BE49-F238E27FC236}">
-                <a16:creationId id="{551A3B37-4989-6F0F-1718-9F1698C822DA}"/>
+                <a16:creationId xmlns:a16="http://schemas.microsoft.com/office/drawing/2014/main" id="{551A3B37-4989-6F0F-1718-9F1698C822DA}"/>
               </a:ext>
             </a:extLst>
           </p:cNvPr>
@@ -8702,7 +8379,7 @@
         </p:nvGrpSpPr>
         <p:grpSpPr>
           <a:xfrm>
-            <a:off x="10291703" y="496909"/>
+            <a:off x="10291703" y="2285509"/>
             <a:ext cx="1265090" cy="1897439"/>
             <a:chOff x="839242" y="2412063"/>
             <a:chExt cx="1265090" cy="1897439"/>
@@ -8713,7 +8390,7 @@
             <p:cNvPr id="9" name="Group 8">
               <a:extLst>
                 <a:ext uri="{FF2B5EF4-FFF2-40B4-BE49-F238E27FC236}">
-                  <a16:creationId id="{2DB89AFD-AAFA-0A63-3B58-63A4C0E967A9}"/>
+                  <a16:creationId xmlns:a16="http://schemas.microsoft.com/office/drawing/2014/main" id="{2DB89AFD-AAFA-0A63-3B58-63A4C0E967A9}"/>
                 </a:ext>
               </a:extLst>
             </p:cNvPr>
@@ -8733,7 +8410,7 @@
               <p:cNvPr id="11" name="Straight Arrow Connector 10">
                 <a:extLst>
                   <a:ext uri="{FF2B5EF4-FFF2-40B4-BE49-F238E27FC236}">
-                    <a16:creationId id="{71B24A4D-935C-9032-07F6-AE704ED13EAB}"/>
+                    <a16:creationId xmlns:a16="http://schemas.microsoft.com/office/drawing/2014/main" id="{71B24A4D-935C-9032-07F6-AE704ED13EAB}"/>
                   </a:ext>
                 </a:extLst>
               </p:cNvPr>
@@ -8779,7 +8456,7 @@
               <p:cNvPr id="12" name="Straight Arrow Connector 11">
                 <a:extLst>
                   <a:ext uri="{FF2B5EF4-FFF2-40B4-BE49-F238E27FC236}">
-                    <a16:creationId id="{9BFEC0FF-8745-6A86-6F7F-092E3A64C7DD}"/>
+                    <a16:creationId xmlns:a16="http://schemas.microsoft.com/office/drawing/2014/main" id="{9BFEC0FF-8745-6A86-6F7F-092E3A64C7DD}"/>
                   </a:ext>
                 </a:extLst>
               </p:cNvPr>
@@ -8825,7 +8502,7 @@
               <p:cNvPr id="13" name="Straight Arrow Connector 12">
                 <a:extLst>
                   <a:ext uri="{FF2B5EF4-FFF2-40B4-BE49-F238E27FC236}">
-                    <a16:creationId id="{FE659F7D-5067-2974-72EF-292AB4C98936}"/>
+                    <a16:creationId xmlns:a16="http://schemas.microsoft.com/office/drawing/2014/main" id="{FE659F7D-5067-2974-72EF-292AB4C98936}"/>
                   </a:ext>
                 </a:extLst>
               </p:cNvPr>
@@ -8872,7 +8549,7 @@
             <p:cNvPr id="10" name="Rectangle 9">
               <a:extLst>
                 <a:ext uri="{FF2B5EF4-FFF2-40B4-BE49-F238E27FC236}">
-                  <a16:creationId id="{DAFC367D-676E-3E87-4BD2-DC2541ED9645}"/>
+                  <a16:creationId xmlns:a16="http://schemas.microsoft.com/office/drawing/2014/main" id="{DAFC367D-676E-3E87-4BD2-DC2541ED9645}"/>
                 </a:ext>
               </a:extLst>
             </p:cNvPr>
@@ -9163,7 +8840,7 @@
     </p:spTree>
     <p:extLst>
       <p:ext uri="{BB962C8B-B14F-4D97-AF65-F5344CB8AC3E}">
-        <ns3:creationId val="3899871052"/>
+        <p14:creationId xmlns:p14="http://schemas.microsoft.com/office/powerpoint/2010/main" val="3899871052"/>
       </p:ext>
     </p:extLst>
   </p:cSld>
@@ -9174,7 +8851,7 @@
 </file>
 
 <file path=ppt/slides/slide3.xml><?xml version="1.0" encoding="utf-8"?>
-<p:sld xmlns:a="http://schemas.openxmlformats.org/drawingml/2006/main" xmlns:a16="http://schemas.microsoft.com/office/drawing/2014/main" xmlns:ns3="http://schemas.microsoft.com/office/powerpoint/2010/main" xmlns:p="http://schemas.openxmlformats.org/presentationml/2006/main">
+<p:sld xmlns:a="http://schemas.openxmlformats.org/drawingml/2006/main" xmlns:r="http://schemas.openxmlformats.org/officeDocument/2006/relationships" xmlns:p="http://schemas.openxmlformats.org/presentationml/2006/main">
   <p:cSld>
     <p:bg>
       <p:bgPr>
@@ -9200,172 +8877,10 @@
       </p:grpSpPr>
       <p:sp>
         <p:nvSpPr>
-          <p:cNvPr id="3" name="Footer Placeholder 3">
-            <a:extLst>
-              <a:ext uri="{FF2B5EF4-FFF2-40B4-BE49-F238E27FC236}">
-                <a16:creationId id="{3E7D1A46-6CBC-414E-A5E8-3168B31664F2}"/>
-              </a:ext>
-            </a:extLst>
-          </p:cNvPr>
-          <p:cNvSpPr txBox="1">
-            <a:spLocks/>
-          </p:cNvSpPr>
-          <p:nvPr/>
-        </p:nvSpPr>
-        <p:spPr>
-          <a:xfrm>
-            <a:off x="10924248" y="6388602"/>
-            <a:ext cx="1142262" cy="365125"/>
-          </a:xfrm>
-          <a:prstGeom prst="rect">
-            <a:avLst/>
-          </a:prstGeom>
-        </p:spPr>
-        <p:txBody>
-          <a:bodyPr vert="horz" lIns="91440" tIns="45720" rIns="91440" bIns="45720" rtlCol="0" anchor="ctr"/>
-          <a:lstStyle>
-            <a:defPPr>
-              <a:defRPr lang="en-US"/>
-            </a:defPPr>
-            <a:lvl1pPr marL="0" algn="ctr" defTabSz="914400" rtl="0" eaLnBrk="1" latinLnBrk="0" hangingPunct="1">
-              <a:defRPr sz="1200" kern="1200">
-                <a:solidFill>
-                  <a:schemeClr val="tx1">
-                    <a:tint val="75000"/>
-                  </a:schemeClr>
-                </a:solidFill>
-                <a:latin typeface="+mn-lt"/>
-                <a:ea typeface="+mn-ea"/>
-                <a:cs typeface="+mn-cs"/>
-              </a:defRPr>
-            </a:lvl1pPr>
-            <a:lvl2pPr marL="457200" algn="l" defTabSz="914400" rtl="0" eaLnBrk="1" latinLnBrk="0" hangingPunct="1">
-              <a:defRPr sz="1800" kern="1200">
-                <a:solidFill>
-                  <a:schemeClr val="tx1"/>
-                </a:solidFill>
-                <a:latin typeface="+mn-lt"/>
-                <a:ea typeface="+mn-ea"/>
-                <a:cs typeface="+mn-cs"/>
-              </a:defRPr>
-            </a:lvl2pPr>
-            <a:lvl3pPr marL="914400" algn="l" defTabSz="914400" rtl="0" eaLnBrk="1" latinLnBrk="0" hangingPunct="1">
-              <a:defRPr sz="1800" kern="1200">
-                <a:solidFill>
-                  <a:schemeClr val="tx1"/>
-                </a:solidFill>
-                <a:latin typeface="+mn-lt"/>
-                <a:ea typeface="+mn-ea"/>
-                <a:cs typeface="+mn-cs"/>
-              </a:defRPr>
-            </a:lvl3pPr>
-            <a:lvl4pPr marL="1371600" algn="l" defTabSz="914400" rtl="0" eaLnBrk="1" latinLnBrk="0" hangingPunct="1">
-              <a:defRPr sz="1800" kern="1200">
-                <a:solidFill>
-                  <a:schemeClr val="tx1"/>
-                </a:solidFill>
-                <a:latin typeface="+mn-lt"/>
-                <a:ea typeface="+mn-ea"/>
-                <a:cs typeface="+mn-cs"/>
-              </a:defRPr>
-            </a:lvl4pPr>
-            <a:lvl5pPr marL="1828800" algn="l" defTabSz="914400" rtl="0" eaLnBrk="1" latinLnBrk="0" hangingPunct="1">
-              <a:defRPr sz="1800" kern="1200">
-                <a:solidFill>
-                  <a:schemeClr val="tx1"/>
-                </a:solidFill>
-                <a:latin typeface="+mn-lt"/>
-                <a:ea typeface="+mn-ea"/>
-                <a:cs typeface="+mn-cs"/>
-              </a:defRPr>
-            </a:lvl5pPr>
-            <a:lvl6pPr marL="2286000" algn="l" defTabSz="914400" rtl="0" eaLnBrk="1" latinLnBrk="0" hangingPunct="1">
-              <a:defRPr sz="1800" kern="1200">
-                <a:solidFill>
-                  <a:schemeClr val="tx1"/>
-                </a:solidFill>
-                <a:latin typeface="+mn-lt"/>
-                <a:ea typeface="+mn-ea"/>
-                <a:cs typeface="+mn-cs"/>
-              </a:defRPr>
-            </a:lvl6pPr>
-            <a:lvl7pPr marL="2743200" algn="l" defTabSz="914400" rtl="0" eaLnBrk="1" latinLnBrk="0" hangingPunct="1">
-              <a:defRPr sz="1800" kern="1200">
-                <a:solidFill>
-                  <a:schemeClr val="tx1"/>
-                </a:solidFill>
-                <a:latin typeface="+mn-lt"/>
-                <a:ea typeface="+mn-ea"/>
-                <a:cs typeface="+mn-cs"/>
-              </a:defRPr>
-            </a:lvl7pPr>
-            <a:lvl8pPr marL="3200400" algn="l" defTabSz="914400" rtl="0" eaLnBrk="1" latinLnBrk="0" hangingPunct="1">
-              <a:defRPr sz="1800" kern="1200">
-                <a:solidFill>
-                  <a:schemeClr val="tx1"/>
-                </a:solidFill>
-                <a:latin typeface="+mn-lt"/>
-                <a:ea typeface="+mn-ea"/>
-                <a:cs typeface="+mn-cs"/>
-              </a:defRPr>
-            </a:lvl8pPr>
-            <a:lvl9pPr marL="3657600" algn="l" defTabSz="914400" rtl="0" eaLnBrk="1" latinLnBrk="0" hangingPunct="1">
-              <a:defRPr sz="1800" kern="1200">
-                <a:solidFill>
-                  <a:schemeClr val="tx1"/>
-                </a:solidFill>
-                <a:latin typeface="+mn-lt"/>
-                <a:ea typeface="+mn-ea"/>
-                <a:cs typeface="+mn-cs"/>
-              </a:defRPr>
-            </a:lvl9pPr>
-          </a:lstStyle>
-          <a:p>
-            <a:pPr marL="0" marR="0" lvl="0" indent="0" algn="ctr" defTabSz="914400" rtl="0" eaLnBrk="1" fontAlgn="auto" latinLnBrk="0" hangingPunct="1">
-              <a:lnSpc>
-                <a:spcPct val="100000"/>
-              </a:lnSpc>
-              <a:spcBef>
-                <a:spcPts val="0"/>
-              </a:spcBef>
-              <a:spcAft>
-                <a:spcPts val="0"/>
-              </a:spcAft>
-              <a:buClrTx/>
-              <a:buSzTx/>
-              <a:buFontTx/>
-              <a:buNone/>
-              <a:tabLst/>
-              <a:defRPr/>
-            </a:pPr>
-            <a:r>
-              <a:rPr kumimoji="0" lang="en-US" sz="1200" b="0" i="0" u="none" strike="noStrike" kern="1200" cap="none" spc="0" normalizeH="0" baseline="0" noProof="0" dirty="0">
-                <a:ln>
-                  <a:noFill/>
-                </a:ln>
-                <a:solidFill>
-                  <a:prstClr val="black">
-                    <a:tint val="75000"/>
-                  </a:prstClr>
-                </a:solidFill>
-                <a:effectLst/>
-                <a:uLnTx/>
-                <a:uFillTx/>
-                <a:latin typeface="Helvetica Neue" panose="02000503000000020004" pitchFamily="2" charset="0"/>
-                <a:ea typeface="Helvetica Neue" panose="02000503000000020004" pitchFamily="2" charset="0"/>
-                <a:cs typeface="Helvetica Neue" panose="02000503000000020004" pitchFamily="2" charset="0"/>
-              </a:rPr>
-              <a:t>J Mark Morris</a:t>
-            </a:r>
-          </a:p>
-        </p:txBody>
-      </p:sp>
-      <p:sp>
-        <p:nvSpPr>
           <p:cNvPr id="6" name="TextBox 5">
             <a:extLst>
               <a:ext uri="{FF2B5EF4-FFF2-40B4-BE49-F238E27FC236}">
-                <a16:creationId id="{CABB2FF6-BE6B-829E-697C-BADE07423A98}"/>
+                <a16:creationId xmlns:a16="http://schemas.microsoft.com/office/drawing/2014/main" id="{CABB2FF6-BE6B-829E-697C-BADE07423A98}"/>
               </a:ext>
             </a:extLst>
           </p:cNvPr>
@@ -9406,7 +8921,7 @@
               <a:defRPr/>
             </a:pPr>
             <a:r>
-              <a:rPr lang="en-US" sz="6000" b="1" dirty="0">
+              <a:rPr lang="en-US" sz="5400" b="1" dirty="0">
                 <a:solidFill>
                   <a:srgbClr val="FFC000"/>
                 </a:solidFill>
@@ -9745,7 +9260,7 @@
     </p:spTree>
     <p:extLst>
       <p:ext uri="{BB962C8B-B14F-4D97-AF65-F5344CB8AC3E}">
-        <ns3:creationId val="2571834048"/>
+        <p14:creationId xmlns:p14="http://schemas.microsoft.com/office/powerpoint/2010/main" val="2571834048"/>
       </p:ext>
     </p:extLst>
   </p:cSld>
@@ -9756,7 +9271,7 @@
 </file>
 
 <file path=ppt/slides/slide4.xml><?xml version="1.0" encoding="utf-8"?>
-<p:sld xmlns:a="http://schemas.openxmlformats.org/drawingml/2006/main" xmlns:a16="http://schemas.microsoft.com/office/drawing/2014/main" xmlns:ns3="http://schemas.microsoft.com/office/powerpoint/2010/main" xmlns:p="http://schemas.openxmlformats.org/presentationml/2006/main">
+<p:sld xmlns:a="http://schemas.openxmlformats.org/drawingml/2006/main" xmlns:r="http://schemas.openxmlformats.org/officeDocument/2006/relationships" xmlns:p="http://schemas.openxmlformats.org/presentationml/2006/main">
   <p:cSld>
     <p:bg>
       <p:bgPr>
@@ -9782,172 +9297,10 @@
       </p:grpSpPr>
       <p:sp>
         <p:nvSpPr>
-          <p:cNvPr id="5" name="Footer Placeholder 3">
-            <a:extLst>
-              <a:ext uri="{FF2B5EF4-FFF2-40B4-BE49-F238E27FC236}">
-                <a16:creationId id="{39D3BA72-1E87-6944-A0DE-BB8978697D5A}"/>
-              </a:ext>
-            </a:extLst>
-          </p:cNvPr>
-          <p:cNvSpPr txBox="1">
-            <a:spLocks/>
-          </p:cNvSpPr>
-          <p:nvPr/>
-        </p:nvSpPr>
-        <p:spPr>
-          <a:xfrm>
-            <a:off x="10924248" y="6388602"/>
-            <a:ext cx="1142262" cy="365125"/>
-          </a:xfrm>
-          <a:prstGeom prst="rect">
-            <a:avLst/>
-          </a:prstGeom>
-        </p:spPr>
-        <p:txBody>
-          <a:bodyPr vert="horz" lIns="91440" tIns="45720" rIns="91440" bIns="45720" rtlCol="0" anchor="ctr"/>
-          <a:lstStyle>
-            <a:defPPr>
-              <a:defRPr lang="en-US"/>
-            </a:defPPr>
-            <a:lvl1pPr marL="0" algn="ctr" defTabSz="914400" rtl="0" eaLnBrk="1" latinLnBrk="0" hangingPunct="1">
-              <a:defRPr sz="1200" kern="1200">
-                <a:solidFill>
-                  <a:schemeClr val="tx1">
-                    <a:tint val="75000"/>
-                  </a:schemeClr>
-                </a:solidFill>
-                <a:latin typeface="+mn-lt"/>
-                <a:ea typeface="+mn-ea"/>
-                <a:cs typeface="+mn-cs"/>
-              </a:defRPr>
-            </a:lvl1pPr>
-            <a:lvl2pPr marL="457200" algn="l" defTabSz="914400" rtl="0" eaLnBrk="1" latinLnBrk="0" hangingPunct="1">
-              <a:defRPr sz="1800" kern="1200">
-                <a:solidFill>
-                  <a:schemeClr val="tx1"/>
-                </a:solidFill>
-                <a:latin typeface="+mn-lt"/>
-                <a:ea typeface="+mn-ea"/>
-                <a:cs typeface="+mn-cs"/>
-              </a:defRPr>
-            </a:lvl2pPr>
-            <a:lvl3pPr marL="914400" algn="l" defTabSz="914400" rtl="0" eaLnBrk="1" latinLnBrk="0" hangingPunct="1">
-              <a:defRPr sz="1800" kern="1200">
-                <a:solidFill>
-                  <a:schemeClr val="tx1"/>
-                </a:solidFill>
-                <a:latin typeface="+mn-lt"/>
-                <a:ea typeface="+mn-ea"/>
-                <a:cs typeface="+mn-cs"/>
-              </a:defRPr>
-            </a:lvl3pPr>
-            <a:lvl4pPr marL="1371600" algn="l" defTabSz="914400" rtl="0" eaLnBrk="1" latinLnBrk="0" hangingPunct="1">
-              <a:defRPr sz="1800" kern="1200">
-                <a:solidFill>
-                  <a:schemeClr val="tx1"/>
-                </a:solidFill>
-                <a:latin typeface="+mn-lt"/>
-                <a:ea typeface="+mn-ea"/>
-                <a:cs typeface="+mn-cs"/>
-              </a:defRPr>
-            </a:lvl4pPr>
-            <a:lvl5pPr marL="1828800" algn="l" defTabSz="914400" rtl="0" eaLnBrk="1" latinLnBrk="0" hangingPunct="1">
-              <a:defRPr sz="1800" kern="1200">
-                <a:solidFill>
-                  <a:schemeClr val="tx1"/>
-                </a:solidFill>
-                <a:latin typeface="+mn-lt"/>
-                <a:ea typeface="+mn-ea"/>
-                <a:cs typeface="+mn-cs"/>
-              </a:defRPr>
-            </a:lvl5pPr>
-            <a:lvl6pPr marL="2286000" algn="l" defTabSz="914400" rtl="0" eaLnBrk="1" latinLnBrk="0" hangingPunct="1">
-              <a:defRPr sz="1800" kern="1200">
-                <a:solidFill>
-                  <a:schemeClr val="tx1"/>
-                </a:solidFill>
-                <a:latin typeface="+mn-lt"/>
-                <a:ea typeface="+mn-ea"/>
-                <a:cs typeface="+mn-cs"/>
-              </a:defRPr>
-            </a:lvl6pPr>
-            <a:lvl7pPr marL="2743200" algn="l" defTabSz="914400" rtl="0" eaLnBrk="1" latinLnBrk="0" hangingPunct="1">
-              <a:defRPr sz="1800" kern="1200">
-                <a:solidFill>
-                  <a:schemeClr val="tx1"/>
-                </a:solidFill>
-                <a:latin typeface="+mn-lt"/>
-                <a:ea typeface="+mn-ea"/>
-                <a:cs typeface="+mn-cs"/>
-              </a:defRPr>
-            </a:lvl7pPr>
-            <a:lvl8pPr marL="3200400" algn="l" defTabSz="914400" rtl="0" eaLnBrk="1" latinLnBrk="0" hangingPunct="1">
-              <a:defRPr sz="1800" kern="1200">
-                <a:solidFill>
-                  <a:schemeClr val="tx1"/>
-                </a:solidFill>
-                <a:latin typeface="+mn-lt"/>
-                <a:ea typeface="+mn-ea"/>
-                <a:cs typeface="+mn-cs"/>
-              </a:defRPr>
-            </a:lvl8pPr>
-            <a:lvl9pPr marL="3657600" algn="l" defTabSz="914400" rtl="0" eaLnBrk="1" latinLnBrk="0" hangingPunct="1">
-              <a:defRPr sz="1800" kern="1200">
-                <a:solidFill>
-                  <a:schemeClr val="tx1"/>
-                </a:solidFill>
-                <a:latin typeface="+mn-lt"/>
-                <a:ea typeface="+mn-ea"/>
-                <a:cs typeface="+mn-cs"/>
-              </a:defRPr>
-            </a:lvl9pPr>
-          </a:lstStyle>
-          <a:p>
-            <a:pPr marL="0" marR="0" lvl="0" indent="0" algn="ctr" defTabSz="914400" rtl="0" eaLnBrk="1" fontAlgn="auto" latinLnBrk="0" hangingPunct="1">
-              <a:lnSpc>
-                <a:spcPct val="100000"/>
-              </a:lnSpc>
-              <a:spcBef>
-                <a:spcPts val="0"/>
-              </a:spcBef>
-              <a:spcAft>
-                <a:spcPts val="0"/>
-              </a:spcAft>
-              <a:buClrTx/>
-              <a:buSzTx/>
-              <a:buFontTx/>
-              <a:buNone/>
-              <a:tabLst/>
-              <a:defRPr/>
-            </a:pPr>
-            <a:r>
-              <a:rPr kumimoji="0" lang="en-US" sz="1200" b="0" i="0" u="none" strike="noStrike" kern="1200" cap="none" spc="0" normalizeH="0" baseline="0" noProof="0" dirty="0">
-                <a:ln>
-                  <a:noFill/>
-                </a:ln>
-                <a:solidFill>
-                  <a:prstClr val="black">
-                    <a:tint val="75000"/>
-                  </a:prstClr>
-                </a:solidFill>
-                <a:effectLst/>
-                <a:uLnTx/>
-                <a:uFillTx/>
-                <a:latin typeface="Helvetica Neue" panose="02000503000000020004" pitchFamily="2" charset="0"/>
-                <a:ea typeface="Helvetica Neue" panose="02000503000000020004" pitchFamily="2" charset="0"/>
-                <a:cs typeface="Helvetica Neue" panose="02000503000000020004" pitchFamily="2" charset="0"/>
-              </a:rPr>
-              <a:t>J Mark Morris</a:t>
-            </a:r>
-          </a:p>
-        </p:txBody>
-      </p:sp>
-      <p:sp>
-        <p:nvSpPr>
           <p:cNvPr id="3" name="TextBox 2">
             <a:extLst>
               <a:ext uri="{FF2B5EF4-FFF2-40B4-BE49-F238E27FC236}">
-                <a16:creationId id="{96DF0645-8B53-9FBF-CA5E-9D115D31C225}"/>
+                <a16:creationId xmlns:a16="http://schemas.microsoft.com/office/drawing/2014/main" id="{96DF0645-8B53-9FBF-CA5E-9D115D31C225}"/>
               </a:ext>
             </a:extLst>
           </p:cNvPr>
@@ -10387,7 +9740,7 @@
     </p:spTree>
     <p:extLst>
       <p:ext uri="{BB962C8B-B14F-4D97-AF65-F5344CB8AC3E}">
-        <ns3:creationId val="4031215449"/>
+        <p14:creationId xmlns:p14="http://schemas.microsoft.com/office/powerpoint/2010/main" val="4031215449"/>
       </p:ext>
     </p:extLst>
   </p:cSld>
@@ -10398,7 +9751,7 @@
 </file>
 
 <file path=ppt/slides/slide5.xml><?xml version="1.0" encoding="utf-8"?>
-<p:sld xmlns:a="http://schemas.openxmlformats.org/drawingml/2006/main" xmlns:a16="http://schemas.microsoft.com/office/drawing/2014/main" xmlns:ns3="http://schemas.microsoft.com/office/powerpoint/2010/main" xmlns:p="http://schemas.openxmlformats.org/presentationml/2006/main">
+<p:sld xmlns:a="http://schemas.openxmlformats.org/drawingml/2006/main" xmlns:r="http://schemas.openxmlformats.org/officeDocument/2006/relationships" xmlns:p="http://schemas.openxmlformats.org/presentationml/2006/main">
   <p:cSld>
     <p:bg>
       <p:bgPr>
@@ -10424,172 +9777,10 @@
       </p:grpSpPr>
       <p:sp>
         <p:nvSpPr>
-          <p:cNvPr id="5" name="Footer Placeholder 3">
-            <a:extLst>
-              <a:ext uri="{FF2B5EF4-FFF2-40B4-BE49-F238E27FC236}">
-                <a16:creationId id="{39D3BA72-1E87-6944-A0DE-BB8978697D5A}"/>
-              </a:ext>
-            </a:extLst>
-          </p:cNvPr>
-          <p:cNvSpPr txBox="1">
-            <a:spLocks/>
-          </p:cNvSpPr>
-          <p:nvPr/>
-        </p:nvSpPr>
-        <p:spPr>
-          <a:xfrm>
-            <a:off x="10924248" y="6388602"/>
-            <a:ext cx="1142262" cy="365125"/>
-          </a:xfrm>
-          <a:prstGeom prst="rect">
-            <a:avLst/>
-          </a:prstGeom>
-        </p:spPr>
-        <p:txBody>
-          <a:bodyPr vert="horz" lIns="91440" tIns="45720" rIns="91440" bIns="45720" rtlCol="0" anchor="ctr"/>
-          <a:lstStyle>
-            <a:defPPr>
-              <a:defRPr lang="en-US"/>
-            </a:defPPr>
-            <a:lvl1pPr marL="0" algn="ctr" defTabSz="914400" rtl="0" eaLnBrk="1" latinLnBrk="0" hangingPunct="1">
-              <a:defRPr sz="1200" kern="1200">
-                <a:solidFill>
-                  <a:schemeClr val="tx1">
-                    <a:tint val="75000"/>
-                  </a:schemeClr>
-                </a:solidFill>
-                <a:latin typeface="+mn-lt"/>
-                <a:ea typeface="+mn-ea"/>
-                <a:cs typeface="+mn-cs"/>
-              </a:defRPr>
-            </a:lvl1pPr>
-            <a:lvl2pPr marL="457200" algn="l" defTabSz="914400" rtl="0" eaLnBrk="1" latinLnBrk="0" hangingPunct="1">
-              <a:defRPr sz="1800" kern="1200">
-                <a:solidFill>
-                  <a:schemeClr val="tx1"/>
-                </a:solidFill>
-                <a:latin typeface="+mn-lt"/>
-                <a:ea typeface="+mn-ea"/>
-                <a:cs typeface="+mn-cs"/>
-              </a:defRPr>
-            </a:lvl2pPr>
-            <a:lvl3pPr marL="914400" algn="l" defTabSz="914400" rtl="0" eaLnBrk="1" latinLnBrk="0" hangingPunct="1">
-              <a:defRPr sz="1800" kern="1200">
-                <a:solidFill>
-                  <a:schemeClr val="tx1"/>
-                </a:solidFill>
-                <a:latin typeface="+mn-lt"/>
-                <a:ea typeface="+mn-ea"/>
-                <a:cs typeface="+mn-cs"/>
-              </a:defRPr>
-            </a:lvl3pPr>
-            <a:lvl4pPr marL="1371600" algn="l" defTabSz="914400" rtl="0" eaLnBrk="1" latinLnBrk="0" hangingPunct="1">
-              <a:defRPr sz="1800" kern="1200">
-                <a:solidFill>
-                  <a:schemeClr val="tx1"/>
-                </a:solidFill>
-                <a:latin typeface="+mn-lt"/>
-                <a:ea typeface="+mn-ea"/>
-                <a:cs typeface="+mn-cs"/>
-              </a:defRPr>
-            </a:lvl4pPr>
-            <a:lvl5pPr marL="1828800" algn="l" defTabSz="914400" rtl="0" eaLnBrk="1" latinLnBrk="0" hangingPunct="1">
-              <a:defRPr sz="1800" kern="1200">
-                <a:solidFill>
-                  <a:schemeClr val="tx1"/>
-                </a:solidFill>
-                <a:latin typeface="+mn-lt"/>
-                <a:ea typeface="+mn-ea"/>
-                <a:cs typeface="+mn-cs"/>
-              </a:defRPr>
-            </a:lvl5pPr>
-            <a:lvl6pPr marL="2286000" algn="l" defTabSz="914400" rtl="0" eaLnBrk="1" latinLnBrk="0" hangingPunct="1">
-              <a:defRPr sz="1800" kern="1200">
-                <a:solidFill>
-                  <a:schemeClr val="tx1"/>
-                </a:solidFill>
-                <a:latin typeface="+mn-lt"/>
-                <a:ea typeface="+mn-ea"/>
-                <a:cs typeface="+mn-cs"/>
-              </a:defRPr>
-            </a:lvl6pPr>
-            <a:lvl7pPr marL="2743200" algn="l" defTabSz="914400" rtl="0" eaLnBrk="1" latinLnBrk="0" hangingPunct="1">
-              <a:defRPr sz="1800" kern="1200">
-                <a:solidFill>
-                  <a:schemeClr val="tx1"/>
-                </a:solidFill>
-                <a:latin typeface="+mn-lt"/>
-                <a:ea typeface="+mn-ea"/>
-                <a:cs typeface="+mn-cs"/>
-              </a:defRPr>
-            </a:lvl7pPr>
-            <a:lvl8pPr marL="3200400" algn="l" defTabSz="914400" rtl="0" eaLnBrk="1" latinLnBrk="0" hangingPunct="1">
-              <a:defRPr sz="1800" kern="1200">
-                <a:solidFill>
-                  <a:schemeClr val="tx1"/>
-                </a:solidFill>
-                <a:latin typeface="+mn-lt"/>
-                <a:ea typeface="+mn-ea"/>
-                <a:cs typeface="+mn-cs"/>
-              </a:defRPr>
-            </a:lvl8pPr>
-            <a:lvl9pPr marL="3657600" algn="l" defTabSz="914400" rtl="0" eaLnBrk="1" latinLnBrk="0" hangingPunct="1">
-              <a:defRPr sz="1800" kern="1200">
-                <a:solidFill>
-                  <a:schemeClr val="tx1"/>
-                </a:solidFill>
-                <a:latin typeface="+mn-lt"/>
-                <a:ea typeface="+mn-ea"/>
-                <a:cs typeface="+mn-cs"/>
-              </a:defRPr>
-            </a:lvl9pPr>
-          </a:lstStyle>
-          <a:p>
-            <a:pPr marL="0" marR="0" lvl="0" indent="0" algn="ctr" defTabSz="914400" rtl="0" eaLnBrk="1" fontAlgn="auto" latinLnBrk="0" hangingPunct="1">
-              <a:lnSpc>
-                <a:spcPct val="100000"/>
-              </a:lnSpc>
-              <a:spcBef>
-                <a:spcPts val="0"/>
-              </a:spcBef>
-              <a:spcAft>
-                <a:spcPts val="0"/>
-              </a:spcAft>
-              <a:buClrTx/>
-              <a:buSzTx/>
-              <a:buFontTx/>
-              <a:buNone/>
-              <a:tabLst/>
-              <a:defRPr/>
-            </a:pPr>
-            <a:r>
-              <a:rPr kumimoji="0" lang="en-US" sz="1200" b="0" i="0" u="none" strike="noStrike" kern="1200" cap="none" spc="0" normalizeH="0" baseline="0" noProof="0" dirty="0">
-                <a:ln>
-                  <a:noFill/>
-                </a:ln>
-                <a:solidFill>
-                  <a:prstClr val="black">
-                    <a:tint val="75000"/>
-                  </a:prstClr>
-                </a:solidFill>
-                <a:effectLst/>
-                <a:uLnTx/>
-                <a:uFillTx/>
-                <a:latin typeface="Helvetica Neue" panose="02000503000000020004" pitchFamily="2" charset="0"/>
-                <a:ea typeface="Helvetica Neue" panose="02000503000000020004" pitchFamily="2" charset="0"/>
-                <a:cs typeface="Helvetica Neue" panose="02000503000000020004" pitchFamily="2" charset="0"/>
-              </a:rPr>
-              <a:t>J Mark Morris</a:t>
-            </a:r>
-          </a:p>
-        </p:txBody>
-      </p:sp>
-      <p:sp>
-        <p:nvSpPr>
           <p:cNvPr id="3" name="TextBox 2">
             <a:extLst>
               <a:ext uri="{FF2B5EF4-FFF2-40B4-BE49-F238E27FC236}">
-                <a16:creationId id="{96DF0645-8B53-9FBF-CA5E-9D115D31C225}"/>
+                <a16:creationId xmlns:a16="http://schemas.microsoft.com/office/drawing/2014/main" id="{96DF0645-8B53-9FBF-CA5E-9D115D31C225}"/>
               </a:ext>
             </a:extLst>
           </p:cNvPr>
@@ -10646,7 +9837,7 @@
                 <a:ea typeface="Helvetica Neue" panose="02000503000000020004" pitchFamily="2" charset="0"/>
                 <a:cs typeface="Helvetica Neue" panose="02000503000000020004" pitchFamily="2" charset="0"/>
               </a:rPr>
-              <a:t>Architrino Sphere Streams </a:t>
+              <a:t>Causal Wake Streams </a:t>
             </a:r>
             <a:r>
               <a:rPr kumimoji="0" lang="en-US" sz="5400" b="1" i="0" u="none" strike="noStrike" kern="1200" cap="none" spc="0" normalizeH="0" baseline="0" noProof="0" dirty="0">
@@ -10747,7 +9938,7 @@
                 <a:ea typeface="Helvetica Neue" panose="02000503000000020004" pitchFamily="2" charset="0"/>
                 <a:cs typeface="Helvetica Neue" panose="02000503000000020004" pitchFamily="2" charset="0"/>
               </a:rPr>
-              <a:t>The intersection of sphere streams with architrinos is where the action is.</a:t>
+              <a:t>The intersections of causal wake streams with architrinos are where the action happens.</a:t>
             </a:r>
           </a:p>
         </p:txBody>
@@ -10911,7 +10102,7 @@
     </p:spTree>
     <p:extLst>
       <p:ext uri="{BB962C8B-B14F-4D97-AF65-F5344CB8AC3E}">
-        <ns3:creationId val="895472186"/>
+        <p14:creationId xmlns:p14="http://schemas.microsoft.com/office/powerpoint/2010/main" val="895472186"/>
       </p:ext>
     </p:extLst>
   </p:cSld>
@@ -10922,7 +10113,7 @@
 </file>
 
 <file path=ppt/slides/slide6.xml><?xml version="1.0" encoding="utf-8"?>
-<p:sld xmlns:a="http://schemas.openxmlformats.org/drawingml/2006/main" xmlns:a16="http://schemas.microsoft.com/office/drawing/2014/main" xmlns:ns3="http://schemas.microsoft.com/office/powerpoint/2010/main" xmlns:p="http://schemas.openxmlformats.org/presentationml/2006/main">
+<p:sld xmlns:a="http://schemas.openxmlformats.org/drawingml/2006/main" xmlns:r="http://schemas.openxmlformats.org/officeDocument/2006/relationships" xmlns:p="http://schemas.openxmlformats.org/presentationml/2006/main">
   <p:cSld>
     <p:bg>
       <p:bgPr>
@@ -10937,7 +10128,7 @@
         <p:cNvPr id="1" name="">
           <a:extLst>
             <a:ext uri="{FF2B5EF4-FFF2-40B4-BE49-F238E27FC236}">
-              <a16:creationId id="{67C65214-D702-75CD-A867-A5A8C3A0B26F}"/>
+              <a16:creationId xmlns:a16="http://schemas.microsoft.com/office/drawing/2014/main" id="{67C65214-D702-75CD-A867-A5A8C3A0B26F}"/>
             </a:ext>
           </a:extLst>
         </p:cNvPr>
@@ -10954,172 +10145,10 @@
       </p:grpSpPr>
       <p:sp>
         <p:nvSpPr>
-          <p:cNvPr id="5" name="Footer Placeholder 3">
-            <a:extLst>
-              <a:ext uri="{FF2B5EF4-FFF2-40B4-BE49-F238E27FC236}">
-                <a16:creationId id="{B0F877B9-FC4A-6906-225E-A59E28334793}"/>
-              </a:ext>
-            </a:extLst>
-          </p:cNvPr>
-          <p:cNvSpPr txBox="1">
-            <a:spLocks/>
-          </p:cNvSpPr>
-          <p:nvPr/>
-        </p:nvSpPr>
-        <p:spPr>
-          <a:xfrm>
-            <a:off x="10924248" y="6388602"/>
-            <a:ext cx="1142262" cy="365125"/>
-          </a:xfrm>
-          <a:prstGeom prst="rect">
-            <a:avLst/>
-          </a:prstGeom>
-        </p:spPr>
-        <p:txBody>
-          <a:bodyPr vert="horz" lIns="91440" tIns="45720" rIns="91440" bIns="45720" rtlCol="0" anchor="ctr"/>
-          <a:lstStyle>
-            <a:defPPr>
-              <a:defRPr lang="en-US"/>
-            </a:defPPr>
-            <a:lvl1pPr marL="0" algn="ctr" defTabSz="914400" rtl="0" eaLnBrk="1" latinLnBrk="0" hangingPunct="1">
-              <a:defRPr sz="1200" kern="1200">
-                <a:solidFill>
-                  <a:schemeClr val="tx1">
-                    <a:tint val="75000"/>
-                  </a:schemeClr>
-                </a:solidFill>
-                <a:latin typeface="+mn-lt"/>
-                <a:ea typeface="+mn-ea"/>
-                <a:cs typeface="+mn-cs"/>
-              </a:defRPr>
-            </a:lvl1pPr>
-            <a:lvl2pPr marL="457200" algn="l" defTabSz="914400" rtl="0" eaLnBrk="1" latinLnBrk="0" hangingPunct="1">
-              <a:defRPr sz="1800" kern="1200">
-                <a:solidFill>
-                  <a:schemeClr val="tx1"/>
-                </a:solidFill>
-                <a:latin typeface="+mn-lt"/>
-                <a:ea typeface="+mn-ea"/>
-                <a:cs typeface="+mn-cs"/>
-              </a:defRPr>
-            </a:lvl2pPr>
-            <a:lvl3pPr marL="914400" algn="l" defTabSz="914400" rtl="0" eaLnBrk="1" latinLnBrk="0" hangingPunct="1">
-              <a:defRPr sz="1800" kern="1200">
-                <a:solidFill>
-                  <a:schemeClr val="tx1"/>
-                </a:solidFill>
-                <a:latin typeface="+mn-lt"/>
-                <a:ea typeface="+mn-ea"/>
-                <a:cs typeface="+mn-cs"/>
-              </a:defRPr>
-            </a:lvl3pPr>
-            <a:lvl4pPr marL="1371600" algn="l" defTabSz="914400" rtl="0" eaLnBrk="1" latinLnBrk="0" hangingPunct="1">
-              <a:defRPr sz="1800" kern="1200">
-                <a:solidFill>
-                  <a:schemeClr val="tx1"/>
-                </a:solidFill>
-                <a:latin typeface="+mn-lt"/>
-                <a:ea typeface="+mn-ea"/>
-                <a:cs typeface="+mn-cs"/>
-              </a:defRPr>
-            </a:lvl4pPr>
-            <a:lvl5pPr marL="1828800" algn="l" defTabSz="914400" rtl="0" eaLnBrk="1" latinLnBrk="0" hangingPunct="1">
-              <a:defRPr sz="1800" kern="1200">
-                <a:solidFill>
-                  <a:schemeClr val="tx1"/>
-                </a:solidFill>
-                <a:latin typeface="+mn-lt"/>
-                <a:ea typeface="+mn-ea"/>
-                <a:cs typeface="+mn-cs"/>
-              </a:defRPr>
-            </a:lvl5pPr>
-            <a:lvl6pPr marL="2286000" algn="l" defTabSz="914400" rtl="0" eaLnBrk="1" latinLnBrk="0" hangingPunct="1">
-              <a:defRPr sz="1800" kern="1200">
-                <a:solidFill>
-                  <a:schemeClr val="tx1"/>
-                </a:solidFill>
-                <a:latin typeface="+mn-lt"/>
-                <a:ea typeface="+mn-ea"/>
-                <a:cs typeface="+mn-cs"/>
-              </a:defRPr>
-            </a:lvl6pPr>
-            <a:lvl7pPr marL="2743200" algn="l" defTabSz="914400" rtl="0" eaLnBrk="1" latinLnBrk="0" hangingPunct="1">
-              <a:defRPr sz="1800" kern="1200">
-                <a:solidFill>
-                  <a:schemeClr val="tx1"/>
-                </a:solidFill>
-                <a:latin typeface="+mn-lt"/>
-                <a:ea typeface="+mn-ea"/>
-                <a:cs typeface="+mn-cs"/>
-              </a:defRPr>
-            </a:lvl7pPr>
-            <a:lvl8pPr marL="3200400" algn="l" defTabSz="914400" rtl="0" eaLnBrk="1" latinLnBrk="0" hangingPunct="1">
-              <a:defRPr sz="1800" kern="1200">
-                <a:solidFill>
-                  <a:schemeClr val="tx1"/>
-                </a:solidFill>
-                <a:latin typeface="+mn-lt"/>
-                <a:ea typeface="+mn-ea"/>
-                <a:cs typeface="+mn-cs"/>
-              </a:defRPr>
-            </a:lvl8pPr>
-            <a:lvl9pPr marL="3657600" algn="l" defTabSz="914400" rtl="0" eaLnBrk="1" latinLnBrk="0" hangingPunct="1">
-              <a:defRPr sz="1800" kern="1200">
-                <a:solidFill>
-                  <a:schemeClr val="tx1"/>
-                </a:solidFill>
-                <a:latin typeface="+mn-lt"/>
-                <a:ea typeface="+mn-ea"/>
-                <a:cs typeface="+mn-cs"/>
-              </a:defRPr>
-            </a:lvl9pPr>
-          </a:lstStyle>
-          <a:p>
-            <a:pPr marL="0" marR="0" lvl="0" indent="0" algn="ctr" defTabSz="914400" rtl="0" eaLnBrk="1" fontAlgn="auto" latinLnBrk="0" hangingPunct="1">
-              <a:lnSpc>
-                <a:spcPct val="100000"/>
-              </a:lnSpc>
-              <a:spcBef>
-                <a:spcPts val="0"/>
-              </a:spcBef>
-              <a:spcAft>
-                <a:spcPts val="0"/>
-              </a:spcAft>
-              <a:buClrTx/>
-              <a:buSzTx/>
-              <a:buFontTx/>
-              <a:buNone/>
-              <a:tabLst/>
-              <a:defRPr/>
-            </a:pPr>
-            <a:r>
-              <a:rPr kumimoji="0" lang="en-US" sz="1200" b="0" i="0" u="none" strike="noStrike" kern="1200" cap="none" spc="0" normalizeH="0" baseline="0" noProof="0" dirty="0">
-                <a:ln>
-                  <a:noFill/>
-                </a:ln>
-                <a:solidFill>
-                  <a:prstClr val="black">
-                    <a:tint val="75000"/>
-                  </a:prstClr>
-                </a:solidFill>
-                <a:effectLst/>
-                <a:uLnTx/>
-                <a:uFillTx/>
-                <a:latin typeface="Helvetica Neue" panose="02000503000000020004" pitchFamily="2" charset="0"/>
-                <a:ea typeface="Helvetica Neue" panose="02000503000000020004" pitchFamily="2" charset="0"/>
-                <a:cs typeface="Helvetica Neue" panose="02000503000000020004" pitchFamily="2" charset="0"/>
-              </a:rPr>
-              <a:t>J Mark Morris</a:t>
-            </a:r>
-          </a:p>
-        </p:txBody>
-      </p:sp>
-      <p:sp>
-        <p:nvSpPr>
           <p:cNvPr id="3" name="TextBox 2">
             <a:extLst>
               <a:ext uri="{FF2B5EF4-FFF2-40B4-BE49-F238E27FC236}">
-                <a16:creationId id="{853A6030-A110-4128-6225-20F0FD3C147E}"/>
+                <a16:creationId xmlns:a16="http://schemas.microsoft.com/office/drawing/2014/main" id="{853A6030-A110-4128-6225-20F0FD3C147E}"/>
               </a:ext>
             </a:extLst>
           </p:cNvPr>
@@ -11129,7 +10158,7 @@
         <p:spPr>
           <a:xfrm>
             <a:off x="739897" y="483220"/>
-            <a:ext cx="10868097" cy="5509200"/>
+            <a:ext cx="10868097" cy="5078313"/>
           </a:xfrm>
           <a:prstGeom prst="rect">
             <a:avLst/>
@@ -11195,7 +10224,7 @@
               <a:tabLst/>
               <a:defRPr/>
             </a:pPr>
-            <a:endParaRPr lang="en-US" b="1" i="1" dirty="0">
+            <a:endParaRPr lang="en-US" sz="5400" b="1" i="1" dirty="0">
               <a:solidFill>
                 <a:srgbClr val="FFC000"/>
               </a:solidFill>
@@ -11223,7 +10252,7 @@
               <a:defRPr/>
             </a:pPr>
             <a:r>
-              <a:rPr lang="en-US" sz="4000" dirty="0">
+              <a:rPr lang="en-US" sz="5400" b="1" dirty="0">
                 <a:solidFill>
                   <a:schemeClr val="bg1"/>
                 </a:solidFill>
@@ -11231,101 +10260,9 @@
                 <a:ea typeface="Helvetica Neue" panose="02000503000000020004" pitchFamily="2" charset="0"/>
                 <a:cs typeface="Helvetica Neue" panose="02000503000000020004" pitchFamily="2" charset="0"/>
               </a:rPr>
-              <a:t>Action is determined by the</a:t>
+              <a:t>At the present time (t = now), each architrino responds to causal wakes arriving from the past paths of all architrinos.</a:t>
             </a:r>
-          </a:p>
-          <a:p>
-            <a:pPr marL="0" marR="0" lvl="0" indent="0" algn="ctr" defTabSz="914400" rtl="0" eaLnBrk="1" fontAlgn="auto" latinLnBrk="0" hangingPunct="1">
-              <a:lnSpc>
-                <a:spcPct val="100000"/>
-              </a:lnSpc>
-              <a:spcBef>
-                <a:spcPts val="0"/>
-              </a:spcBef>
-              <a:spcAft>
-                <a:spcPts val="0"/>
-              </a:spcAft>
-              <a:buClrTx/>
-              <a:buSzTx/>
-              <a:buFontTx/>
-              <a:buNone/>
-              <a:tabLst/>
-              <a:defRPr/>
-            </a:pPr>
-            <a:r>
-              <a:rPr lang="en-US" sz="4000" dirty="0">
-                <a:solidFill>
-                  <a:schemeClr val="bg1"/>
-                </a:solidFill>
-                <a:latin typeface="Helvetica Neue" panose="02000503000000020004" pitchFamily="2" charset="0"/>
-                <a:ea typeface="Helvetica Neue" panose="02000503000000020004" pitchFamily="2" charset="0"/>
-                <a:cs typeface="Helvetica Neue" panose="02000503000000020004" pitchFamily="2" charset="0"/>
-              </a:rPr>
-              <a:t>path history of all architrinos, </a:t>
-            </a:r>
-          </a:p>
-          <a:p>
-            <a:pPr marL="0" marR="0" lvl="0" indent="0" algn="ctr" defTabSz="914400" rtl="0" eaLnBrk="1" fontAlgn="auto" latinLnBrk="0" hangingPunct="1">
-              <a:lnSpc>
-                <a:spcPct val="100000"/>
-              </a:lnSpc>
-              <a:spcBef>
-                <a:spcPts val="0"/>
-              </a:spcBef>
-              <a:spcAft>
-                <a:spcPts val="0"/>
-              </a:spcAft>
-              <a:buClrTx/>
-              <a:buSzTx/>
-              <a:buFontTx/>
-              <a:buNone/>
-              <a:tabLst/>
-              <a:defRPr/>
-            </a:pPr>
-            <a:r>
-              <a:rPr lang="en-US" sz="4000" dirty="0">
-                <a:solidFill>
-                  <a:schemeClr val="bg1"/>
-                </a:solidFill>
-                <a:latin typeface="Helvetica Neue" panose="02000503000000020004" pitchFamily="2" charset="0"/>
-                <a:ea typeface="Helvetica Neue" panose="02000503000000020004" pitchFamily="2" charset="0"/>
-                <a:cs typeface="Helvetica Neue" panose="02000503000000020004" pitchFamily="2" charset="0"/>
-              </a:rPr>
-              <a:t>and their emitted causal wake streams intersecting each architrino at time t = </a:t>
-            </a:r>
-            <a:r>
-              <a:rPr lang="en-US" sz="4000" dirty="0" err="1">
-                <a:solidFill>
-                  <a:schemeClr val="bg1"/>
-                </a:solidFill>
-                <a:latin typeface="Helvetica Neue" panose="02000503000000020004" pitchFamily="2" charset="0"/>
-                <a:ea typeface="Helvetica Neue" panose="02000503000000020004" pitchFamily="2" charset="0"/>
-                <a:cs typeface="Helvetica Neue" panose="02000503000000020004" pitchFamily="2" charset="0"/>
-              </a:rPr>
-              <a:t>t</a:t>
-            </a:r>
-            <a:r>
-              <a:rPr lang="en-US" sz="4000" baseline="-25000" dirty="0" err="1">
-                <a:solidFill>
-                  <a:schemeClr val="bg1"/>
-                </a:solidFill>
-                <a:latin typeface="Helvetica Neue" panose="02000503000000020004" pitchFamily="2" charset="0"/>
-                <a:ea typeface="Helvetica Neue" panose="02000503000000020004" pitchFamily="2" charset="0"/>
-                <a:cs typeface="Helvetica Neue" panose="02000503000000020004" pitchFamily="2" charset="0"/>
-              </a:rPr>
-              <a:t>now</a:t>
-            </a:r>
-            <a:br>
-              <a:rPr lang="en-US" sz="4000" i="1" dirty="0">
-                <a:solidFill>
-                  <a:schemeClr val="bg1"/>
-                </a:solidFill>
-                <a:latin typeface="Helvetica Neue" panose="02000503000000020004" pitchFamily="2" charset="0"/>
-                <a:ea typeface="Helvetica Neue" panose="02000503000000020004" pitchFamily="2" charset="0"/>
-                <a:cs typeface="Helvetica Neue" panose="02000503000000020004" pitchFamily="2" charset="0"/>
-              </a:rPr>
-            </a:br>
-            <a:endParaRPr lang="en-US" sz="4000" b="1" i="1" dirty="0">
+            <a:endParaRPr lang="en-US" sz="5400" b="1" i="1" dirty="0">
               <a:solidFill>
                 <a:schemeClr val="bg1"/>
               </a:solidFill>
@@ -11333,66 +10270,6 @@
               <a:ea typeface="Helvetica Neue" panose="02000503000000020004" pitchFamily="2" charset="0"/>
               <a:cs typeface="Helvetica Neue" panose="02000503000000020004" pitchFamily="2" charset="0"/>
             </a:endParaRPr>
-          </a:p>
-          <a:p>
-            <a:pPr marL="0" marR="0" lvl="0" indent="0" algn="ctr" defTabSz="914400" rtl="0" eaLnBrk="1" fontAlgn="auto" latinLnBrk="0" hangingPunct="1">
-              <a:lnSpc>
-                <a:spcPct val="100000"/>
-              </a:lnSpc>
-              <a:spcBef>
-                <a:spcPts val="0"/>
-              </a:spcBef>
-              <a:spcAft>
-                <a:spcPts val="0"/>
-              </a:spcAft>
-              <a:buClrTx/>
-              <a:buSzTx/>
-              <a:buFontTx/>
-              <a:buNone/>
-              <a:tabLst/>
-              <a:defRPr/>
-            </a:pPr>
-            <a:r>
-              <a:rPr lang="en-US" sz="4000" b="1" i="1" dirty="0">
-                <a:solidFill>
-                  <a:srgbClr val="FFC000"/>
-                </a:solidFill>
-                <a:latin typeface="Helvetica Neue" panose="02000503000000020004" pitchFamily="2" charset="0"/>
-                <a:ea typeface="Helvetica Neue" panose="02000503000000020004" pitchFamily="2" charset="0"/>
-                <a:cs typeface="Helvetica Neue" panose="02000503000000020004" pitchFamily="2" charset="0"/>
-              </a:rPr>
-              <a:t>Potential at all other points </a:t>
-            </a:r>
-          </a:p>
-          <a:p>
-            <a:pPr marL="0" marR="0" lvl="0" indent="0" algn="ctr" defTabSz="914400" rtl="0" eaLnBrk="1" fontAlgn="auto" latinLnBrk="0" hangingPunct="1">
-              <a:lnSpc>
-                <a:spcPct val="100000"/>
-              </a:lnSpc>
-              <a:spcBef>
-                <a:spcPts val="0"/>
-              </a:spcBef>
-              <a:spcAft>
-                <a:spcPts val="0"/>
-              </a:spcAft>
-              <a:buClrTx/>
-              <a:buSzTx/>
-              <a:buFontTx/>
-              <a:buNone/>
-              <a:tabLst/>
-              <a:defRPr/>
-            </a:pPr>
-            <a:r>
-              <a:rPr lang="en-US" sz="4000" b="1" i="1" dirty="0">
-                <a:solidFill>
-                  <a:srgbClr val="FFC000"/>
-                </a:solidFill>
-                <a:latin typeface="Helvetica Neue" panose="02000503000000020004" pitchFamily="2" charset="0"/>
-                <a:ea typeface="Helvetica Neue" panose="02000503000000020004" pitchFamily="2" charset="0"/>
-                <a:cs typeface="Helvetica Neue" panose="02000503000000020004" pitchFamily="2" charset="0"/>
-              </a:rPr>
-              <a:t>in time and space is irrelevant.</a:t>
-            </a:r>
           </a:p>
         </p:txBody>
       </p:sp>
@@ -11555,7 +10432,7 @@
     </p:spTree>
     <p:extLst>
       <p:ext uri="{BB962C8B-B14F-4D97-AF65-F5344CB8AC3E}">
-        <ns3:creationId val="1431186611"/>
+        <p14:creationId xmlns:p14="http://schemas.microsoft.com/office/powerpoint/2010/main" val="1431186611"/>
       </p:ext>
     </p:extLst>
   </p:cSld>
@@ -11566,7 +10443,7 @@
 </file>
 
 <file path=ppt/slides/slide7.xml><?xml version="1.0" encoding="utf-8"?>
-<p:sld xmlns:a="http://schemas.openxmlformats.org/drawingml/2006/main" xmlns:a16="http://schemas.microsoft.com/office/drawing/2014/main" xmlns:ns3="http://schemas.microsoft.com/office/powerpoint/2010/main" xmlns:p="http://schemas.openxmlformats.org/presentationml/2006/main">
+<p:sld xmlns:a="http://schemas.openxmlformats.org/drawingml/2006/main" xmlns:r="http://schemas.openxmlformats.org/officeDocument/2006/relationships" xmlns:p="http://schemas.openxmlformats.org/presentationml/2006/main">
   <p:cSld>
     <p:bg>
       <p:bgPr>
@@ -11592,237 +10469,10 @@
       </p:grpSpPr>
       <p:sp>
         <p:nvSpPr>
-          <p:cNvPr id="5" name="Footer Placeholder 3">
-            <a:extLst>
-              <a:ext uri="{FF2B5EF4-FFF2-40B4-BE49-F238E27FC236}">
-                <a16:creationId id="{668F77D6-DFDA-5A46-8DF1-47F6A167C2B1}"/>
-              </a:ext>
-            </a:extLst>
-          </p:cNvPr>
-          <p:cNvSpPr txBox="1">
-            <a:spLocks/>
-          </p:cNvSpPr>
-          <p:nvPr/>
-        </p:nvSpPr>
-        <p:spPr>
-          <a:xfrm>
-            <a:off x="10924248" y="6388602"/>
-            <a:ext cx="1142262" cy="365125"/>
-          </a:xfrm>
-          <a:prstGeom prst="rect">
-            <a:avLst/>
-          </a:prstGeom>
-        </p:spPr>
-        <p:txBody>
-          <a:bodyPr vert="horz" lIns="91440" tIns="45720" rIns="91440" bIns="45720" rtlCol="0" anchor="ctr"/>
-          <a:lstStyle>
-            <a:defPPr>
-              <a:defRPr lang="en-US"/>
-            </a:defPPr>
-            <a:lvl1pPr marL="0" algn="ctr" defTabSz="914400" rtl="0" eaLnBrk="1" latinLnBrk="0" hangingPunct="1">
-              <a:defRPr sz="1200" kern="1200">
-                <a:solidFill>
-                  <a:schemeClr val="tx1">
-                    <a:tint val="75000"/>
-                  </a:schemeClr>
-                </a:solidFill>
-                <a:latin typeface="+mn-lt"/>
-                <a:ea typeface="+mn-ea"/>
-                <a:cs typeface="+mn-cs"/>
-              </a:defRPr>
-            </a:lvl1pPr>
-            <a:lvl2pPr marL="457200" algn="l" defTabSz="914400" rtl="0" eaLnBrk="1" latinLnBrk="0" hangingPunct="1">
-              <a:defRPr sz="1800" kern="1200">
-                <a:solidFill>
-                  <a:schemeClr val="tx1"/>
-                </a:solidFill>
-                <a:latin typeface="+mn-lt"/>
-                <a:ea typeface="+mn-ea"/>
-                <a:cs typeface="+mn-cs"/>
-              </a:defRPr>
-            </a:lvl2pPr>
-            <a:lvl3pPr marL="914400" algn="l" defTabSz="914400" rtl="0" eaLnBrk="1" latinLnBrk="0" hangingPunct="1">
-              <a:defRPr sz="1800" kern="1200">
-                <a:solidFill>
-                  <a:schemeClr val="tx1"/>
-                </a:solidFill>
-                <a:latin typeface="+mn-lt"/>
-                <a:ea typeface="+mn-ea"/>
-                <a:cs typeface="+mn-cs"/>
-              </a:defRPr>
-            </a:lvl3pPr>
-            <a:lvl4pPr marL="1371600" algn="l" defTabSz="914400" rtl="0" eaLnBrk="1" latinLnBrk="0" hangingPunct="1">
-              <a:defRPr sz="1800" kern="1200">
-                <a:solidFill>
-                  <a:schemeClr val="tx1"/>
-                </a:solidFill>
-                <a:latin typeface="+mn-lt"/>
-                <a:ea typeface="+mn-ea"/>
-                <a:cs typeface="+mn-cs"/>
-              </a:defRPr>
-            </a:lvl4pPr>
-            <a:lvl5pPr marL="1828800" algn="l" defTabSz="914400" rtl="0" eaLnBrk="1" latinLnBrk="0" hangingPunct="1">
-              <a:defRPr sz="1800" kern="1200">
-                <a:solidFill>
-                  <a:schemeClr val="tx1"/>
-                </a:solidFill>
-                <a:latin typeface="+mn-lt"/>
-                <a:ea typeface="+mn-ea"/>
-                <a:cs typeface="+mn-cs"/>
-              </a:defRPr>
-            </a:lvl5pPr>
-            <a:lvl6pPr marL="2286000" algn="l" defTabSz="914400" rtl="0" eaLnBrk="1" latinLnBrk="0" hangingPunct="1">
-              <a:defRPr sz="1800" kern="1200">
-                <a:solidFill>
-                  <a:schemeClr val="tx1"/>
-                </a:solidFill>
-                <a:latin typeface="+mn-lt"/>
-                <a:ea typeface="+mn-ea"/>
-                <a:cs typeface="+mn-cs"/>
-              </a:defRPr>
-            </a:lvl6pPr>
-            <a:lvl7pPr marL="2743200" algn="l" defTabSz="914400" rtl="0" eaLnBrk="1" latinLnBrk="0" hangingPunct="1">
-              <a:defRPr sz="1800" kern="1200">
-                <a:solidFill>
-                  <a:schemeClr val="tx1"/>
-                </a:solidFill>
-                <a:latin typeface="+mn-lt"/>
-                <a:ea typeface="+mn-ea"/>
-                <a:cs typeface="+mn-cs"/>
-              </a:defRPr>
-            </a:lvl7pPr>
-            <a:lvl8pPr marL="3200400" algn="l" defTabSz="914400" rtl="0" eaLnBrk="1" latinLnBrk="0" hangingPunct="1">
-              <a:defRPr sz="1800" kern="1200">
-                <a:solidFill>
-                  <a:schemeClr val="tx1"/>
-                </a:solidFill>
-                <a:latin typeface="+mn-lt"/>
-                <a:ea typeface="+mn-ea"/>
-                <a:cs typeface="+mn-cs"/>
-              </a:defRPr>
-            </a:lvl8pPr>
-            <a:lvl9pPr marL="3657600" algn="l" defTabSz="914400" rtl="0" eaLnBrk="1" latinLnBrk="0" hangingPunct="1">
-              <a:defRPr sz="1800" kern="1200">
-                <a:solidFill>
-                  <a:schemeClr val="tx1"/>
-                </a:solidFill>
-                <a:latin typeface="+mn-lt"/>
-                <a:ea typeface="+mn-ea"/>
-                <a:cs typeface="+mn-cs"/>
-              </a:defRPr>
-            </a:lvl9pPr>
-          </a:lstStyle>
-          <a:p>
-            <a:pPr marL="0" marR="0" lvl="0" indent="0" algn="ctr" defTabSz="914400" rtl="0" eaLnBrk="1" fontAlgn="auto" latinLnBrk="0" hangingPunct="1">
-              <a:lnSpc>
-                <a:spcPct val="100000"/>
-              </a:lnSpc>
-              <a:spcBef>
-                <a:spcPts val="0"/>
-              </a:spcBef>
-              <a:spcAft>
-                <a:spcPts val="0"/>
-              </a:spcAft>
-              <a:buClrTx/>
-              <a:buSzTx/>
-              <a:buFontTx/>
-              <a:buNone/>
-              <a:tabLst/>
-              <a:defRPr/>
-            </a:pPr>
-            <a:r>
-              <a:rPr kumimoji="0" lang="en-US" sz="1200" b="0" i="0" u="none" strike="noStrike" kern="1200" cap="none" spc="0" normalizeH="0" baseline="0" noProof="0" dirty="0">
-                <a:ln>
-                  <a:noFill/>
-                </a:ln>
-                <a:solidFill>
-                  <a:prstClr val="black">
-                    <a:tint val="75000"/>
-                  </a:prstClr>
-                </a:solidFill>
-                <a:effectLst/>
-                <a:uLnTx/>
-                <a:uFillTx/>
-                <a:latin typeface="Helvetica Neue" panose="02000503000000020004" pitchFamily="2" charset="0"/>
-                <a:ea typeface="Helvetica Neue" panose="02000503000000020004" pitchFamily="2" charset="0"/>
-                <a:cs typeface="Helvetica Neue" panose="02000503000000020004" pitchFamily="2" charset="0"/>
-              </a:rPr>
-              <a:t>J Mark Morris</a:t>
-            </a:r>
-          </a:p>
-        </p:txBody>
-      </p:sp>
-      <p:sp>
-        <p:nvSpPr>
-          <p:cNvPr id="4" name="Footer Placeholder 3">
-            <a:extLst>
-              <a:ext uri="{FF2B5EF4-FFF2-40B4-BE49-F238E27FC236}">
-                <a16:creationId id="{1B68B07E-A769-534E-8796-40D7B0B5F6BC}"/>
-              </a:ext>
-            </a:extLst>
-          </p:cNvPr>
-          <p:cNvSpPr>
-            <a:spLocks noGrp="1"/>
-          </p:cNvSpPr>
-          <p:nvPr>
-            <p:ph type="ftr" sz="quarter" idx="11"/>
-          </p:nvPr>
-        </p:nvSpPr>
-        <p:spPr>
-          <a:xfrm>
-            <a:off x="125489" y="6161041"/>
-            <a:ext cx="7420529" cy="365125"/>
-          </a:xfrm>
-        </p:spPr>
-        <p:txBody>
-          <a:bodyPr/>
-          <a:lstStyle/>
-          <a:p>
-            <a:pPr marL="0" marR="0" lvl="0" indent="0" algn="l" defTabSz="914400" rtl="0" eaLnBrk="1" fontAlgn="auto" latinLnBrk="0" hangingPunct="1">
-              <a:lnSpc>
-                <a:spcPct val="100000"/>
-              </a:lnSpc>
-              <a:spcBef>
-                <a:spcPts val="0"/>
-              </a:spcBef>
-              <a:spcAft>
-                <a:spcPts val="0"/>
-              </a:spcAft>
-              <a:buClrTx/>
-              <a:buSzTx/>
-              <a:buFontTx/>
-              <a:buNone/>
-              <a:tabLst/>
-              <a:defRPr/>
-            </a:pPr>
-            <a:r>
-              <a:rPr kumimoji="0" lang="en-US" sz="1200" b="0" i="0" u="none" strike="noStrike" kern="1200" cap="none" spc="0" normalizeH="0" baseline="0" noProof="0" dirty="0">
-                <a:ln>
-                  <a:noFill/>
-                </a:ln>
-                <a:solidFill>
-                  <a:prstClr val="black">
-                    <a:tint val="75000"/>
-                  </a:prstClr>
-                </a:solidFill>
-                <a:effectLst/>
-                <a:uLnTx/>
-                <a:uFillTx/>
-                <a:latin typeface="Helvetica Neue" panose="02000503000000020004" pitchFamily="2" charset="0"/>
-                <a:ea typeface="Helvetica Neue" panose="02000503000000020004" pitchFamily="2" charset="0"/>
-                <a:cs typeface="Helvetica Neue" panose="02000503000000020004" pitchFamily="2" charset="0"/>
-              </a:rPr>
-              <a:t>The concept of distance requires a minimum of two architrinos.</a:t>
-            </a:r>
-          </a:p>
-        </p:txBody>
-      </p:sp>
-      <p:sp>
-        <p:nvSpPr>
           <p:cNvPr id="8" name="TextBox 7">
             <a:extLst>
               <a:ext uri="{FF2B5EF4-FFF2-40B4-BE49-F238E27FC236}">
-                <a16:creationId id="{FC88E0D2-CC04-C29A-89B5-522618061201}"/>
+                <a16:creationId xmlns:a16="http://schemas.microsoft.com/office/drawing/2014/main" id="{FC88E0D2-CC04-C29A-89B5-522618061201}"/>
               </a:ext>
             </a:extLst>
           </p:cNvPr>
@@ -11896,7 +10546,7 @@
                 <a:ea typeface="Helvetica Neue" panose="02000503000000020004" pitchFamily="2" charset="0"/>
                 <a:cs typeface="Helvetica Neue" panose="02000503000000020004" pitchFamily="2" charset="0"/>
               </a:rPr>
-              <a:t>coordinate system </a:t>
+              <a:t>coordinate chart </a:t>
             </a:r>
             <a:r>
               <a:rPr kumimoji="0" lang="en-US" sz="5400" b="1" i="0" u="none" strike="noStrike" kern="1200" cap="none" spc="0" normalizeH="0" baseline="0" noProof="0" dirty="0">
@@ -11915,7 +10565,7 @@
                 <a:ea typeface="Helvetica Neue" panose="02000503000000020004" pitchFamily="2" charset="0"/>
                 <a:cs typeface="Helvetica Neue" panose="02000503000000020004" pitchFamily="2" charset="0"/>
               </a:rPr>
-              <a:t>for 1D time and 3D space </a:t>
+              <a:t>can describe the void.</a:t>
             </a:r>
           </a:p>
           <a:p>
@@ -11953,7 +10603,7 @@
                 <a:ea typeface="Helvetica Neue" panose="02000503000000020004" pitchFamily="2" charset="0"/>
                 <a:cs typeface="Helvetica Neue" panose="02000503000000020004" pitchFamily="2" charset="0"/>
               </a:rPr>
-              <a:t>may only be defined </a:t>
+              <a:t>Physical coordinates are anchored by </a:t>
             </a:r>
           </a:p>
           <a:p>
@@ -11989,7 +10639,7 @@
                 <a:ea typeface="Helvetica Neue" panose="02000503000000020004" pitchFamily="2" charset="0"/>
                 <a:cs typeface="Helvetica Neue" panose="02000503000000020004" pitchFamily="2" charset="0"/>
               </a:rPr>
-              <a:t>relative to architrino locations in time and space.</a:t>
+              <a:t>architrino locations and clock records.</a:t>
             </a:r>
           </a:p>
         </p:txBody>
@@ -12153,7 +10803,7 @@
     </p:spTree>
     <p:extLst>
       <p:ext uri="{BB962C8B-B14F-4D97-AF65-F5344CB8AC3E}">
-        <ns3:creationId val="4002265670"/>
+        <p14:creationId xmlns:p14="http://schemas.microsoft.com/office/powerpoint/2010/main" val="4002265670"/>
       </p:ext>
     </p:extLst>
   </p:cSld>
@@ -12164,7 +10814,7 @@
 </file>
 
 <file path=ppt/slides/slide8.xml><?xml version="1.0" encoding="utf-8"?>
-<p:sld xmlns:a="http://schemas.openxmlformats.org/drawingml/2006/main" xmlns:a16="http://schemas.microsoft.com/office/drawing/2014/main" xmlns:ns3="http://schemas.microsoft.com/office/powerpoint/2010/main" xmlns:p="http://schemas.openxmlformats.org/presentationml/2006/main">
+<p:sld xmlns:a="http://schemas.openxmlformats.org/drawingml/2006/main" xmlns:r="http://schemas.openxmlformats.org/officeDocument/2006/relationships" xmlns:p="http://schemas.openxmlformats.org/presentationml/2006/main">
   <p:cSld>
     <p:bg>
       <p:bgPr>
@@ -12190,172 +10840,10 @@
       </p:grpSpPr>
       <p:sp>
         <p:nvSpPr>
-          <p:cNvPr id="5" name="Footer Placeholder 3">
-            <a:extLst>
-              <a:ext uri="{FF2B5EF4-FFF2-40B4-BE49-F238E27FC236}">
-                <a16:creationId id="{668F77D6-DFDA-5A46-8DF1-47F6A167C2B1}"/>
-              </a:ext>
-            </a:extLst>
-          </p:cNvPr>
-          <p:cNvSpPr txBox="1">
-            <a:spLocks/>
-          </p:cNvSpPr>
-          <p:nvPr/>
-        </p:nvSpPr>
-        <p:spPr>
-          <a:xfrm>
-            <a:off x="10924248" y="6388602"/>
-            <a:ext cx="1142262" cy="365125"/>
-          </a:xfrm>
-          <a:prstGeom prst="rect">
-            <a:avLst/>
-          </a:prstGeom>
-        </p:spPr>
-        <p:txBody>
-          <a:bodyPr vert="horz" lIns="91440" tIns="45720" rIns="91440" bIns="45720" rtlCol="0" anchor="ctr"/>
-          <a:lstStyle>
-            <a:defPPr>
-              <a:defRPr lang="en-US"/>
-            </a:defPPr>
-            <a:lvl1pPr marL="0" algn="ctr" defTabSz="914400" rtl="0" eaLnBrk="1" latinLnBrk="0" hangingPunct="1">
-              <a:defRPr sz="1200" kern="1200">
-                <a:solidFill>
-                  <a:schemeClr val="tx1">
-                    <a:tint val="75000"/>
-                  </a:schemeClr>
-                </a:solidFill>
-                <a:latin typeface="+mn-lt"/>
-                <a:ea typeface="+mn-ea"/>
-                <a:cs typeface="+mn-cs"/>
-              </a:defRPr>
-            </a:lvl1pPr>
-            <a:lvl2pPr marL="457200" algn="l" defTabSz="914400" rtl="0" eaLnBrk="1" latinLnBrk="0" hangingPunct="1">
-              <a:defRPr sz="1800" kern="1200">
-                <a:solidFill>
-                  <a:schemeClr val="tx1"/>
-                </a:solidFill>
-                <a:latin typeface="+mn-lt"/>
-                <a:ea typeface="+mn-ea"/>
-                <a:cs typeface="+mn-cs"/>
-              </a:defRPr>
-            </a:lvl2pPr>
-            <a:lvl3pPr marL="914400" algn="l" defTabSz="914400" rtl="0" eaLnBrk="1" latinLnBrk="0" hangingPunct="1">
-              <a:defRPr sz="1800" kern="1200">
-                <a:solidFill>
-                  <a:schemeClr val="tx1"/>
-                </a:solidFill>
-                <a:latin typeface="+mn-lt"/>
-                <a:ea typeface="+mn-ea"/>
-                <a:cs typeface="+mn-cs"/>
-              </a:defRPr>
-            </a:lvl3pPr>
-            <a:lvl4pPr marL="1371600" algn="l" defTabSz="914400" rtl="0" eaLnBrk="1" latinLnBrk="0" hangingPunct="1">
-              <a:defRPr sz="1800" kern="1200">
-                <a:solidFill>
-                  <a:schemeClr val="tx1"/>
-                </a:solidFill>
-                <a:latin typeface="+mn-lt"/>
-                <a:ea typeface="+mn-ea"/>
-                <a:cs typeface="+mn-cs"/>
-              </a:defRPr>
-            </a:lvl4pPr>
-            <a:lvl5pPr marL="1828800" algn="l" defTabSz="914400" rtl="0" eaLnBrk="1" latinLnBrk="0" hangingPunct="1">
-              <a:defRPr sz="1800" kern="1200">
-                <a:solidFill>
-                  <a:schemeClr val="tx1"/>
-                </a:solidFill>
-                <a:latin typeface="+mn-lt"/>
-                <a:ea typeface="+mn-ea"/>
-                <a:cs typeface="+mn-cs"/>
-              </a:defRPr>
-            </a:lvl5pPr>
-            <a:lvl6pPr marL="2286000" algn="l" defTabSz="914400" rtl="0" eaLnBrk="1" latinLnBrk="0" hangingPunct="1">
-              <a:defRPr sz="1800" kern="1200">
-                <a:solidFill>
-                  <a:schemeClr val="tx1"/>
-                </a:solidFill>
-                <a:latin typeface="+mn-lt"/>
-                <a:ea typeface="+mn-ea"/>
-                <a:cs typeface="+mn-cs"/>
-              </a:defRPr>
-            </a:lvl6pPr>
-            <a:lvl7pPr marL="2743200" algn="l" defTabSz="914400" rtl="0" eaLnBrk="1" latinLnBrk="0" hangingPunct="1">
-              <a:defRPr sz="1800" kern="1200">
-                <a:solidFill>
-                  <a:schemeClr val="tx1"/>
-                </a:solidFill>
-                <a:latin typeface="+mn-lt"/>
-                <a:ea typeface="+mn-ea"/>
-                <a:cs typeface="+mn-cs"/>
-              </a:defRPr>
-            </a:lvl7pPr>
-            <a:lvl8pPr marL="3200400" algn="l" defTabSz="914400" rtl="0" eaLnBrk="1" latinLnBrk="0" hangingPunct="1">
-              <a:defRPr sz="1800" kern="1200">
-                <a:solidFill>
-                  <a:schemeClr val="tx1"/>
-                </a:solidFill>
-                <a:latin typeface="+mn-lt"/>
-                <a:ea typeface="+mn-ea"/>
-                <a:cs typeface="+mn-cs"/>
-              </a:defRPr>
-            </a:lvl8pPr>
-            <a:lvl9pPr marL="3657600" algn="l" defTabSz="914400" rtl="0" eaLnBrk="1" latinLnBrk="0" hangingPunct="1">
-              <a:defRPr sz="1800" kern="1200">
-                <a:solidFill>
-                  <a:schemeClr val="tx1"/>
-                </a:solidFill>
-                <a:latin typeface="+mn-lt"/>
-                <a:ea typeface="+mn-ea"/>
-                <a:cs typeface="+mn-cs"/>
-              </a:defRPr>
-            </a:lvl9pPr>
-          </a:lstStyle>
-          <a:p>
-            <a:pPr marL="0" marR="0" lvl="0" indent="0" algn="ctr" defTabSz="914400" rtl="0" eaLnBrk="1" fontAlgn="auto" latinLnBrk="0" hangingPunct="1">
-              <a:lnSpc>
-                <a:spcPct val="100000"/>
-              </a:lnSpc>
-              <a:spcBef>
-                <a:spcPts val="0"/>
-              </a:spcBef>
-              <a:spcAft>
-                <a:spcPts val="0"/>
-              </a:spcAft>
-              <a:buClrTx/>
-              <a:buSzTx/>
-              <a:buFontTx/>
-              <a:buNone/>
-              <a:tabLst/>
-              <a:defRPr/>
-            </a:pPr>
-            <a:r>
-              <a:rPr kumimoji="0" lang="en-US" sz="1200" b="0" i="0" u="none" strike="noStrike" kern="1200" cap="none" spc="0" normalizeH="0" baseline="0" noProof="0" dirty="0">
-                <a:ln>
-                  <a:noFill/>
-                </a:ln>
-                <a:solidFill>
-                  <a:prstClr val="black">
-                    <a:tint val="75000"/>
-                  </a:prstClr>
-                </a:solidFill>
-                <a:effectLst/>
-                <a:uLnTx/>
-                <a:uFillTx/>
-                <a:latin typeface="Helvetica Neue" panose="02000503000000020004" pitchFamily="2" charset="0"/>
-                <a:ea typeface="Helvetica Neue" panose="02000503000000020004" pitchFamily="2" charset="0"/>
-                <a:cs typeface="Helvetica Neue" panose="02000503000000020004" pitchFamily="2" charset="0"/>
-              </a:rPr>
-              <a:t>J Mark Morris</a:t>
-            </a:r>
-          </a:p>
-        </p:txBody>
-      </p:sp>
-      <p:sp>
-        <p:nvSpPr>
           <p:cNvPr id="8" name="TextBox 7">
             <a:extLst>
               <a:ext uri="{FF2B5EF4-FFF2-40B4-BE49-F238E27FC236}">
-                <a16:creationId id="{FC88E0D2-CC04-C29A-89B5-522618061201}"/>
+                <a16:creationId xmlns:a16="http://schemas.microsoft.com/office/drawing/2014/main" id="{FC88E0D2-CC04-C29A-89B5-522618061201}"/>
               </a:ext>
             </a:extLst>
           </p:cNvPr>
@@ -12749,7 +11237,7 @@
     </p:spTree>
     <p:extLst>
       <p:ext uri="{BB962C8B-B14F-4D97-AF65-F5344CB8AC3E}">
-        <ns3:creationId val="2532534914"/>
+        <p14:creationId xmlns:p14="http://schemas.microsoft.com/office/powerpoint/2010/main" val="2532534914"/>
       </p:ext>
     </p:extLst>
   </p:cSld>
@@ -12760,7 +11248,7 @@
 </file>
 
 <file path=ppt/slides/slide9.xml><?xml version="1.0" encoding="utf-8"?>
-<p:sld xmlns:a="http://schemas.openxmlformats.org/drawingml/2006/main" xmlns:a16="http://schemas.microsoft.com/office/drawing/2014/main" xmlns:ns3="http://schemas.microsoft.com/office/powerpoint/2010/main" xmlns:ns4="http://schemas.openxmlformats.org/drawingml/2006/diagram" xmlns:p="http://schemas.openxmlformats.org/presentationml/2006/main" xmlns:r="http://schemas.openxmlformats.org/officeDocument/2006/relationships">
+<p:sld xmlns:a="http://schemas.openxmlformats.org/drawingml/2006/main" xmlns:r="http://schemas.openxmlformats.org/officeDocument/2006/relationships" xmlns:p="http://schemas.openxmlformats.org/presentationml/2006/main">
   <p:cSld>
     <p:bg>
       <p:bgPr>
@@ -12789,7 +11277,7 @@
           <p:cNvPr id="3" name="Content Placeholder 2">
             <a:extLst>
               <a:ext uri="{FF2B5EF4-FFF2-40B4-BE49-F238E27FC236}">
-                <a16:creationId id="{655016B4-9A13-3344-B498-1697D51A95EF}"/>
+                <a16:creationId xmlns:a16="http://schemas.microsoft.com/office/drawing/2014/main" id="{655016B4-9A13-3344-B498-1697D51A95EF}"/>
               </a:ext>
             </a:extLst>
           </p:cNvPr>
@@ -12802,8 +11290,8 @@
         </p:nvSpPr>
         <p:spPr>
           <a:xfrm>
-            <a:off x="950622" y="242780"/>
-            <a:ext cx="10637822" cy="1821575"/>
+            <a:off x="0" y="242781"/>
+            <a:ext cx="12192000" cy="842442"/>
           </a:xfrm>
         </p:spPr>
         <p:txBody>
@@ -12812,11 +11300,11 @@
           </a:bodyPr>
           <a:lstStyle/>
           <a:p>
-            <a:pPr marL="0" indent="0">
+            <a:pPr marL="0" indent="0" algn="ctr">
               <a:buNone/>
             </a:pPr>
             <a:r>
-              <a:rPr lang="en-US" sz="6000" b="1" dirty="0">
+              <a:rPr lang="en-US" sz="5400" b="1" dirty="0">
                 <a:solidFill>
                   <a:schemeClr val="bg1"/>
                 </a:solidFill>
@@ -12826,7 +11314,7 @@
               </a:rPr>
               <a:t>The Void of Time and Space</a:t>
             </a:r>
-            <a:endParaRPr lang="en-US" sz="3200" b="1" dirty="0">
+            <a:endParaRPr lang="en-US" b="1" dirty="0">
               <a:solidFill>
                 <a:schemeClr val="bg1"/>
               </a:solidFill>
@@ -12839,7 +11327,7 @@
           <p:cNvPr id="2" name="Diagram 1">
             <a:extLst>
               <a:ext uri="{FF2B5EF4-FFF2-40B4-BE49-F238E27FC236}">
-                <a16:creationId id="{1B6E1679-1C21-B23A-E791-875861BEDA0B}"/>
+                <a16:creationId xmlns:a16="http://schemas.microsoft.com/office/drawing/2014/main" id="{1B6E1679-1C21-B23A-E791-875861BEDA0B}"/>
               </a:ext>
             </a:extLst>
           </p:cNvPr>
@@ -12847,7 +11335,7 @@
           <p:nvPr>
             <p:extLst>
               <p:ext uri="{D42A27DB-BD31-4B8C-83A1-F6EECF244321}">
-                <ns3:modId val="1687234936"/>
+                <p14:modId xmlns:p14="http://schemas.microsoft.com/office/powerpoint/2010/main" val="1687234936"/>
               </p:ext>
             </p:extLst>
           </p:nvPr>
@@ -12858,7 +11346,7 @@
         </p:xfrm>
         <a:graphic>
           <a:graphicData uri="http://schemas.openxmlformats.org/drawingml/2006/diagram">
-            <ns4:relIds r:dm="rId2" r:lo="rId3" r:qs="rId4" r:cs="rId5"/>
+            <dgm:relIds xmlns:dgm="http://schemas.openxmlformats.org/drawingml/2006/diagram" xmlns:r="http://schemas.openxmlformats.org/officeDocument/2006/relationships" r:dm="rId2" r:lo="rId3" r:qs="rId4" r:cs="rId5"/>
           </a:graphicData>
         </a:graphic>
       </p:graphicFrame>
@@ -13021,7 +11509,7 @@
     </p:spTree>
     <p:extLst>
       <p:ext uri="{BB962C8B-B14F-4D97-AF65-F5344CB8AC3E}">
-        <ns3:creationId val="3392193694"/>
+        <p14:creationId xmlns:p14="http://schemas.microsoft.com/office/powerpoint/2010/main" val="3392193694"/>
       </p:ext>
     </p:extLst>
   </p:cSld>
